--- a/lecons/F3/38_FORM4_LESSON34_Condensation.pptx
+++ b/lecons/F3/38_FORM4_LESSON34_Condensation.pptx
@@ -49,9 +49,18 @@
     <p:sldId id="297" r:id="rId43"/>
     <p:sldId id="298" r:id="rId44"/>
     <p:sldId id="299" r:id="rId45"/>
+    <p:sldId id="300" r:id="rId46"/>
+    <p:sldId id="301" r:id="rId47"/>
+    <p:sldId id="302" r:id="rId48"/>
+    <p:sldId id="303" r:id="rId49"/>
+    <p:sldId id="304" r:id="rId50"/>
+    <p:sldId id="305" r:id="rId51"/>
+    <p:sldId id="306" r:id="rId52"/>
+    <p:sldId id="307" r:id="rId53"/>
+    <p:sldId id="308" r:id="rId54"/>
   </p:sldIdLst>
   <p:notesMasterIdLst>
-    <p:notesMasterId r:id="rId46"/>
+    <p:notesMasterId r:id="rId55"/>
   </p:notesMasterIdLst>
   <p:sldSz cx="12192000" cy="6858000"/>
   <p:notesSz cx="6858000" cy="12192000"/>
@@ -633,7 +642,7 @@
           <a:p>
             <a:r>
               <a:rPr lang="en-US" dirty="0"/>
-              <a:t>Listen carefully to this situation from real life. On a hot afternoon, Yaya takes a cold bottle out of the refrigerator. After a few minutes, drops of water cover the outside of the bottle. The bottle is closed. Think about it, because I am going to ask you some questions.</a:t>
+              <a:t>Listen carefully to this situation from real life. On a hot afternoon, Yaya takes a cold bottle out of the refrigerator. After a few minutes, drops of water cover the outside of the closed bottle. He asks: "Where do these drops come from, and is this how clouds and fog are formed?" Think about it, because I am going to ask you some questions.</a:t>
             </a:r>
             <a:endParaRPr lang="en-US" dirty="0"/>
           </a:p>
@@ -809,7 +818,7 @@
           <a:p>
             <a:r>
               <a:rPr lang="en-US" dirty="0"/>
-              <a:t>Good. Yaya does not know where the drops come from.</a:t>
+              <a:t>Good. Yaya does not know where the drops come from and how clouds and fog form.</a:t>
             </a:r>
             <a:endParaRPr lang="en-US" dirty="0"/>
           </a:p>
@@ -897,7 +906,7 @@
           <a:p>
             <a:r>
               <a:rPr lang="en-US" dirty="0"/>
-              <a:t>Question 2: Where is the water from? Think for a moment, then raise your hand to answer.</a:t>
+              <a:t>Question 2: Is the bottle closed or open? Think for a moment, then raise your hand to answer.</a:t>
             </a:r>
             <a:endParaRPr lang="en-US" dirty="0"/>
           </a:p>
@@ -985,7 +994,7 @@
           <a:p>
             <a:r>
               <a:rPr lang="en-US" dirty="0"/>
-              <a:t>Good. From the water vapour in the air.</a:t>
+              <a:t>Good. It is closed.</a:t>
             </a:r>
             <a:endParaRPr lang="en-US" dirty="0"/>
           </a:p>
@@ -1073,7 +1082,7 @@
           <a:p>
             <a:r>
               <a:rPr lang="en-US" dirty="0"/>
-              <a:t>Question 3: What changed it into drops? Think for a moment, then raise your hand to answer.</a:t>
+              <a:t>Question 3: Where does the water come from? Think for a moment, then raise your hand to answer.</a:t>
             </a:r>
             <a:endParaRPr lang="en-US" dirty="0"/>
           </a:p>
@@ -1161,7 +1170,7 @@
           <a:p>
             <a:r>
               <a:rPr lang="en-US" dirty="0"/>
-              <a:t>Good. The cold bottle cooled the air.</a:t>
+              <a:t>Good. From the water vapour in the air, cooled by the cold bottle.</a:t>
             </a:r>
             <a:endParaRPr lang="en-US" dirty="0"/>
           </a:p>
@@ -1425,7 +1434,7 @@
           <a:p>
             <a:r>
               <a:rPr lang="en-US" dirty="0"/>
-              <a:t>Activity 1. Look carefully at this picture: drops of water on a cold bottle. Observe every detail before I ask the question.</a:t>
+              <a:t>Activity 1. Look carefully at this picture: a cold bottle with drops of water. Observe every detail before I ask the question.</a:t>
             </a:r>
             <a:endParaRPr lang="en-US" dirty="0"/>
           </a:p>
@@ -1777,7 +1786,7 @@
           <a:p>
             <a:r>
               <a:rPr lang="en-US" dirty="0"/>
-              <a:t>Activity 2. Look carefully at this picture: fog in the valleys in the morning. Observe every detail before I ask the question.</a:t>
+              <a:t>Activity 2. Look carefully at this picture: a foggy morning. Observe every detail before I ask the question.</a:t>
             </a:r>
             <a:endParaRPr lang="en-US" dirty="0"/>
           </a:p>
@@ -2041,7 +2050,7 @@
           <a:p>
             <a:r>
               <a:rPr lang="en-US" dirty="0"/>
-              <a:t>Activity 3. Look carefully at this picture: a very tall storm cloud. Observe every detail before I ask the question.</a:t>
+              <a:t>Activity 3. Look carefully at this picture: a huge storm cloud. Observe every detail before I ask the question.</a:t>
             </a:r>
             <a:endParaRPr lang="en-US" dirty="0"/>
           </a:p>
@@ -2393,7 +2402,7 @@
           <a:p>
             <a:r>
               <a:rPr lang="en-US" dirty="0"/>
-              <a:t>Let us copy Meaning of Condensation. Condensation and its conditions are explained as follows. On this slide we have Condensation and Dew point. Write each point on a new line, with the key term first, and explain it in your own words when we revise. When you finish, we go to the next slide.</a:t>
+              <a:t>Let us copy the definitions. The key terms of this lesson are defined as follows. On this slide we have Condensation and Saturation. Write each point on a new line, with the key term first, and explain it in your own words when we revise. When you finish, we go to the next slide.</a:t>
             </a:r>
             <a:endParaRPr lang="en-US" dirty="0"/>
           </a:p>
@@ -2569,7 +2578,7 @@
           <a:p>
             <a:r>
               <a:rPr lang="en-US" dirty="0"/>
-              <a:t>We continue with Meaning of Condensation. On this slide we have Conditions. Write each point on a new line, with the key term first, and explain it in your own words when we revise.</a:t>
+              <a:t>We continue with the definitions. On this slide we have Dew point. Write each point on a new line, with the key term first, and explain it in your own words when we revise.</a:t>
             </a:r>
             <a:endParaRPr lang="en-US" dirty="0"/>
           </a:p>
@@ -2657,7 +2666,7 @@
           <a:p>
             <a:r>
               <a:rPr lang="en-US" dirty="0"/>
-              <a:t>Let us copy Forms of Condensation. Condensation takes the following forms. On this slide we have Dew and Fog and mist. Write each point on a new line, with the key term first, and explain it in your own words when we revise. When you finish, we go to the next slide.</a:t>
+              <a:t>Let us copy Meaning of Condensation. Condensation takes place under the following conditions. On this slide we have Moist air. Write each point on a new line, with the key term first, and explain it in your own words when we revise.</a:t>
             </a:r>
             <a:endParaRPr lang="en-US" dirty="0"/>
           </a:p>
@@ -2745,7 +2754,7 @@
           <a:p>
             <a:r>
               <a:rPr lang="en-US" dirty="0"/>
-              <a:t>We continue with Forms of Condensation. On this slide we have Clouds and Frost. Write each point on a new line, with the key term first, and explain it in your own words when we revise.</a:t>
+              <a:t>Copy the point on Cooling to the dew point on the left, then draw the diagram on the right: condensation on a cold bottle. Give it a title and label it clearly.</a:t>
             </a:r>
             <a:endParaRPr lang="en-US" dirty="0"/>
           </a:p>
@@ -2833,7 +2842,7 @@
           <a:p>
             <a:r>
               <a:rPr lang="en-US" dirty="0"/>
-              <a:t>Now let us check what you have understood. Question 1: What is condensation? Answer in your exercise book.</a:t>
+              <a:t>We continue with Meaning of Condensation. On this slide we have Condensation nuclei. Write each point on a new line, with the key term first, and explain it in your own words when we revise.</a:t>
             </a:r>
             <a:endParaRPr lang="en-US" dirty="0"/>
           </a:p>
@@ -2921,7 +2930,7 @@
           <a:p>
             <a:r>
               <a:rPr lang="en-US" dirty="0"/>
-              <a:t>The expected answer is: the change of water vapour into water. If you got it right, well done.</a:t>
+              <a:t>Let us copy Near the Ground. Condensation near the ground takes the following forms. Copy the point on Dew on the left, then draw the diagram on the right: dew. Give it a title and label it clearly.</a:t>
             </a:r>
             <a:endParaRPr lang="en-US" dirty="0"/>
           </a:p>
@@ -3009,7 +3018,7 @@
           <a:p>
             <a:r>
               <a:rPr lang="en-US" dirty="0"/>
-              <a:t>Now let us check what you have understood. Question 2: Which cloud brings thunderstorms? Answer in your exercise book.</a:t>
+              <a:t>We continue with Near the Ground. On this slide we have Frost. Write each point on a new line, with the key term first, and explain it in your own words when we revise.</a:t>
             </a:r>
             <a:endParaRPr lang="en-US" dirty="0"/>
           </a:p>
@@ -3097,7 +3106,7 @@
           <a:p>
             <a:r>
               <a:rPr lang="en-US" dirty="0"/>
-              <a:t>The expected answer is: the cumulonimbus. If you got it right, well done.</a:t>
+              <a:t>Copy the point on Fog on the left, then draw the diagram on the right: fog. Give it a title and label it clearly.</a:t>
             </a:r>
             <a:endParaRPr lang="en-US" dirty="0"/>
           </a:p>
@@ -3185,7 +3194,7 @@
           <a:p>
             <a:r>
               <a:rPr lang="en-US" dirty="0"/>
-              <a:t>For those who need more practice, fill in the blanks in your exercise book. The answers are: number 1, condensation; number 2, dew; number 3, fog.</a:t>
+              <a:t>We continue with Near the Ground. On this slide we have Mist. Write each point on a new line, with the key term first, and explain it in your own words when we revise.</a:t>
             </a:r>
             <a:endParaRPr lang="en-US" dirty="0"/>
           </a:p>
@@ -3273,7 +3282,7 @@
           <a:p>
             <a:r>
               <a:rPr lang="en-US" dirty="0"/>
-              <a:t>For your homework: During the next rain, put an empty tin with straight sides in an open place. After the rain, measure the depth of water in it with a ruler, in millimetres. We shall correct it at the beginning of our next lesson.</a:t>
+              <a:t>Let us copy In the Atmosphere. Condensation in the atmosphere forms the following clouds. Copy the point on Cirrus on the left, then draw the diagram on the right: types of clouds. Give it a title and label it clearly.</a:t>
             </a:r>
             <a:endParaRPr lang="en-US" dirty="0"/>
           </a:p>
@@ -3361,7 +3370,7 @@
           <a:p>
             <a:r>
               <a:rPr lang="en-US" dirty="0"/>
-              <a:t>Our next lesson will be on Lesson 35: Precipitation. Thank you for your attention, and see you next time.</a:t>
+              <a:t>We continue with In the Atmosphere. On this slide we have Stratus. Write each point on a new line, with the key term first, and explain it in your own words when we revise.</a:t>
             </a:r>
             <a:endParaRPr lang="en-US" dirty="0"/>
           </a:p>
@@ -3537,7 +3546,7 @@
           <a:p>
             <a:r>
               <a:rPr lang="en-US" dirty="0"/>
-              <a:t>Let us play the bilingual game. I say a word in English, and you give me the French word. Then we do the reverse.</a:t>
+              <a:t>Copy the point on Cumulus on the left, then draw the diagram on the right: cumulus clouds. Give it a title and label it clearly.</a:t>
             </a:r>
             <a:endParaRPr lang="en-US" dirty="0"/>
           </a:p>
@@ -3625,7 +3634,7 @@
           <a:p>
             <a:r>
               <a:rPr lang="en-US" dirty="0"/>
-              <a:t>I record this information in the official logbook of the class after the lesson.</a:t>
+              <a:t>Copy the point on Cumulonimbus on the left, then draw the diagram on the right: a cumulonimbus. Give it a title and label it clearly.</a:t>
             </a:r>
             <a:endParaRPr lang="en-US" dirty="0"/>
           </a:p>
@@ -3713,7 +3722,7 @@
           <a:p>
             <a:r>
               <a:rPr lang="en-US" dirty="0"/>
-              <a:t>I complete the second page of the logbook: the matter taught, the evaluation, the homework and the attendance.</a:t>
+              <a:t>Now let us check what you have understood. Question 1: What is condensation? Answer in your exercise book.</a:t>
             </a:r>
             <a:endParaRPr lang="en-US" dirty="0"/>
           </a:p>
@@ -3801,7 +3810,7 @@
           <a:p>
             <a:r>
               <a:rPr lang="en-US" dirty="0"/>
-              <a:t>This slide is for me, the teacher: it gives the timing of the lesson and what to do if the projector is not available.</a:t>
+              <a:t>The expected answer is: the change of water vapour into water. If you got it right, well done.</a:t>
             </a:r>
             <a:endParaRPr lang="en-US" dirty="0"/>
           </a:p>
@@ -3889,7 +3898,7 @@
           <a:p>
             <a:r>
               <a:rPr lang="en-US" dirty="0"/>
-              <a:t>These are the references and picture credits used to prepare this lesson.</a:t>
+              <a:t>Now let us check what you have understood. Question 2: Which cloud brings thunderstorms? Answer in your exercise book.</a:t>
             </a:r>
             <a:endParaRPr lang="en-US" dirty="0"/>
           </a:p>
@@ -3913,6 +3922,446 @@
             <a:fld id="{F7021451-1387-4CA6-816F-3879F97B5CBC}" type="slidenum">
               <a:rPr lang="en-US"/>
               <a:t>44</a:t>
+            </a:fld>
+            <a:endParaRPr lang="en-US"/>
+          </a:p>
+        </p:txBody>
+      </p:sp>
+    </p:spTree>
+    <p:extLst>
+      <p:ext uri="{BB962C8B-B14F-4D97-AF65-F5344CB8AC3E}">
+        <p14:creationId xmlns:p14="http://schemas.microsoft.com/office/powerpoint/2010/main" val="1024086991"/>
+      </p:ext>
+    </p:extLst>
+  </p:cSld>
+  <p:clrMapOvr>
+    <a:masterClrMapping/>
+  </p:clrMapOvr>
+</p:notes>
+</file>
+
+<file path=ppt/notesSlides/notesSlide45.xml><?xml version="1.0" encoding="utf-8"?>
+<p:notes xmlns:a="http://schemas.openxmlformats.org/drawingml/2006/main" xmlns:r="http://schemas.openxmlformats.org/officeDocument/2006/relationships" xmlns:p="http://schemas.openxmlformats.org/presentationml/2006/main">
+  <p:cSld>
+    <p:spTree>
+      <p:nvGrpSpPr>
+        <p:cNvPr id="1" name=""/>
+        <p:cNvGrpSpPr/>
+        <p:nvPr/>
+      </p:nvGrpSpPr>
+      <p:grpSpPr>
+        <a:xfrm>
+          <a:off x="0" y="0"/>
+          <a:ext cx="0" cy="0"/>
+          <a:chOff x="0" y="0"/>
+          <a:chExt cx="0" cy="0"/>
+        </a:xfrm>
+      </p:grpSpPr>
+      <p:sp>
+        <p:nvSpPr>
+          <p:cNvPr id="2" name="Slide Image Placeholder 1"/>
+          <p:cNvSpPr>
+            <a:spLocks noGrp="1" noRot="1" noChangeAspect="1"/>
+          </p:cNvSpPr>
+          <p:nvPr>
+            <p:ph type="sldImg"/>
+          </p:nvPr>
+        </p:nvSpPr>
+        <p:spPr/>
+      </p:sp>
+      <p:sp>
+        <p:nvSpPr>
+          <p:cNvPr id="3" name="Notes Placeholder 2"/>
+          <p:cNvSpPr>
+            <a:spLocks noGrp="1"/>
+          </p:cNvSpPr>
+          <p:nvPr>
+            <p:ph type="body" idx="1"/>
+          </p:nvPr>
+        </p:nvSpPr>
+        <p:spPr/>
+        <p:txBody>
+          <a:bodyPr/>
+          <a:lstStyle/>
+          <a:p>
+            <a:r>
+              <a:rPr lang="en-US" dirty="0"/>
+              <a:t>The expected answer is: the cumulonimbus. If you got it right, well done.</a:t>
+            </a:r>
+            <a:endParaRPr lang="en-US" dirty="0"/>
+          </a:p>
+        </p:txBody>
+      </p:sp>
+      <p:sp>
+        <p:nvSpPr>
+          <p:cNvPr id="4" name="Slide Number Placeholder 3"/>
+          <p:cNvSpPr>
+            <a:spLocks noGrp="1"/>
+          </p:cNvSpPr>
+          <p:nvPr>
+            <p:ph type="sldNum" sz="quarter" idx="10"/>
+          </p:nvPr>
+        </p:nvSpPr>
+        <p:spPr/>
+        <p:txBody>
+          <a:bodyPr/>
+          <a:lstStyle/>
+          <a:p>
+            <a:fld id="{F7021451-1387-4CA6-816F-3879F97B5CBC}" type="slidenum">
+              <a:rPr lang="en-US"/>
+              <a:t>45</a:t>
+            </a:fld>
+            <a:endParaRPr lang="en-US"/>
+          </a:p>
+        </p:txBody>
+      </p:sp>
+    </p:spTree>
+    <p:extLst>
+      <p:ext uri="{BB962C8B-B14F-4D97-AF65-F5344CB8AC3E}">
+        <p14:creationId xmlns:p14="http://schemas.microsoft.com/office/powerpoint/2010/main" val="1024086991"/>
+      </p:ext>
+    </p:extLst>
+  </p:cSld>
+  <p:clrMapOvr>
+    <a:masterClrMapping/>
+  </p:clrMapOvr>
+</p:notes>
+</file>
+
+<file path=ppt/notesSlides/notesSlide46.xml><?xml version="1.0" encoding="utf-8"?>
+<p:notes xmlns:a="http://schemas.openxmlformats.org/drawingml/2006/main" xmlns:r="http://schemas.openxmlformats.org/officeDocument/2006/relationships" xmlns:p="http://schemas.openxmlformats.org/presentationml/2006/main">
+  <p:cSld>
+    <p:spTree>
+      <p:nvGrpSpPr>
+        <p:cNvPr id="1" name=""/>
+        <p:cNvGrpSpPr/>
+        <p:nvPr/>
+      </p:nvGrpSpPr>
+      <p:grpSpPr>
+        <a:xfrm>
+          <a:off x="0" y="0"/>
+          <a:ext cx="0" cy="0"/>
+          <a:chOff x="0" y="0"/>
+          <a:chExt cx="0" cy="0"/>
+        </a:xfrm>
+      </p:grpSpPr>
+      <p:sp>
+        <p:nvSpPr>
+          <p:cNvPr id="2" name="Slide Image Placeholder 1"/>
+          <p:cNvSpPr>
+            <a:spLocks noGrp="1" noRot="1" noChangeAspect="1"/>
+          </p:cNvSpPr>
+          <p:nvPr>
+            <p:ph type="sldImg"/>
+          </p:nvPr>
+        </p:nvSpPr>
+        <p:spPr/>
+      </p:sp>
+      <p:sp>
+        <p:nvSpPr>
+          <p:cNvPr id="3" name="Notes Placeholder 2"/>
+          <p:cNvSpPr>
+            <a:spLocks noGrp="1"/>
+          </p:cNvSpPr>
+          <p:nvPr>
+            <p:ph type="body" idx="1"/>
+          </p:nvPr>
+        </p:nvSpPr>
+        <p:spPr/>
+        <p:txBody>
+          <a:bodyPr/>
+          <a:lstStyle/>
+          <a:p>
+            <a:r>
+              <a:rPr lang="en-US" dirty="0"/>
+              <a:t>For those who need more practice, fill in the blanks in your exercise book. The answers are: number 1, condensation; number 2, dew; number 3, fog.</a:t>
+            </a:r>
+            <a:endParaRPr lang="en-US" dirty="0"/>
+          </a:p>
+        </p:txBody>
+      </p:sp>
+      <p:sp>
+        <p:nvSpPr>
+          <p:cNvPr id="4" name="Slide Number Placeholder 3"/>
+          <p:cNvSpPr>
+            <a:spLocks noGrp="1"/>
+          </p:cNvSpPr>
+          <p:nvPr>
+            <p:ph type="sldNum" sz="quarter" idx="10"/>
+          </p:nvPr>
+        </p:nvSpPr>
+        <p:spPr/>
+        <p:txBody>
+          <a:bodyPr/>
+          <a:lstStyle/>
+          <a:p>
+            <a:fld id="{F7021451-1387-4CA6-816F-3879F97B5CBC}" type="slidenum">
+              <a:rPr lang="en-US"/>
+              <a:t>46</a:t>
+            </a:fld>
+            <a:endParaRPr lang="en-US"/>
+          </a:p>
+        </p:txBody>
+      </p:sp>
+    </p:spTree>
+    <p:extLst>
+      <p:ext uri="{BB962C8B-B14F-4D97-AF65-F5344CB8AC3E}">
+        <p14:creationId xmlns:p14="http://schemas.microsoft.com/office/powerpoint/2010/main" val="1024086991"/>
+      </p:ext>
+    </p:extLst>
+  </p:cSld>
+  <p:clrMapOvr>
+    <a:masterClrMapping/>
+  </p:clrMapOvr>
+</p:notes>
+</file>
+
+<file path=ppt/notesSlides/notesSlide47.xml><?xml version="1.0" encoding="utf-8"?>
+<p:notes xmlns:a="http://schemas.openxmlformats.org/drawingml/2006/main" xmlns:r="http://schemas.openxmlformats.org/officeDocument/2006/relationships" xmlns:p="http://schemas.openxmlformats.org/presentationml/2006/main">
+  <p:cSld>
+    <p:spTree>
+      <p:nvGrpSpPr>
+        <p:cNvPr id="1" name=""/>
+        <p:cNvGrpSpPr/>
+        <p:nvPr/>
+      </p:nvGrpSpPr>
+      <p:grpSpPr>
+        <a:xfrm>
+          <a:off x="0" y="0"/>
+          <a:ext cx="0" cy="0"/>
+          <a:chOff x="0" y="0"/>
+          <a:chExt cx="0" cy="0"/>
+        </a:xfrm>
+      </p:grpSpPr>
+      <p:sp>
+        <p:nvSpPr>
+          <p:cNvPr id="2" name="Slide Image Placeholder 1"/>
+          <p:cNvSpPr>
+            <a:spLocks noGrp="1" noRot="1" noChangeAspect="1"/>
+          </p:cNvSpPr>
+          <p:nvPr>
+            <p:ph type="sldImg"/>
+          </p:nvPr>
+        </p:nvSpPr>
+        <p:spPr/>
+      </p:sp>
+      <p:sp>
+        <p:nvSpPr>
+          <p:cNvPr id="3" name="Notes Placeholder 2"/>
+          <p:cNvSpPr>
+            <a:spLocks noGrp="1"/>
+          </p:cNvSpPr>
+          <p:nvPr>
+            <p:ph type="body" idx="1"/>
+          </p:nvPr>
+        </p:nvSpPr>
+        <p:spPr/>
+        <p:txBody>
+          <a:bodyPr/>
+          <a:lstStyle/>
+          <a:p>
+            <a:r>
+              <a:rPr lang="en-US" dirty="0"/>
+              <a:t>For your homework: During the next rain, put an empty tin with straight sides in an open place. After the rain, measure the depth of water in it with a ruler, in millimetres. We shall correct it at the beginning of our next lesson.</a:t>
+            </a:r>
+            <a:endParaRPr lang="en-US" dirty="0"/>
+          </a:p>
+        </p:txBody>
+      </p:sp>
+      <p:sp>
+        <p:nvSpPr>
+          <p:cNvPr id="4" name="Slide Number Placeholder 3"/>
+          <p:cNvSpPr>
+            <a:spLocks noGrp="1"/>
+          </p:cNvSpPr>
+          <p:nvPr>
+            <p:ph type="sldNum" sz="quarter" idx="10"/>
+          </p:nvPr>
+        </p:nvSpPr>
+        <p:spPr/>
+        <p:txBody>
+          <a:bodyPr/>
+          <a:lstStyle/>
+          <a:p>
+            <a:fld id="{F7021451-1387-4CA6-816F-3879F97B5CBC}" type="slidenum">
+              <a:rPr lang="en-US"/>
+              <a:t>47</a:t>
+            </a:fld>
+            <a:endParaRPr lang="en-US"/>
+          </a:p>
+        </p:txBody>
+      </p:sp>
+    </p:spTree>
+    <p:extLst>
+      <p:ext uri="{BB962C8B-B14F-4D97-AF65-F5344CB8AC3E}">
+        <p14:creationId xmlns:p14="http://schemas.microsoft.com/office/powerpoint/2010/main" val="1024086991"/>
+      </p:ext>
+    </p:extLst>
+  </p:cSld>
+  <p:clrMapOvr>
+    <a:masterClrMapping/>
+  </p:clrMapOvr>
+</p:notes>
+</file>
+
+<file path=ppt/notesSlides/notesSlide48.xml><?xml version="1.0" encoding="utf-8"?>
+<p:notes xmlns:a="http://schemas.openxmlformats.org/drawingml/2006/main" xmlns:r="http://schemas.openxmlformats.org/officeDocument/2006/relationships" xmlns:p="http://schemas.openxmlformats.org/presentationml/2006/main">
+  <p:cSld>
+    <p:spTree>
+      <p:nvGrpSpPr>
+        <p:cNvPr id="1" name=""/>
+        <p:cNvGrpSpPr/>
+        <p:nvPr/>
+      </p:nvGrpSpPr>
+      <p:grpSpPr>
+        <a:xfrm>
+          <a:off x="0" y="0"/>
+          <a:ext cx="0" cy="0"/>
+          <a:chOff x="0" y="0"/>
+          <a:chExt cx="0" cy="0"/>
+        </a:xfrm>
+      </p:grpSpPr>
+      <p:sp>
+        <p:nvSpPr>
+          <p:cNvPr id="2" name="Slide Image Placeholder 1"/>
+          <p:cNvSpPr>
+            <a:spLocks noGrp="1" noRot="1" noChangeAspect="1"/>
+          </p:cNvSpPr>
+          <p:nvPr>
+            <p:ph type="sldImg"/>
+          </p:nvPr>
+        </p:nvSpPr>
+        <p:spPr/>
+      </p:sp>
+      <p:sp>
+        <p:nvSpPr>
+          <p:cNvPr id="3" name="Notes Placeholder 2"/>
+          <p:cNvSpPr>
+            <a:spLocks noGrp="1"/>
+          </p:cNvSpPr>
+          <p:nvPr>
+            <p:ph type="body" idx="1"/>
+          </p:nvPr>
+        </p:nvSpPr>
+        <p:spPr/>
+        <p:txBody>
+          <a:bodyPr/>
+          <a:lstStyle/>
+          <a:p>
+            <a:r>
+              <a:rPr lang="en-US" dirty="0"/>
+              <a:t>Our next lesson will be on Lesson 35: Precipitation. Thank you for your attention, and see you next time.</a:t>
+            </a:r>
+            <a:endParaRPr lang="en-US" dirty="0"/>
+          </a:p>
+        </p:txBody>
+      </p:sp>
+      <p:sp>
+        <p:nvSpPr>
+          <p:cNvPr id="4" name="Slide Number Placeholder 3"/>
+          <p:cNvSpPr>
+            <a:spLocks noGrp="1"/>
+          </p:cNvSpPr>
+          <p:nvPr>
+            <p:ph type="sldNum" sz="quarter" idx="10"/>
+          </p:nvPr>
+        </p:nvSpPr>
+        <p:spPr/>
+        <p:txBody>
+          <a:bodyPr/>
+          <a:lstStyle/>
+          <a:p>
+            <a:fld id="{F7021451-1387-4CA6-816F-3879F97B5CBC}" type="slidenum">
+              <a:rPr lang="en-US"/>
+              <a:t>48</a:t>
+            </a:fld>
+            <a:endParaRPr lang="en-US"/>
+          </a:p>
+        </p:txBody>
+      </p:sp>
+    </p:spTree>
+    <p:extLst>
+      <p:ext uri="{BB962C8B-B14F-4D97-AF65-F5344CB8AC3E}">
+        <p14:creationId xmlns:p14="http://schemas.microsoft.com/office/powerpoint/2010/main" val="1024086991"/>
+      </p:ext>
+    </p:extLst>
+  </p:cSld>
+  <p:clrMapOvr>
+    <a:masterClrMapping/>
+  </p:clrMapOvr>
+</p:notes>
+</file>
+
+<file path=ppt/notesSlides/notesSlide49.xml><?xml version="1.0" encoding="utf-8"?>
+<p:notes xmlns:a="http://schemas.openxmlformats.org/drawingml/2006/main" xmlns:r="http://schemas.openxmlformats.org/officeDocument/2006/relationships" xmlns:p="http://schemas.openxmlformats.org/presentationml/2006/main">
+  <p:cSld>
+    <p:spTree>
+      <p:nvGrpSpPr>
+        <p:cNvPr id="1" name=""/>
+        <p:cNvGrpSpPr/>
+        <p:nvPr/>
+      </p:nvGrpSpPr>
+      <p:grpSpPr>
+        <a:xfrm>
+          <a:off x="0" y="0"/>
+          <a:ext cx="0" cy="0"/>
+          <a:chOff x="0" y="0"/>
+          <a:chExt cx="0" cy="0"/>
+        </a:xfrm>
+      </p:grpSpPr>
+      <p:sp>
+        <p:nvSpPr>
+          <p:cNvPr id="2" name="Slide Image Placeholder 1"/>
+          <p:cNvSpPr>
+            <a:spLocks noGrp="1" noRot="1" noChangeAspect="1"/>
+          </p:cNvSpPr>
+          <p:nvPr>
+            <p:ph type="sldImg"/>
+          </p:nvPr>
+        </p:nvSpPr>
+        <p:spPr/>
+      </p:sp>
+      <p:sp>
+        <p:nvSpPr>
+          <p:cNvPr id="3" name="Notes Placeholder 2"/>
+          <p:cNvSpPr>
+            <a:spLocks noGrp="1"/>
+          </p:cNvSpPr>
+          <p:nvPr>
+            <p:ph type="body" idx="1"/>
+          </p:nvPr>
+        </p:nvSpPr>
+        <p:spPr/>
+        <p:txBody>
+          <a:bodyPr/>
+          <a:lstStyle/>
+          <a:p>
+            <a:r>
+              <a:rPr lang="en-US" dirty="0"/>
+              <a:t>Let us play the bilingual game. I say a word in English, and you give me the French word. Then we do the reverse.</a:t>
+            </a:r>
+            <a:endParaRPr lang="en-US" dirty="0"/>
+          </a:p>
+        </p:txBody>
+      </p:sp>
+      <p:sp>
+        <p:nvSpPr>
+          <p:cNvPr id="4" name="Slide Number Placeholder 3"/>
+          <p:cNvSpPr>
+            <a:spLocks noGrp="1"/>
+          </p:cNvSpPr>
+          <p:nvPr>
+            <p:ph type="sldNum" sz="quarter" idx="10"/>
+          </p:nvPr>
+        </p:nvSpPr>
+        <p:spPr/>
+        <p:txBody>
+          <a:bodyPr/>
+          <a:lstStyle/>
+          <a:p>
+            <a:fld id="{F7021451-1387-4CA6-816F-3879F97B5CBC}" type="slidenum">
+              <a:rPr lang="en-US"/>
+              <a:t>49</a:t>
             </a:fld>
             <a:endParaRPr lang="en-US"/>
           </a:p>
@@ -4001,6 +4450,358 @@
             <a:fld id="{F7021451-1387-4CA6-816F-3879F97B5CBC}" type="slidenum">
               <a:rPr lang="en-US"/>
               <a:t>5</a:t>
+            </a:fld>
+            <a:endParaRPr lang="en-US"/>
+          </a:p>
+        </p:txBody>
+      </p:sp>
+    </p:spTree>
+    <p:extLst>
+      <p:ext uri="{BB962C8B-B14F-4D97-AF65-F5344CB8AC3E}">
+        <p14:creationId xmlns:p14="http://schemas.microsoft.com/office/powerpoint/2010/main" val="1024086991"/>
+      </p:ext>
+    </p:extLst>
+  </p:cSld>
+  <p:clrMapOvr>
+    <a:masterClrMapping/>
+  </p:clrMapOvr>
+</p:notes>
+</file>
+
+<file path=ppt/notesSlides/notesSlide50.xml><?xml version="1.0" encoding="utf-8"?>
+<p:notes xmlns:a="http://schemas.openxmlformats.org/drawingml/2006/main" xmlns:r="http://schemas.openxmlformats.org/officeDocument/2006/relationships" xmlns:p="http://schemas.openxmlformats.org/presentationml/2006/main">
+  <p:cSld>
+    <p:spTree>
+      <p:nvGrpSpPr>
+        <p:cNvPr id="1" name=""/>
+        <p:cNvGrpSpPr/>
+        <p:nvPr/>
+      </p:nvGrpSpPr>
+      <p:grpSpPr>
+        <a:xfrm>
+          <a:off x="0" y="0"/>
+          <a:ext cx="0" cy="0"/>
+          <a:chOff x="0" y="0"/>
+          <a:chExt cx="0" cy="0"/>
+        </a:xfrm>
+      </p:grpSpPr>
+      <p:sp>
+        <p:nvSpPr>
+          <p:cNvPr id="2" name="Slide Image Placeholder 1"/>
+          <p:cNvSpPr>
+            <a:spLocks noGrp="1" noRot="1" noChangeAspect="1"/>
+          </p:cNvSpPr>
+          <p:nvPr>
+            <p:ph type="sldImg"/>
+          </p:nvPr>
+        </p:nvSpPr>
+        <p:spPr/>
+      </p:sp>
+      <p:sp>
+        <p:nvSpPr>
+          <p:cNvPr id="3" name="Notes Placeholder 2"/>
+          <p:cNvSpPr>
+            <a:spLocks noGrp="1"/>
+          </p:cNvSpPr>
+          <p:nvPr>
+            <p:ph type="body" idx="1"/>
+          </p:nvPr>
+        </p:nvSpPr>
+        <p:spPr/>
+        <p:txBody>
+          <a:bodyPr/>
+          <a:lstStyle/>
+          <a:p>
+            <a:r>
+              <a:rPr lang="en-US" dirty="0"/>
+              <a:t>I record this information in the official logbook of the class after the lesson.</a:t>
+            </a:r>
+            <a:endParaRPr lang="en-US" dirty="0"/>
+          </a:p>
+        </p:txBody>
+      </p:sp>
+      <p:sp>
+        <p:nvSpPr>
+          <p:cNvPr id="4" name="Slide Number Placeholder 3"/>
+          <p:cNvSpPr>
+            <a:spLocks noGrp="1"/>
+          </p:cNvSpPr>
+          <p:nvPr>
+            <p:ph type="sldNum" sz="quarter" idx="10"/>
+          </p:nvPr>
+        </p:nvSpPr>
+        <p:spPr/>
+        <p:txBody>
+          <a:bodyPr/>
+          <a:lstStyle/>
+          <a:p>
+            <a:fld id="{F7021451-1387-4CA6-816F-3879F97B5CBC}" type="slidenum">
+              <a:rPr lang="en-US"/>
+              <a:t>50</a:t>
+            </a:fld>
+            <a:endParaRPr lang="en-US"/>
+          </a:p>
+        </p:txBody>
+      </p:sp>
+    </p:spTree>
+    <p:extLst>
+      <p:ext uri="{BB962C8B-B14F-4D97-AF65-F5344CB8AC3E}">
+        <p14:creationId xmlns:p14="http://schemas.microsoft.com/office/powerpoint/2010/main" val="1024086991"/>
+      </p:ext>
+    </p:extLst>
+  </p:cSld>
+  <p:clrMapOvr>
+    <a:masterClrMapping/>
+  </p:clrMapOvr>
+</p:notes>
+</file>
+
+<file path=ppt/notesSlides/notesSlide51.xml><?xml version="1.0" encoding="utf-8"?>
+<p:notes xmlns:a="http://schemas.openxmlformats.org/drawingml/2006/main" xmlns:r="http://schemas.openxmlformats.org/officeDocument/2006/relationships" xmlns:p="http://schemas.openxmlformats.org/presentationml/2006/main">
+  <p:cSld>
+    <p:spTree>
+      <p:nvGrpSpPr>
+        <p:cNvPr id="1" name=""/>
+        <p:cNvGrpSpPr/>
+        <p:nvPr/>
+      </p:nvGrpSpPr>
+      <p:grpSpPr>
+        <a:xfrm>
+          <a:off x="0" y="0"/>
+          <a:ext cx="0" cy="0"/>
+          <a:chOff x="0" y="0"/>
+          <a:chExt cx="0" cy="0"/>
+        </a:xfrm>
+      </p:grpSpPr>
+      <p:sp>
+        <p:nvSpPr>
+          <p:cNvPr id="2" name="Slide Image Placeholder 1"/>
+          <p:cNvSpPr>
+            <a:spLocks noGrp="1" noRot="1" noChangeAspect="1"/>
+          </p:cNvSpPr>
+          <p:nvPr>
+            <p:ph type="sldImg"/>
+          </p:nvPr>
+        </p:nvSpPr>
+        <p:spPr/>
+      </p:sp>
+      <p:sp>
+        <p:nvSpPr>
+          <p:cNvPr id="3" name="Notes Placeholder 2"/>
+          <p:cNvSpPr>
+            <a:spLocks noGrp="1"/>
+          </p:cNvSpPr>
+          <p:nvPr>
+            <p:ph type="body" idx="1"/>
+          </p:nvPr>
+        </p:nvSpPr>
+        <p:spPr/>
+        <p:txBody>
+          <a:bodyPr/>
+          <a:lstStyle/>
+          <a:p>
+            <a:r>
+              <a:rPr lang="en-US" dirty="0"/>
+              <a:t>I complete the second page of the logbook: the matter taught, the evaluation, the homework and the attendance.</a:t>
+            </a:r>
+            <a:endParaRPr lang="en-US" dirty="0"/>
+          </a:p>
+        </p:txBody>
+      </p:sp>
+      <p:sp>
+        <p:nvSpPr>
+          <p:cNvPr id="4" name="Slide Number Placeholder 3"/>
+          <p:cNvSpPr>
+            <a:spLocks noGrp="1"/>
+          </p:cNvSpPr>
+          <p:nvPr>
+            <p:ph type="sldNum" sz="quarter" idx="10"/>
+          </p:nvPr>
+        </p:nvSpPr>
+        <p:spPr/>
+        <p:txBody>
+          <a:bodyPr/>
+          <a:lstStyle/>
+          <a:p>
+            <a:fld id="{F7021451-1387-4CA6-816F-3879F97B5CBC}" type="slidenum">
+              <a:rPr lang="en-US"/>
+              <a:t>51</a:t>
+            </a:fld>
+            <a:endParaRPr lang="en-US"/>
+          </a:p>
+        </p:txBody>
+      </p:sp>
+    </p:spTree>
+    <p:extLst>
+      <p:ext uri="{BB962C8B-B14F-4D97-AF65-F5344CB8AC3E}">
+        <p14:creationId xmlns:p14="http://schemas.microsoft.com/office/powerpoint/2010/main" val="1024086991"/>
+      </p:ext>
+    </p:extLst>
+  </p:cSld>
+  <p:clrMapOvr>
+    <a:masterClrMapping/>
+  </p:clrMapOvr>
+</p:notes>
+</file>
+
+<file path=ppt/notesSlides/notesSlide52.xml><?xml version="1.0" encoding="utf-8"?>
+<p:notes xmlns:a="http://schemas.openxmlformats.org/drawingml/2006/main" xmlns:r="http://schemas.openxmlformats.org/officeDocument/2006/relationships" xmlns:p="http://schemas.openxmlformats.org/presentationml/2006/main">
+  <p:cSld>
+    <p:spTree>
+      <p:nvGrpSpPr>
+        <p:cNvPr id="1" name=""/>
+        <p:cNvGrpSpPr/>
+        <p:nvPr/>
+      </p:nvGrpSpPr>
+      <p:grpSpPr>
+        <a:xfrm>
+          <a:off x="0" y="0"/>
+          <a:ext cx="0" cy="0"/>
+          <a:chOff x="0" y="0"/>
+          <a:chExt cx="0" cy="0"/>
+        </a:xfrm>
+      </p:grpSpPr>
+      <p:sp>
+        <p:nvSpPr>
+          <p:cNvPr id="2" name="Slide Image Placeholder 1"/>
+          <p:cNvSpPr>
+            <a:spLocks noGrp="1" noRot="1" noChangeAspect="1"/>
+          </p:cNvSpPr>
+          <p:nvPr>
+            <p:ph type="sldImg"/>
+          </p:nvPr>
+        </p:nvSpPr>
+        <p:spPr/>
+      </p:sp>
+      <p:sp>
+        <p:nvSpPr>
+          <p:cNvPr id="3" name="Notes Placeholder 2"/>
+          <p:cNvSpPr>
+            <a:spLocks noGrp="1"/>
+          </p:cNvSpPr>
+          <p:nvPr>
+            <p:ph type="body" idx="1"/>
+          </p:nvPr>
+        </p:nvSpPr>
+        <p:spPr/>
+        <p:txBody>
+          <a:bodyPr/>
+          <a:lstStyle/>
+          <a:p>
+            <a:r>
+              <a:rPr lang="en-US" dirty="0"/>
+              <a:t>This slide is for me, the teacher: it gives the timing of the lesson and what to do if the projector is not available.</a:t>
+            </a:r>
+            <a:endParaRPr lang="en-US" dirty="0"/>
+          </a:p>
+        </p:txBody>
+      </p:sp>
+      <p:sp>
+        <p:nvSpPr>
+          <p:cNvPr id="4" name="Slide Number Placeholder 3"/>
+          <p:cNvSpPr>
+            <a:spLocks noGrp="1"/>
+          </p:cNvSpPr>
+          <p:nvPr>
+            <p:ph type="sldNum" sz="quarter" idx="10"/>
+          </p:nvPr>
+        </p:nvSpPr>
+        <p:spPr/>
+        <p:txBody>
+          <a:bodyPr/>
+          <a:lstStyle/>
+          <a:p>
+            <a:fld id="{F7021451-1387-4CA6-816F-3879F97B5CBC}" type="slidenum">
+              <a:rPr lang="en-US"/>
+              <a:t>52</a:t>
+            </a:fld>
+            <a:endParaRPr lang="en-US"/>
+          </a:p>
+        </p:txBody>
+      </p:sp>
+    </p:spTree>
+    <p:extLst>
+      <p:ext uri="{BB962C8B-B14F-4D97-AF65-F5344CB8AC3E}">
+        <p14:creationId xmlns:p14="http://schemas.microsoft.com/office/powerpoint/2010/main" val="1024086991"/>
+      </p:ext>
+    </p:extLst>
+  </p:cSld>
+  <p:clrMapOvr>
+    <a:masterClrMapping/>
+  </p:clrMapOvr>
+</p:notes>
+</file>
+
+<file path=ppt/notesSlides/notesSlide53.xml><?xml version="1.0" encoding="utf-8"?>
+<p:notes xmlns:a="http://schemas.openxmlformats.org/drawingml/2006/main" xmlns:r="http://schemas.openxmlformats.org/officeDocument/2006/relationships" xmlns:p="http://schemas.openxmlformats.org/presentationml/2006/main">
+  <p:cSld>
+    <p:spTree>
+      <p:nvGrpSpPr>
+        <p:cNvPr id="1" name=""/>
+        <p:cNvGrpSpPr/>
+        <p:nvPr/>
+      </p:nvGrpSpPr>
+      <p:grpSpPr>
+        <a:xfrm>
+          <a:off x="0" y="0"/>
+          <a:ext cx="0" cy="0"/>
+          <a:chOff x="0" y="0"/>
+          <a:chExt cx="0" cy="0"/>
+        </a:xfrm>
+      </p:grpSpPr>
+      <p:sp>
+        <p:nvSpPr>
+          <p:cNvPr id="2" name="Slide Image Placeholder 1"/>
+          <p:cNvSpPr>
+            <a:spLocks noGrp="1" noRot="1" noChangeAspect="1"/>
+          </p:cNvSpPr>
+          <p:nvPr>
+            <p:ph type="sldImg"/>
+          </p:nvPr>
+        </p:nvSpPr>
+        <p:spPr/>
+      </p:sp>
+      <p:sp>
+        <p:nvSpPr>
+          <p:cNvPr id="3" name="Notes Placeholder 2"/>
+          <p:cNvSpPr>
+            <a:spLocks noGrp="1"/>
+          </p:cNvSpPr>
+          <p:nvPr>
+            <p:ph type="body" idx="1"/>
+          </p:nvPr>
+        </p:nvSpPr>
+        <p:spPr/>
+        <p:txBody>
+          <a:bodyPr/>
+          <a:lstStyle/>
+          <a:p>
+            <a:r>
+              <a:rPr lang="en-US" dirty="0"/>
+              <a:t>These are the references and picture credits used to prepare this lesson.</a:t>
+            </a:r>
+            <a:endParaRPr lang="en-US" dirty="0"/>
+          </a:p>
+        </p:txBody>
+      </p:sp>
+      <p:sp>
+        <p:nvSpPr>
+          <p:cNvPr id="4" name="Slide Number Placeholder 3"/>
+          <p:cNvSpPr>
+            <a:spLocks noGrp="1"/>
+          </p:cNvSpPr>
+          <p:nvPr>
+            <p:ph type="sldNum" sz="quarter" idx="10"/>
+          </p:nvPr>
+        </p:nvSpPr>
+        <p:spPr/>
+        <p:txBody>
+          <a:bodyPr/>
+          <a:lstStyle/>
+          <a:p>
+            <a:fld id="{F7021451-1387-4CA6-816F-3879F97B5CBC}" type="slidenum">
+              <a:rPr lang="en-US"/>
+              <a:t>53</a:t>
             </a:fld>
             <a:endParaRPr lang="en-US"/>
           </a:p>
@@ -5709,7 +6510,7 @@
         <p:spPr>
           <a:xfrm>
             <a:off x="0" y="658368"/>
-            <a:ext cx="5120640" cy="5833872"/>
+            <a:ext cx="2468880" cy="5833872"/>
           </a:xfrm>
           <a:prstGeom prst="rect">
             <a:avLst/>
@@ -5724,8 +6525,8 @@
         </p:nvSpPr>
         <p:spPr>
           <a:xfrm>
-            <a:off x="5349240" y="1005840"/>
-            <a:ext cx="6522415" cy="731520"/>
+            <a:off x="2697480" y="1005840"/>
+            <a:ext cx="9174175" cy="731520"/>
           </a:xfrm>
           <a:prstGeom prst="rect">
             <a:avLst/>
@@ -5765,8 +6566,8 @@
         </p:nvSpPr>
         <p:spPr>
           <a:xfrm>
-            <a:off x="5349240" y="1783080"/>
-            <a:ext cx="6522415" cy="4663440"/>
+            <a:off x="2697480" y="1783080"/>
+            <a:ext cx="9174175" cy="4663440"/>
           </a:xfrm>
           <a:prstGeom prst="rect">
             <a:avLst/>
@@ -5793,7 +6594,7 @@
                 <a:ea typeface="Times New Roman" pitchFamily="34" charset="-122"/>
                 <a:cs typeface="Times New Roman" pitchFamily="34" charset="-120"/>
               </a:rPr>
-              <a:t>On a hot afternoon, Yaya takes a cold bottle out of the refrigerator. After a few minutes, drops of water cover the outside of the bottle. The bottle is closed.</a:t>
+              <a:t>On a hot afternoon, Yaya takes a cold bottle out of the refrigerator. After a few minutes, drops of water cover the outside of the closed bottle. He asks: "Where do these drops come from, and is this how clouds and fog are formed?"</a:t>
             </a:r>
             <a:endParaRPr lang="en-US" sz="4000" dirty="0"/>
           </a:p>
@@ -6231,7 +7032,7 @@
                 <a:ea typeface="Times New Roman" pitchFamily="34" charset="-122"/>
                 <a:cs typeface="Times New Roman" pitchFamily="34" charset="-120"/>
               </a:rPr>
-              <a:t>Yaya does not know where the drops come from.</a:t>
+              <a:t>Yaya does not know where the drops come from and how clouds and fog form.</a:t>
             </a:r>
             <a:endParaRPr lang="en-US" sz="4000" dirty="0"/>
           </a:p>
@@ -6450,7 +7251,7 @@
                 <a:ea typeface="Times New Roman" pitchFamily="34" charset="-122"/>
                 <a:cs typeface="Times New Roman" pitchFamily="34" charset="-120"/>
               </a:rPr>
-              <a:t>Where is the water from?</a:t>
+              <a:t>Is the bottle closed or open?</a:t>
             </a:r>
             <a:endParaRPr lang="en-US" sz="4000" dirty="0"/>
           </a:p>
@@ -6669,7 +7470,7 @@
                 <a:ea typeface="Times New Roman" pitchFamily="34" charset="-122"/>
                 <a:cs typeface="Times New Roman" pitchFamily="34" charset="-120"/>
               </a:rPr>
-              <a:t>From the water vapour in the air.</a:t>
+              <a:t>It is closed.</a:t>
             </a:r>
             <a:endParaRPr lang="en-US" sz="4000" dirty="0"/>
           </a:p>
@@ -6888,7 +7689,7 @@
                 <a:ea typeface="Times New Roman" pitchFamily="34" charset="-122"/>
                 <a:cs typeface="Times New Roman" pitchFamily="34" charset="-120"/>
               </a:rPr>
-              <a:t>What changed it into drops?</a:t>
+              <a:t>Where does the water come from?</a:t>
             </a:r>
             <a:endParaRPr lang="en-US" sz="4000" dirty="0"/>
           </a:p>
@@ -7107,7 +7908,7 @@
                 <a:ea typeface="Times New Roman" pitchFamily="34" charset="-122"/>
                 <a:cs typeface="Times New Roman" pitchFamily="34" charset="-120"/>
               </a:rPr>
-              <a:t>The cold bottle cooled the air.</a:t>
+              <a:t>From the water vapour in the air, cooled by the cold bottle.</a:t>
             </a:r>
             <a:endParaRPr lang="en-US" sz="4000" dirty="0"/>
           </a:p>
@@ -7657,7 +8458,7 @@
                 <a:ea typeface="Calibri" pitchFamily="34" charset="-122"/>
                 <a:cs typeface="Calibri" pitchFamily="34" charset="-120"/>
               </a:rPr>
-              <a:t>1. MEANING OF CONDENSATION</a:t>
+              <a:t>DEFINITIONS</a:t>
             </a:r>
             <a:endParaRPr lang="en-US" sz="1400" dirty="0"/>
           </a:p>
@@ -7759,7 +8560,7 @@
                 <a:ea typeface="Times New Roman" pitchFamily="34" charset="-122"/>
                 <a:cs typeface="Times New Roman" pitchFamily="34" charset="-120"/>
               </a:rPr>
-              <a:t>Drops of water on a cold bottle.</a:t>
+              <a:t>A cold bottle with drops of water.</a:t>
             </a:r>
             <a:endParaRPr lang="en-US" sz="1800" dirty="0"/>
           </a:p>
@@ -8466,7 +9267,7 @@
                 <a:ea typeface="Calibri" pitchFamily="34" charset="-122"/>
                 <a:cs typeface="Calibri" pitchFamily="34" charset="-120"/>
               </a:rPr>
-              <a:t>1. MEANING OF CONDENSATION</a:t>
+              <a:t>DEFINITIONS</a:t>
             </a:r>
             <a:endParaRPr lang="en-US" sz="1400" dirty="0"/>
           </a:p>
@@ -8685,7 +9486,7 @@
                 <a:ea typeface="Calibri" pitchFamily="34" charset="-122"/>
                 <a:cs typeface="Calibri" pitchFamily="34" charset="-120"/>
               </a:rPr>
-              <a:t>1. MEANING OF CONDENSATION</a:t>
+              <a:t>DEFINITIONS</a:t>
             </a:r>
             <a:endParaRPr lang="en-US" sz="1400" dirty="0"/>
           </a:p>
@@ -8904,7 +9705,7 @@
                 <a:ea typeface="Calibri" pitchFamily="34" charset="-122"/>
                 <a:cs typeface="Calibri" pitchFamily="34" charset="-120"/>
               </a:rPr>
-              <a:t>2. FORMS OF CONDENSATION</a:t>
+              <a:t>1. FORMS OF CONDENSATION</a:t>
             </a:r>
             <a:endParaRPr lang="en-US" sz="1400" dirty="0"/>
           </a:p>
@@ -9006,7 +9807,7 @@
                 <a:ea typeface="Times New Roman" pitchFamily="34" charset="-122"/>
                 <a:cs typeface="Times New Roman" pitchFamily="34" charset="-120"/>
               </a:rPr>
-              <a:t>Fog in the valleys in the morning.</a:t>
+              <a:t>A foggy morning.</a:t>
             </a:r>
             <a:endParaRPr lang="en-US" sz="1800" dirty="0"/>
           </a:p>
@@ -9118,7 +9919,7 @@
                 <a:ea typeface="Calibri" pitchFamily="34" charset="-122"/>
                 <a:cs typeface="Calibri" pitchFamily="34" charset="-120"/>
               </a:rPr>
-              <a:t>2. FORMS OF CONDENSATION</a:t>
+              <a:t>1. FORMS OF CONDENSATION</a:t>
             </a:r>
             <a:endParaRPr lang="en-US" sz="1400" dirty="0"/>
           </a:p>
@@ -9337,7 +10138,7 @@
                 <a:ea typeface="Calibri" pitchFamily="34" charset="-122"/>
                 <a:cs typeface="Calibri" pitchFamily="34" charset="-120"/>
               </a:rPr>
-              <a:t>2. FORMS OF CONDENSATION</a:t>
+              <a:t>1. FORMS OF CONDENSATION</a:t>
             </a:r>
             <a:endParaRPr lang="en-US" sz="1400" dirty="0"/>
           </a:p>
@@ -9556,7 +10357,7 @@
                 <a:ea typeface="Calibri" pitchFamily="34" charset="-122"/>
                 <a:cs typeface="Calibri" pitchFamily="34" charset="-120"/>
               </a:rPr>
-              <a:t>2. FORMS OF CONDENSATION</a:t>
+              <a:t>1. FORMS OF CONDENSATION</a:t>
             </a:r>
             <a:endParaRPr lang="en-US" sz="1400" dirty="0"/>
           </a:p>
@@ -9658,7 +10459,7 @@
                 <a:ea typeface="Times New Roman" pitchFamily="34" charset="-122"/>
                 <a:cs typeface="Times New Roman" pitchFamily="34" charset="-120"/>
               </a:rPr>
-              <a:t>A very tall storm cloud.</a:t>
+              <a:t>A huge storm cloud.</a:t>
             </a:r>
             <a:endParaRPr lang="en-US" sz="1800" dirty="0"/>
           </a:p>
@@ -9770,7 +10571,7 @@
                 <a:ea typeface="Calibri" pitchFamily="34" charset="-122"/>
                 <a:cs typeface="Calibri" pitchFamily="34" charset="-120"/>
               </a:rPr>
-              <a:t>2. FORMS OF CONDENSATION</a:t>
+              <a:t>1. FORMS OF CONDENSATION</a:t>
             </a:r>
             <a:endParaRPr lang="en-US" sz="1400" dirty="0"/>
           </a:p>
@@ -9989,7 +10790,7 @@
                 <a:ea typeface="Calibri" pitchFamily="34" charset="-122"/>
                 <a:cs typeface="Calibri" pitchFamily="34" charset="-120"/>
               </a:rPr>
-              <a:t>2. FORMS OF CONDENSATION</a:t>
+              <a:t>1. FORMS OF CONDENSATION</a:t>
             </a:r>
             <a:endParaRPr lang="en-US" sz="1400" dirty="0"/>
           </a:p>
@@ -10490,7 +11291,7 @@
         <p:spPr>
           <a:xfrm>
             <a:off x="0" y="658368"/>
-            <a:ext cx="3840480" cy="5833872"/>
+            <a:ext cx="2468880" cy="5833872"/>
           </a:xfrm>
           <a:prstGeom prst="rect">
             <a:avLst/>
@@ -10505,8 +11306,8 @@
         </p:nvSpPr>
         <p:spPr>
           <a:xfrm>
-            <a:off x="4069080" y="1005840"/>
-            <a:ext cx="7802575" cy="731520"/>
+            <a:off x="2697480" y="1005840"/>
+            <a:ext cx="9174175" cy="731520"/>
           </a:xfrm>
           <a:prstGeom prst="rect">
             <a:avLst/>
@@ -10532,7 +11333,7 @@
                 <a:ea typeface="Times New Roman" pitchFamily="34" charset="-122"/>
                 <a:cs typeface="Times New Roman" pitchFamily="34" charset="-120"/>
               </a:rPr>
-              <a:t>1. Meaning of Condensation</a:t>
+              <a:t>DEFINITIONS</a:t>
             </a:r>
             <a:endParaRPr lang="en-US" sz="3600" dirty="0"/>
           </a:p>
@@ -10546,8 +11347,8 @@
         </p:nvSpPr>
         <p:spPr>
           <a:xfrm>
-            <a:off x="4069080" y="1783080"/>
-            <a:ext cx="7802575" cy="4663440"/>
+            <a:off x="2697480" y="1783080"/>
+            <a:ext cx="9174175" cy="4663440"/>
           </a:xfrm>
           <a:prstGeom prst="rect">
             <a:avLst/>
@@ -10574,7 +11375,7 @@
                 <a:ea typeface="Times New Roman" pitchFamily="34" charset="-122"/>
                 <a:cs typeface="Times New Roman" pitchFamily="34" charset="-120"/>
               </a:rPr>
-              <a:t>Condensation and its conditions are explained as follows:</a:t>
+              <a:t>The key terms of this lesson are defined as follows:</a:t>
             </a:r>
             <a:endParaRPr lang="en-US" sz="4000" dirty="0"/>
           </a:p>
@@ -10611,7 +11412,7 @@
                 <a:ea typeface="Times New Roman" pitchFamily="34" charset="-122"/>
                 <a:cs typeface="Times New Roman" pitchFamily="34" charset="-120"/>
               </a:rPr>
-              <a:t>It is the change of water vapour into liquid water.</a:t>
+              <a:t>It is the change of water vapour into liquid water when air cools.</a:t>
             </a:r>
             <a:endParaRPr lang="en-US" sz="4000" dirty="0"/>
           </a:p>
@@ -10631,7 +11432,7 @@
                 <a:ea typeface="Times New Roman" pitchFamily="34" charset="-122"/>
                 <a:cs typeface="Times New Roman" pitchFamily="34" charset="-120"/>
               </a:rPr>
-              <a:t>Dew point: </a:t>
+              <a:t>Saturation: </a:t>
             </a:r>
             <a:pPr algn="l" indent="0" marL="0">
               <a:spcAft>
@@ -10648,7 +11449,7 @@
                 <a:ea typeface="Times New Roman" pitchFamily="34" charset="-122"/>
                 <a:cs typeface="Times New Roman" pitchFamily="34" charset="-120"/>
               </a:rPr>
-              <a:t>It is the temperature at which the air is saturated and condensation starts.</a:t>
+              <a:t>It is the state of air that holds all the water vapour it can at its temperature.</a:t>
             </a:r>
             <a:endParaRPr lang="en-US" sz="4000" dirty="0"/>
           </a:p>
@@ -11834,7 +12635,7 @@
                 <a:ea typeface="Times New Roman" pitchFamily="34" charset="-122"/>
                 <a:cs typeface="Times New Roman" pitchFamily="34" charset="-120"/>
               </a:rPr>
-              <a:t>1. Meaning of Condensation (continued)</a:t>
+              <a:t>DEFINITIONS (continued)</a:t>
             </a:r>
             <a:endParaRPr lang="en-US" sz="3600" dirty="0"/>
           </a:p>
@@ -11876,7 +12677,7 @@
                 <a:ea typeface="Times New Roman" pitchFamily="34" charset="-122"/>
                 <a:cs typeface="Times New Roman" pitchFamily="34" charset="-120"/>
               </a:rPr>
-              <a:t>Conditions: </a:t>
+              <a:t>Dew point: </a:t>
             </a:r>
             <a:pPr algn="l" indent="0" marL="0">
               <a:spcAft>
@@ -11893,7 +12694,7 @@
                 <a:ea typeface="Times New Roman" pitchFamily="34" charset="-122"/>
                 <a:cs typeface="Times New Roman" pitchFamily="34" charset="-120"/>
               </a:rPr>
-              <a:t>Condensation needs moist air, cooling to the dew point and tiny particles of dust.</a:t>
+              <a:t>It is the temperature at which air becomes saturated and condensation starts.</a:t>
             </a:r>
             <a:endParaRPr lang="en-US" sz="4000" dirty="0"/>
           </a:p>
@@ -12028,7 +12829,7 @@
         <p:spPr>
           <a:xfrm>
             <a:off x="0" y="658368"/>
-            <a:ext cx="3840480" cy="5833872"/>
+            <a:ext cx="5120640" cy="5833872"/>
           </a:xfrm>
           <a:prstGeom prst="rect">
             <a:avLst/>
@@ -12043,8 +12844,8 @@
         </p:nvSpPr>
         <p:spPr>
           <a:xfrm>
-            <a:off x="4069080" y="1005840"/>
-            <a:ext cx="7802575" cy="731520"/>
+            <a:off x="5349240" y="1005840"/>
+            <a:ext cx="6522415" cy="731520"/>
           </a:xfrm>
           <a:prstGeom prst="rect">
             <a:avLst/>
@@ -12070,7 +12871,7 @@
                 <a:ea typeface="Times New Roman" pitchFamily="34" charset="-122"/>
                 <a:cs typeface="Times New Roman" pitchFamily="34" charset="-120"/>
               </a:rPr>
-              <a:t>2. Forms of Condensation</a:t>
+              <a:t>1. Meaning of Condensation</a:t>
             </a:r>
             <a:endParaRPr lang="en-US" sz="3600" dirty="0"/>
           </a:p>
@@ -12084,8 +12885,8 @@
         </p:nvSpPr>
         <p:spPr>
           <a:xfrm>
-            <a:off x="4069080" y="1783080"/>
-            <a:ext cx="7802575" cy="4663440"/>
+            <a:off x="5349240" y="1783080"/>
+            <a:ext cx="6522415" cy="4663440"/>
           </a:xfrm>
           <a:prstGeom prst="rect">
             <a:avLst/>
@@ -12112,7 +12913,7 @@
                 <a:ea typeface="Times New Roman" pitchFamily="34" charset="-122"/>
                 <a:cs typeface="Times New Roman" pitchFamily="34" charset="-120"/>
               </a:rPr>
-              <a:t>Condensation takes the following forms:</a:t>
+              <a:t>Condensation takes place under the following conditions:</a:t>
             </a:r>
             <a:endParaRPr lang="en-US" sz="4000" dirty="0"/>
           </a:p>
@@ -12132,7 +12933,7 @@
                 <a:ea typeface="Times New Roman" pitchFamily="34" charset="-122"/>
                 <a:cs typeface="Times New Roman" pitchFamily="34" charset="-120"/>
               </a:rPr>
-              <a:t>Dew: </a:t>
+              <a:t>Moist air: </a:t>
             </a:r>
             <a:pPr algn="l" indent="0" marL="0">
               <a:spcAft>
@@ -12149,44 +12950,7 @@
                 <a:ea typeface="Times New Roman" pitchFamily="34" charset="-122"/>
                 <a:cs typeface="Times New Roman" pitchFamily="34" charset="-120"/>
               </a:rPr>
-              <a:t>It is drops of water formed on cold surfaces such as grass in the early morning.</a:t>
-            </a:r>
-            <a:endParaRPr lang="en-US" sz="4000" dirty="0"/>
-          </a:p>
-          <a:p>
-            <a:pPr algn="l" indent="0" marL="0">
-              <a:spcAft>
-                <a:spcPts val="800"/>
-              </a:spcAft>
-              <a:buNone/>
-            </a:pPr>
-            <a:r>
-              <a:rPr lang="en-US" sz="4000" b="1" dirty="0">
-                <a:solidFill>
-                  <a:srgbClr val="111111"/>
-                </a:solidFill>
-                <a:latin typeface="Times New Roman" pitchFamily="34" charset="0"/>
-                <a:ea typeface="Times New Roman" pitchFamily="34" charset="-122"/>
-                <a:cs typeface="Times New Roman" pitchFamily="34" charset="-120"/>
-              </a:rPr>
-              <a:t>Fog and mist: </a:t>
-            </a:r>
-            <a:pPr algn="l" indent="0" marL="0">
-              <a:spcAft>
-                <a:spcPts val="800"/>
-              </a:spcAft>
-              <a:buNone/>
-            </a:pPr>
-            <a:r>
-              <a:rPr lang="en-US" sz="4000" dirty="0">
-                <a:solidFill>
-                  <a:srgbClr val="111111"/>
-                </a:solidFill>
-                <a:latin typeface="Times New Roman" pitchFamily="34" charset="0"/>
-                <a:ea typeface="Times New Roman" pitchFamily="34" charset="-122"/>
-                <a:cs typeface="Times New Roman" pitchFamily="34" charset="-120"/>
-              </a:rPr>
-              <a:t>They are clouds formed at ground level.</a:t>
+              <a:t>The air must contain water vapour.</a:t>
             </a:r>
             <a:endParaRPr lang="en-US" sz="4000" dirty="0"/>
           </a:p>
@@ -12304,9 +13068,109 @@
           </a:p>
         </p:txBody>
       </p:sp>
+      <p:sp>
+        <p:nvSpPr>
+          <p:cNvPr id="3" name="Text 1"/>
+          <p:cNvSpPr/>
+          <p:nvPr/>
+        </p:nvSpPr>
+        <p:spPr>
+          <a:xfrm>
+            <a:off x="365760" y="1005840"/>
+            <a:ext cx="11460175" cy="731520"/>
+          </a:xfrm>
+          <a:prstGeom prst="rect">
+            <a:avLst/>
+          </a:prstGeom>
+          <a:noFill/>
+          <a:ln/>
+        </p:spPr>
+        <p:txBody>
+          <a:bodyPr wrap="square" lIns="0" tIns="0" rIns="0" bIns="0" rtlCol="0" anchor="ctr">
+            <a:normAutofit/>
+          </a:bodyPr>
+          <a:lstStyle/>
+          <a:p>
+            <a:pPr algn="ctr" indent="0" marL="0">
+              <a:buNone/>
+            </a:pPr>
+            <a:r>
+              <a:rPr lang="en-US" sz="3600" b="1" dirty="0">
+                <a:solidFill>
+                  <a:srgbClr val="990011"/>
+                </a:solidFill>
+                <a:latin typeface="Times New Roman" pitchFamily="34" charset="0"/>
+                <a:ea typeface="Times New Roman" pitchFamily="34" charset="-122"/>
+                <a:cs typeface="Times New Roman" pitchFamily="34" charset="-120"/>
+              </a:rPr>
+              <a:t>1. Meaning of Condensation</a:t>
+            </a:r>
+            <a:endParaRPr lang="en-US" sz="3600" dirty="0"/>
+          </a:p>
+        </p:txBody>
+      </p:sp>
+      <p:sp>
+        <p:nvSpPr>
+          <p:cNvPr id="4" name="Text 2"/>
+          <p:cNvSpPr/>
+          <p:nvPr/>
+        </p:nvSpPr>
+        <p:spPr>
+          <a:xfrm>
+            <a:off x="365760" y="1783080"/>
+            <a:ext cx="4846320" cy="4617720"/>
+          </a:xfrm>
+          <a:prstGeom prst="rect">
+            <a:avLst/>
+          </a:prstGeom>
+          <a:noFill/>
+          <a:ln/>
+        </p:spPr>
+        <p:txBody>
+          <a:bodyPr wrap="square" lIns="0" tIns="0" rIns="0" bIns="0" rtlCol="0" anchor="t"/>
+          <a:lstStyle/>
+          <a:p>
+            <a:pPr algn="l" indent="0" marL="0">
+              <a:spcAft>
+                <a:spcPts val="800"/>
+              </a:spcAft>
+              <a:buNone/>
+            </a:pPr>
+            <a:r>
+              <a:rPr lang="en-US" sz="3600" b="1" dirty="0">
+                <a:solidFill>
+                  <a:srgbClr val="111111"/>
+                </a:solidFill>
+                <a:latin typeface="Times New Roman" pitchFamily="34" charset="0"/>
+                <a:ea typeface="Times New Roman" pitchFamily="34" charset="-122"/>
+                <a:cs typeface="Times New Roman" pitchFamily="34" charset="-120"/>
+              </a:rPr>
+              <a:t>Cooling to the dew point: </a:t>
+            </a:r>
+            <a:pPr algn="l" indent="0" marL="0">
+              <a:spcAft>
+                <a:spcPts val="800"/>
+              </a:spcAft>
+              <a:buNone/>
+            </a:pPr>
+            <a:r>
+              <a:rPr lang="en-US" sz="3600" dirty="0">
+                <a:solidFill>
+                  <a:srgbClr val="111111"/>
+                </a:solidFill>
+                <a:latin typeface="Times New Roman" pitchFamily="34" charset="0"/>
+                <a:ea typeface="Times New Roman" pitchFamily="34" charset="-122"/>
+                <a:cs typeface="Times New Roman" pitchFamily="34" charset="-120"/>
+              </a:rPr>
+              <a:t>The air must cool until it is saturated, for example at night or when it rises.</a:t>
+            </a:r>
+            <a:endParaRPr lang="en-US" sz="3600" dirty="0"/>
+          </a:p>
+        </p:txBody>
+      </p:sp>
       <p:pic>
         <p:nvPicPr>
-          <p:cNvPr id="3" name="Image 0" descr="/home/claude/f4/img/minesec_sheet.png">    </p:cNvPr>
+          <p:cNvPr id="5" name="Image 0" descr="/home/claude/f4/img/v2/f4_coldbottle.jpg">    </p:cNvPr>
           <p:cNvPicPr>
             <a:picLocks noChangeAspect="1"/>
           </p:cNvPicPr>
@@ -12320,8 +13184,8 @@
         </p:blipFill>
         <p:spPr>
           <a:xfrm>
-            <a:off x="0" y="658368"/>
-            <a:ext cx="5120640" cy="5833872"/>
+            <a:off x="5349240" y="2071212"/>
+            <a:ext cx="6659575" cy="3693983"/>
           </a:xfrm>
           <a:prstGeom prst="rect">
             <a:avLst/>
@@ -12330,14 +13194,14 @@
       </p:pic>
       <p:sp>
         <p:nvSpPr>
-          <p:cNvPr id="4" name="Text 1"/>
+          <p:cNvPr id="6" name="Text 3"/>
           <p:cNvSpPr/>
           <p:nvPr/>
         </p:nvSpPr>
         <p:spPr>
           <a:xfrm>
-            <a:off x="5349240" y="1005840"/>
-            <a:ext cx="6522415" cy="731520"/>
+            <a:off x="5349240" y="6089904"/>
+            <a:ext cx="6659575" cy="347472"/>
           </a:xfrm>
           <a:prstGeom prst="rect">
             <a:avLst/>
@@ -12346,122 +13210,24 @@
           <a:ln/>
         </p:spPr>
         <p:txBody>
-          <a:bodyPr wrap="square" lIns="0" tIns="0" rIns="0" bIns="0" rtlCol="0" anchor="ctr">
-            <a:normAutofit/>
-          </a:bodyPr>
+          <a:bodyPr wrap="square" lIns="0" tIns="0" rIns="0" bIns="0" rtlCol="0" anchor="ctr"/>
           <a:lstStyle/>
           <a:p>
             <a:pPr algn="ctr" indent="0" marL="0">
               <a:buNone/>
             </a:pPr>
             <a:r>
-              <a:rPr lang="en-US" sz="3600" b="1" dirty="0">
-                <a:solidFill>
-                  <a:srgbClr val="990011"/>
+              <a:rPr lang="en-US" sz="1600" i="1" dirty="0">
+                <a:solidFill>
+                  <a:srgbClr val="555555"/>
                 </a:solidFill>
                 <a:latin typeface="Times New Roman" pitchFamily="34" charset="0"/>
                 <a:ea typeface="Times New Roman" pitchFamily="34" charset="-122"/>
                 <a:cs typeface="Times New Roman" pitchFamily="34" charset="-120"/>
               </a:rPr>
-              <a:t>2. Forms of Condensation (continued)</a:t>
-            </a:r>
-            <a:endParaRPr lang="en-US" sz="3600" dirty="0"/>
-          </a:p>
-        </p:txBody>
-      </p:sp>
-      <p:sp>
-        <p:nvSpPr>
-          <p:cNvPr id="5" name="Text 2"/>
-          <p:cNvSpPr/>
-          <p:nvPr/>
-        </p:nvSpPr>
-        <p:spPr>
-          <a:xfrm>
-            <a:off x="5349240" y="1783080"/>
-            <a:ext cx="6522415" cy="4663440"/>
-          </a:xfrm>
-          <a:prstGeom prst="rect">
-            <a:avLst/>
-          </a:prstGeom>
-          <a:noFill/>
-          <a:ln/>
-        </p:spPr>
-        <p:txBody>
-          <a:bodyPr wrap="square" lIns="0" tIns="0" rIns="0" bIns="0" rtlCol="0" anchor="t"/>
-          <a:lstStyle/>
-          <a:p>
-            <a:pPr algn="l" indent="0" marL="0">
-              <a:spcAft>
-                <a:spcPts val="800"/>
-              </a:spcAft>
-              <a:buNone/>
-            </a:pPr>
-            <a:r>
-              <a:rPr lang="en-US" sz="4000" b="1" dirty="0">
-                <a:solidFill>
-                  <a:srgbClr val="111111"/>
-                </a:solidFill>
-                <a:latin typeface="Times New Roman" pitchFamily="34" charset="0"/>
-                <a:ea typeface="Times New Roman" pitchFamily="34" charset="-122"/>
-                <a:cs typeface="Times New Roman" pitchFamily="34" charset="-120"/>
-              </a:rPr>
-              <a:t>Clouds: </a:t>
-            </a:r>
-            <a:pPr algn="l" indent="0" marL="0">
-              <a:spcAft>
-                <a:spcPts val="800"/>
-              </a:spcAft>
-              <a:buNone/>
-            </a:pPr>
-            <a:r>
-              <a:rPr lang="en-US" sz="4000" dirty="0">
-                <a:solidFill>
-                  <a:srgbClr val="111111"/>
-                </a:solidFill>
-                <a:latin typeface="Times New Roman" pitchFamily="34" charset="0"/>
-                <a:ea typeface="Times New Roman" pitchFamily="34" charset="-122"/>
-                <a:cs typeface="Times New Roman" pitchFamily="34" charset="-120"/>
-              </a:rPr>
-              <a:t>They are masses of water droplets in the sky, such as cumulus, stratus, cirrus and cumulonimbus.</a:t>
-            </a:r>
-            <a:endParaRPr lang="en-US" sz="4000" dirty="0"/>
-          </a:p>
-          <a:p>
-            <a:pPr algn="l" indent="0" marL="0">
-              <a:spcAft>
-                <a:spcPts val="800"/>
-              </a:spcAft>
-              <a:buNone/>
-            </a:pPr>
-            <a:r>
-              <a:rPr lang="en-US" sz="4000" b="1" dirty="0">
-                <a:solidFill>
-                  <a:srgbClr val="111111"/>
-                </a:solidFill>
-                <a:latin typeface="Times New Roman" pitchFamily="34" charset="0"/>
-                <a:ea typeface="Times New Roman" pitchFamily="34" charset="-122"/>
-                <a:cs typeface="Times New Roman" pitchFamily="34" charset="-120"/>
-              </a:rPr>
-              <a:t>Frost: </a:t>
-            </a:r>
-            <a:pPr algn="l" indent="0" marL="0">
-              <a:spcAft>
-                <a:spcPts val="800"/>
-              </a:spcAft>
-              <a:buNone/>
-            </a:pPr>
-            <a:r>
-              <a:rPr lang="en-US" sz="4000" dirty="0">
-                <a:solidFill>
-                  <a:srgbClr val="111111"/>
-                </a:solidFill>
-                <a:latin typeface="Times New Roman" pitchFamily="34" charset="0"/>
-                <a:ea typeface="Times New Roman" pitchFamily="34" charset="-122"/>
-                <a:cs typeface="Times New Roman" pitchFamily="34" charset="-120"/>
-              </a:rPr>
-              <a:t>It is ice formed when the temperature falls below 0 °C.</a:t>
-            </a:r>
-            <a:endParaRPr lang="en-US" sz="4000" dirty="0"/>
+              <a:t>Illustration: condensation on a cold bottle</a:t>
+            </a:r>
+            <a:endParaRPr lang="en-US" sz="1600" dirty="0"/>
           </a:p>
         </p:txBody>
       </p:sp>
@@ -12571,7 +13337,7 @@
                 <a:ea typeface="Calibri" pitchFamily="34" charset="-122"/>
                 <a:cs typeface="Calibri" pitchFamily="34" charset="-120"/>
               </a:rPr>
-              <a:t>FORMATIVE EVALUATION</a:t>
+              <a:t>BOARD SUMMARY</a:t>
             </a:r>
             <a:endParaRPr lang="en-US" sz="1400" dirty="0"/>
           </a:p>
@@ -12636,7 +13402,7 @@
                 <a:ea typeface="Times New Roman" pitchFamily="34" charset="-122"/>
                 <a:cs typeface="Times New Roman" pitchFamily="34" charset="-120"/>
               </a:rPr>
-              <a:t>Evaluation 1</a:t>
+              <a:t>1. Meaning of Condensation</a:t>
             </a:r>
             <a:endParaRPr lang="en-US" sz="3600" dirty="0"/>
           </a:p>
@@ -12670,7 +13436,7 @@
               <a:buNone/>
             </a:pPr>
             <a:r>
-              <a:rPr lang="en-US" sz="4000" dirty="0">
+              <a:rPr lang="en-US" sz="4000" b="1" dirty="0">
                 <a:solidFill>
                   <a:srgbClr val="111111"/>
                 </a:solidFill>
@@ -12678,7 +13444,24 @@
                 <a:ea typeface="Times New Roman" pitchFamily="34" charset="-122"/>
                 <a:cs typeface="Times New Roman" pitchFamily="34" charset="-120"/>
               </a:rPr>
-              <a:t>What is condensation?</a:t>
+              <a:t>Condensation nuclei: </a:t>
+            </a:r>
+            <a:pPr algn="l" indent="0" marL="0">
+              <a:spcAft>
+                <a:spcPts val="800"/>
+              </a:spcAft>
+              <a:buNone/>
+            </a:pPr>
+            <a:r>
+              <a:rPr lang="en-US" sz="4000" dirty="0">
+                <a:solidFill>
+                  <a:srgbClr val="111111"/>
+                </a:solidFill>
+                <a:latin typeface="Times New Roman" pitchFamily="34" charset="0"/>
+                <a:ea typeface="Times New Roman" pitchFamily="34" charset="-122"/>
+                <a:cs typeface="Times New Roman" pitchFamily="34" charset="-120"/>
+              </a:rPr>
+              <a:t>Tiny particles of dust, smoke or salt give the water vapour a surface to condense on.</a:t>
             </a:r>
             <a:endParaRPr lang="en-US" sz="4000" dirty="0"/>
           </a:p>
@@ -12790,15 +13573,176 @@
                 <a:ea typeface="Calibri" pitchFamily="34" charset="-122"/>
                 <a:cs typeface="Calibri" pitchFamily="34" charset="-120"/>
               </a:rPr>
-              <a:t>FORMATIVE EVALUATION</a:t>
+              <a:t>BOARD SUMMARY</a:t>
             </a:r>
             <a:endParaRPr lang="en-US" sz="1400" dirty="0"/>
+          </a:p>
+        </p:txBody>
+      </p:sp>
+      <p:sp>
+        <p:nvSpPr>
+          <p:cNvPr id="3" name="Text 1"/>
+          <p:cNvSpPr/>
+          <p:nvPr/>
+        </p:nvSpPr>
+        <p:spPr>
+          <a:xfrm>
+            <a:off x="365760" y="1005840"/>
+            <a:ext cx="11460175" cy="731520"/>
+          </a:xfrm>
+          <a:prstGeom prst="rect">
+            <a:avLst/>
+          </a:prstGeom>
+          <a:noFill/>
+          <a:ln/>
+        </p:spPr>
+        <p:txBody>
+          <a:bodyPr wrap="square" lIns="0" tIns="0" rIns="0" bIns="0" rtlCol="0" anchor="ctr">
+            <a:normAutofit/>
+          </a:bodyPr>
+          <a:lstStyle/>
+          <a:p>
+            <a:pPr algn="ctr" indent="0" marL="0">
+              <a:buNone/>
+            </a:pPr>
+            <a:r>
+              <a:rPr lang="en-US" sz="3600" b="1" dirty="0">
+                <a:solidFill>
+                  <a:srgbClr val="990011"/>
+                </a:solidFill>
+                <a:latin typeface="Times New Roman" pitchFamily="34" charset="0"/>
+                <a:ea typeface="Times New Roman" pitchFamily="34" charset="-122"/>
+                <a:cs typeface="Times New Roman" pitchFamily="34" charset="-120"/>
+              </a:rPr>
+              <a:t>2. Forms of Condensation</a:t>
+            </a:r>
+            <a:endParaRPr lang="en-US" sz="3600" dirty="0"/>
+          </a:p>
+        </p:txBody>
+      </p:sp>
+      <p:sp>
+        <p:nvSpPr>
+          <p:cNvPr id="4" name="Text 2"/>
+          <p:cNvSpPr/>
+          <p:nvPr/>
+        </p:nvSpPr>
+        <p:spPr>
+          <a:xfrm>
+            <a:off x="365760" y="1737360"/>
+            <a:ext cx="5120640" cy="457200"/>
+          </a:xfrm>
+          <a:prstGeom prst="rect">
+            <a:avLst/>
+          </a:prstGeom>
+          <a:noFill/>
+          <a:ln/>
+        </p:spPr>
+        <p:txBody>
+          <a:bodyPr wrap="square" lIns="0" tIns="0" rIns="0" bIns="0" rtlCol="0" anchor="ctr">
+            <a:normAutofit/>
+          </a:bodyPr>
+          <a:lstStyle/>
+          <a:p>
+            <a:pPr algn="l" indent="0" marL="0">
+              <a:buNone/>
+            </a:pPr>
+            <a:r>
+              <a:rPr lang="en-US" sz="3000" b="1" dirty="0">
+                <a:solidFill>
+                  <a:srgbClr val="990011"/>
+                </a:solidFill>
+                <a:latin typeface="Times New Roman" pitchFamily="34" charset="0"/>
+                <a:ea typeface="Times New Roman" pitchFamily="34" charset="-122"/>
+                <a:cs typeface="Times New Roman" pitchFamily="34" charset="-120"/>
+              </a:rPr>
+              <a:t>A) Near the Ground</a:t>
+            </a:r>
+            <a:endParaRPr lang="en-US" sz="3000" dirty="0"/>
+          </a:p>
+        </p:txBody>
+      </p:sp>
+      <p:sp>
+        <p:nvSpPr>
+          <p:cNvPr id="5" name="Text 3"/>
+          <p:cNvSpPr/>
+          <p:nvPr/>
+        </p:nvSpPr>
+        <p:spPr>
+          <a:xfrm>
+            <a:off x="365760" y="2240280"/>
+            <a:ext cx="4846320" cy="4160520"/>
+          </a:xfrm>
+          <a:prstGeom prst="rect">
+            <a:avLst/>
+          </a:prstGeom>
+          <a:noFill/>
+          <a:ln/>
+        </p:spPr>
+        <p:txBody>
+          <a:bodyPr wrap="square" lIns="0" tIns="0" rIns="0" bIns="0" rtlCol="0" anchor="t"/>
+          <a:lstStyle/>
+          <a:p>
+            <a:pPr algn="l" indent="0" marL="0">
+              <a:spcAft>
+                <a:spcPts val="800"/>
+              </a:spcAft>
+              <a:buNone/>
+            </a:pPr>
+            <a:r>
+              <a:rPr lang="en-US" sz="3400" i="1" dirty="0">
+                <a:solidFill>
+                  <a:srgbClr val="111111"/>
+                </a:solidFill>
+                <a:latin typeface="Times New Roman" pitchFamily="34" charset="0"/>
+                <a:ea typeface="Times New Roman" pitchFamily="34" charset="-122"/>
+                <a:cs typeface="Times New Roman" pitchFamily="34" charset="-120"/>
+              </a:rPr>
+              <a:t>Condensation near the ground takes the following forms:</a:t>
+            </a:r>
+            <a:endParaRPr lang="en-US" sz="3400" dirty="0"/>
+          </a:p>
+          <a:p>
+            <a:pPr algn="l" indent="0" marL="0">
+              <a:spcAft>
+                <a:spcPts val="800"/>
+              </a:spcAft>
+              <a:buNone/>
+            </a:pPr>
+            <a:r>
+              <a:rPr lang="en-US" sz="3400" b="1" dirty="0">
+                <a:solidFill>
+                  <a:srgbClr val="111111"/>
+                </a:solidFill>
+                <a:latin typeface="Times New Roman" pitchFamily="34" charset="0"/>
+                <a:ea typeface="Times New Roman" pitchFamily="34" charset="-122"/>
+                <a:cs typeface="Times New Roman" pitchFamily="34" charset="-120"/>
+              </a:rPr>
+              <a:t>Dew: </a:t>
+            </a:r>
+            <a:pPr algn="l" indent="0" marL="0">
+              <a:spcAft>
+                <a:spcPts val="800"/>
+              </a:spcAft>
+              <a:buNone/>
+            </a:pPr>
+            <a:r>
+              <a:rPr lang="en-US" sz="3400" dirty="0">
+                <a:solidFill>
+                  <a:srgbClr val="111111"/>
+                </a:solidFill>
+                <a:latin typeface="Times New Roman" pitchFamily="34" charset="0"/>
+                <a:ea typeface="Times New Roman" pitchFamily="34" charset="-122"/>
+                <a:cs typeface="Times New Roman" pitchFamily="34" charset="-120"/>
+              </a:rPr>
+              <a:t>It is drops of water formed on cold surfaces, such as grass, in the early morning.</a:t>
+            </a:r>
+            <a:endParaRPr lang="en-US" sz="3400" dirty="0"/>
           </a:p>
         </p:txBody>
       </p:sp>
       <p:pic>
         <p:nvPicPr>
-          <p:cNvPr id="3" name="Image 0" descr="/home/claude/f4/img/minesec_sheet.png">    </p:cNvPr>
+          <p:cNvPr id="6" name="Image 0" descr="/home/claude/f4/img/v2/lsa_dew.jpg">    </p:cNvPr>
           <p:cNvPicPr>
             <a:picLocks noChangeAspect="1"/>
           </p:cNvPicPr>
@@ -12812,8 +13756,8 @@
         </p:blipFill>
         <p:spPr>
           <a:xfrm>
-            <a:off x="0" y="658368"/>
-            <a:ext cx="5120640" cy="5833872"/>
+            <a:off x="5349240" y="2071212"/>
+            <a:ext cx="6659575" cy="3693983"/>
           </a:xfrm>
           <a:prstGeom prst="rect">
             <a:avLst/>
@@ -12822,14 +13766,14 @@
       </p:pic>
       <p:sp>
         <p:nvSpPr>
-          <p:cNvPr id="4" name="Text 1"/>
+          <p:cNvPr id="7" name="Text 4"/>
           <p:cNvSpPr/>
           <p:nvPr/>
         </p:nvSpPr>
         <p:spPr>
           <a:xfrm>
-            <a:off x="5349240" y="1005840"/>
-            <a:ext cx="6522415" cy="731520"/>
+            <a:off x="5349240" y="6089904"/>
+            <a:ext cx="6659575" cy="347472"/>
           </a:xfrm>
           <a:prstGeom prst="rect">
             <a:avLst/>
@@ -12838,68 +13782,24 @@
           <a:ln/>
         </p:spPr>
         <p:txBody>
-          <a:bodyPr wrap="square" lIns="0" tIns="0" rIns="0" bIns="0" rtlCol="0" anchor="ctr">
-            <a:normAutofit/>
-          </a:bodyPr>
+          <a:bodyPr wrap="square" lIns="0" tIns="0" rIns="0" bIns="0" rtlCol="0" anchor="ctr"/>
           <a:lstStyle/>
           <a:p>
             <a:pPr algn="ctr" indent="0" marL="0">
               <a:buNone/>
             </a:pPr>
             <a:r>
-              <a:rPr lang="en-US" sz="3600" b="1" dirty="0">
-                <a:solidFill>
-                  <a:srgbClr val="990011"/>
+              <a:rPr lang="en-US" sz="1600" i="1" dirty="0">
+                <a:solidFill>
+                  <a:srgbClr val="555555"/>
                 </a:solidFill>
                 <a:latin typeface="Times New Roman" pitchFamily="34" charset="0"/>
                 <a:ea typeface="Times New Roman" pitchFamily="34" charset="-122"/>
                 <a:cs typeface="Times New Roman" pitchFamily="34" charset="-120"/>
               </a:rPr>
-              <a:t>Expected Answer</a:t>
-            </a:r>
-            <a:endParaRPr lang="en-US" sz="3600" dirty="0"/>
-          </a:p>
-        </p:txBody>
-      </p:sp>
-      <p:sp>
-        <p:nvSpPr>
-          <p:cNvPr id="5" name="Text 2"/>
-          <p:cNvSpPr/>
-          <p:nvPr/>
-        </p:nvSpPr>
-        <p:spPr>
-          <a:xfrm>
-            <a:off x="5349240" y="1783080"/>
-            <a:ext cx="6522415" cy="4663440"/>
-          </a:xfrm>
-          <a:prstGeom prst="rect">
-            <a:avLst/>
-          </a:prstGeom>
-          <a:noFill/>
-          <a:ln/>
-        </p:spPr>
-        <p:txBody>
-          <a:bodyPr wrap="square" lIns="0" tIns="0" rIns="0" bIns="0" rtlCol="0" anchor="t"/>
-          <a:lstStyle/>
-          <a:p>
-            <a:pPr algn="l" indent="0" marL="0">
-              <a:spcAft>
-                <a:spcPts val="800"/>
-              </a:spcAft>
-              <a:buNone/>
-            </a:pPr>
-            <a:r>
-              <a:rPr lang="en-US" sz="4000" dirty="0">
-                <a:solidFill>
-                  <a:srgbClr val="111111"/>
-                </a:solidFill>
-                <a:latin typeface="Times New Roman" pitchFamily="34" charset="0"/>
-                <a:ea typeface="Times New Roman" pitchFamily="34" charset="-122"/>
-                <a:cs typeface="Times New Roman" pitchFamily="34" charset="-120"/>
-              </a:rPr>
-              <a:t>The change of water vapour into water.</a:t>
-            </a:r>
-            <a:endParaRPr lang="en-US" sz="4000" dirty="0"/>
+              <a:t>Illustration: dew</a:t>
+            </a:r>
+            <a:endParaRPr lang="en-US" sz="1600" dirty="0"/>
           </a:p>
         </p:txBody>
       </p:sp>
@@ -13009,7 +13909,7 @@
                 <a:ea typeface="Calibri" pitchFamily="34" charset="-122"/>
                 <a:cs typeface="Calibri" pitchFamily="34" charset="-120"/>
               </a:rPr>
-              <a:t>FORMATIVE EVALUATION</a:t>
+              <a:t>BOARD SUMMARY</a:t>
             </a:r>
             <a:endParaRPr lang="en-US" sz="1400" dirty="0"/>
           </a:p>
@@ -13074,7 +13974,7 @@
                 <a:ea typeface="Times New Roman" pitchFamily="34" charset="-122"/>
                 <a:cs typeface="Times New Roman" pitchFamily="34" charset="-120"/>
               </a:rPr>
-              <a:t>Evaluation 2</a:t>
+              <a:t>2. Forms of Condensation</a:t>
             </a:r>
             <a:endParaRPr lang="en-US" sz="3600" dirty="0"/>
           </a:p>
@@ -13088,8 +13988,47 @@
         </p:nvSpPr>
         <p:spPr>
           <a:xfrm>
-            <a:off x="5349240" y="1783080"/>
-            <a:ext cx="6522415" cy="4663440"/>
+            <a:off x="5349240" y="1737360"/>
+            <a:ext cx="6522415" cy="457200"/>
+          </a:xfrm>
+          <a:prstGeom prst="rect">
+            <a:avLst/>
+          </a:prstGeom>
+          <a:noFill/>
+          <a:ln/>
+        </p:spPr>
+        <p:txBody>
+          <a:bodyPr wrap="square" lIns="0" tIns="0" rIns="0" bIns="0" rtlCol="0" anchor="ctr"/>
+          <a:lstStyle/>
+          <a:p>
+            <a:pPr algn="l" indent="0" marL="0">
+              <a:buNone/>
+            </a:pPr>
+            <a:r>
+              <a:rPr lang="en-US" sz="3200" b="1" dirty="0">
+                <a:solidFill>
+                  <a:srgbClr val="990011"/>
+                </a:solidFill>
+                <a:latin typeface="Times New Roman" pitchFamily="34" charset="0"/>
+                <a:ea typeface="Times New Roman" pitchFamily="34" charset="-122"/>
+                <a:cs typeface="Times New Roman" pitchFamily="34" charset="-120"/>
+              </a:rPr>
+              <a:t>A) Near the Ground</a:t>
+            </a:r>
+            <a:endParaRPr lang="en-US" sz="3200" dirty="0"/>
+          </a:p>
+        </p:txBody>
+      </p:sp>
+      <p:sp>
+        <p:nvSpPr>
+          <p:cNvPr id="6" name="Text 3"/>
+          <p:cNvSpPr/>
+          <p:nvPr/>
+        </p:nvSpPr>
+        <p:spPr>
+          <a:xfrm>
+            <a:off x="5349240" y="2240280"/>
+            <a:ext cx="6522415" cy="4206240"/>
           </a:xfrm>
           <a:prstGeom prst="rect">
             <a:avLst/>
@@ -13108,7 +14047,7 @@
               <a:buNone/>
             </a:pPr>
             <a:r>
-              <a:rPr lang="en-US" sz="4000" dirty="0">
+              <a:rPr lang="en-US" sz="4000" b="1" dirty="0">
                 <a:solidFill>
                   <a:srgbClr val="111111"/>
                 </a:solidFill>
@@ -13116,7 +14055,24 @@
                 <a:ea typeface="Times New Roman" pitchFamily="34" charset="-122"/>
                 <a:cs typeface="Times New Roman" pitchFamily="34" charset="-120"/>
               </a:rPr>
-              <a:t>Which cloud brings thunderstorms?</a:t>
+              <a:t>Frost: </a:t>
+            </a:r>
+            <a:pPr algn="l" indent="0" marL="0">
+              <a:spcAft>
+                <a:spcPts val="800"/>
+              </a:spcAft>
+              <a:buNone/>
+            </a:pPr>
+            <a:r>
+              <a:rPr lang="en-US" sz="4000" dirty="0">
+                <a:solidFill>
+                  <a:srgbClr val="111111"/>
+                </a:solidFill>
+                <a:latin typeface="Times New Roman" pitchFamily="34" charset="0"/>
+                <a:ea typeface="Times New Roman" pitchFamily="34" charset="-122"/>
+                <a:cs typeface="Times New Roman" pitchFamily="34" charset="-120"/>
+              </a:rPr>
+              <a:t>It is ice crystals formed when the dew point is below 0 °C.</a:t>
             </a:r>
             <a:endParaRPr lang="en-US" sz="4000" dirty="0"/>
           </a:p>
@@ -13228,15 +14184,156 @@
                 <a:ea typeface="Calibri" pitchFamily="34" charset="-122"/>
                 <a:cs typeface="Calibri" pitchFamily="34" charset="-120"/>
               </a:rPr>
-              <a:t>FORMATIVE EVALUATION</a:t>
+              <a:t>BOARD SUMMARY</a:t>
             </a:r>
             <a:endParaRPr lang="en-US" sz="1400" dirty="0"/>
+          </a:p>
+        </p:txBody>
+      </p:sp>
+      <p:sp>
+        <p:nvSpPr>
+          <p:cNvPr id="3" name="Text 1"/>
+          <p:cNvSpPr/>
+          <p:nvPr/>
+        </p:nvSpPr>
+        <p:spPr>
+          <a:xfrm>
+            <a:off x="365760" y="1005840"/>
+            <a:ext cx="11460175" cy="731520"/>
+          </a:xfrm>
+          <a:prstGeom prst="rect">
+            <a:avLst/>
+          </a:prstGeom>
+          <a:noFill/>
+          <a:ln/>
+        </p:spPr>
+        <p:txBody>
+          <a:bodyPr wrap="square" lIns="0" tIns="0" rIns="0" bIns="0" rtlCol="0" anchor="ctr">
+            <a:normAutofit/>
+          </a:bodyPr>
+          <a:lstStyle/>
+          <a:p>
+            <a:pPr algn="ctr" indent="0" marL="0">
+              <a:buNone/>
+            </a:pPr>
+            <a:r>
+              <a:rPr lang="en-US" sz="3600" b="1" dirty="0">
+                <a:solidFill>
+                  <a:srgbClr val="990011"/>
+                </a:solidFill>
+                <a:latin typeface="Times New Roman" pitchFamily="34" charset="0"/>
+                <a:ea typeface="Times New Roman" pitchFamily="34" charset="-122"/>
+                <a:cs typeface="Times New Roman" pitchFamily="34" charset="-120"/>
+              </a:rPr>
+              <a:t>2. Forms of Condensation</a:t>
+            </a:r>
+            <a:endParaRPr lang="en-US" sz="3600" dirty="0"/>
+          </a:p>
+        </p:txBody>
+      </p:sp>
+      <p:sp>
+        <p:nvSpPr>
+          <p:cNvPr id="4" name="Text 2"/>
+          <p:cNvSpPr/>
+          <p:nvPr/>
+        </p:nvSpPr>
+        <p:spPr>
+          <a:xfrm>
+            <a:off x="365760" y="1737360"/>
+            <a:ext cx="5120640" cy="457200"/>
+          </a:xfrm>
+          <a:prstGeom prst="rect">
+            <a:avLst/>
+          </a:prstGeom>
+          <a:noFill/>
+          <a:ln/>
+        </p:spPr>
+        <p:txBody>
+          <a:bodyPr wrap="square" lIns="0" tIns="0" rIns="0" bIns="0" rtlCol="0" anchor="ctr">
+            <a:normAutofit/>
+          </a:bodyPr>
+          <a:lstStyle/>
+          <a:p>
+            <a:pPr algn="l" indent="0" marL="0">
+              <a:buNone/>
+            </a:pPr>
+            <a:r>
+              <a:rPr lang="en-US" sz="3000" b="1" dirty="0">
+                <a:solidFill>
+                  <a:srgbClr val="990011"/>
+                </a:solidFill>
+                <a:latin typeface="Times New Roman" pitchFamily="34" charset="0"/>
+                <a:ea typeface="Times New Roman" pitchFamily="34" charset="-122"/>
+                <a:cs typeface="Times New Roman" pitchFamily="34" charset="-120"/>
+              </a:rPr>
+              <a:t>A) Near the Ground</a:t>
+            </a:r>
+            <a:endParaRPr lang="en-US" sz="3000" dirty="0"/>
+          </a:p>
+        </p:txBody>
+      </p:sp>
+      <p:sp>
+        <p:nvSpPr>
+          <p:cNvPr id="5" name="Text 3"/>
+          <p:cNvSpPr/>
+          <p:nvPr/>
+        </p:nvSpPr>
+        <p:spPr>
+          <a:xfrm>
+            <a:off x="365760" y="2240280"/>
+            <a:ext cx="4846320" cy="4160520"/>
+          </a:xfrm>
+          <a:prstGeom prst="rect">
+            <a:avLst/>
+          </a:prstGeom>
+          <a:noFill/>
+          <a:ln/>
+        </p:spPr>
+        <p:txBody>
+          <a:bodyPr wrap="square" lIns="0" tIns="0" rIns="0" bIns="0" rtlCol="0" anchor="t"/>
+          <a:lstStyle/>
+          <a:p>
+            <a:pPr algn="l" indent="0" marL="0">
+              <a:spcAft>
+                <a:spcPts val="800"/>
+              </a:spcAft>
+              <a:buNone/>
+            </a:pPr>
+            <a:r>
+              <a:rPr lang="en-US" sz="3600" b="1" dirty="0">
+                <a:solidFill>
+                  <a:srgbClr val="111111"/>
+                </a:solidFill>
+                <a:latin typeface="Times New Roman" pitchFamily="34" charset="0"/>
+                <a:ea typeface="Times New Roman" pitchFamily="34" charset="-122"/>
+                <a:cs typeface="Times New Roman" pitchFamily="34" charset="-120"/>
+              </a:rPr>
+              <a:t>Fog: </a:t>
+            </a:r>
+            <a:pPr algn="l" indent="0" marL="0">
+              <a:spcAft>
+                <a:spcPts val="800"/>
+              </a:spcAft>
+              <a:buNone/>
+            </a:pPr>
+            <a:r>
+              <a:rPr lang="en-US" sz="3600" dirty="0">
+                <a:solidFill>
+                  <a:srgbClr val="111111"/>
+                </a:solidFill>
+                <a:latin typeface="Times New Roman" pitchFamily="34" charset="0"/>
+                <a:ea typeface="Times New Roman" pitchFamily="34" charset="-122"/>
+                <a:cs typeface="Times New Roman" pitchFamily="34" charset="-120"/>
+              </a:rPr>
+              <a:t>It is a cloud at ground level in which we see less than 1 km.</a:t>
+            </a:r>
+            <a:endParaRPr lang="en-US" sz="3600" dirty="0"/>
           </a:p>
         </p:txBody>
       </p:sp>
       <p:pic>
         <p:nvPicPr>
-          <p:cNvPr id="3" name="Image 0" descr="/home/claude/f4/img/minesec_sheet.png">    </p:cNvPr>
+          <p:cNvPr id="6" name="Image 0" descr="/home/claude/f4/img/v2/f4_fog.jpg">    </p:cNvPr>
           <p:cNvPicPr>
             <a:picLocks noChangeAspect="1"/>
           </p:cNvPicPr>
@@ -13250,8 +14347,8 @@
         </p:blipFill>
         <p:spPr>
           <a:xfrm>
-            <a:off x="0" y="658368"/>
-            <a:ext cx="5120640" cy="5833872"/>
+            <a:off x="5349240" y="2682541"/>
+            <a:ext cx="6659575" cy="2471327"/>
           </a:xfrm>
           <a:prstGeom prst="rect">
             <a:avLst/>
@@ -13260,14 +14357,14 @@
       </p:pic>
       <p:sp>
         <p:nvSpPr>
-          <p:cNvPr id="4" name="Text 1"/>
+          <p:cNvPr id="7" name="Text 4"/>
           <p:cNvSpPr/>
           <p:nvPr/>
         </p:nvSpPr>
         <p:spPr>
           <a:xfrm>
-            <a:off x="5349240" y="1005840"/>
-            <a:ext cx="6522415" cy="731520"/>
+            <a:off x="5349240" y="6089904"/>
+            <a:ext cx="6659575" cy="347472"/>
           </a:xfrm>
           <a:prstGeom prst="rect">
             <a:avLst/>
@@ -13276,68 +14373,24 @@
           <a:ln/>
         </p:spPr>
         <p:txBody>
-          <a:bodyPr wrap="square" lIns="0" tIns="0" rIns="0" bIns="0" rtlCol="0" anchor="ctr">
-            <a:normAutofit/>
-          </a:bodyPr>
+          <a:bodyPr wrap="square" lIns="0" tIns="0" rIns="0" bIns="0" rtlCol="0" anchor="ctr"/>
           <a:lstStyle/>
           <a:p>
             <a:pPr algn="ctr" indent="0" marL="0">
               <a:buNone/>
             </a:pPr>
             <a:r>
-              <a:rPr lang="en-US" sz="3600" b="1" dirty="0">
-                <a:solidFill>
-                  <a:srgbClr val="990011"/>
+              <a:rPr lang="en-US" sz="1600" i="1" dirty="0">
+                <a:solidFill>
+                  <a:srgbClr val="555555"/>
                 </a:solidFill>
                 <a:latin typeface="Times New Roman" pitchFamily="34" charset="0"/>
                 <a:ea typeface="Times New Roman" pitchFamily="34" charset="-122"/>
                 <a:cs typeface="Times New Roman" pitchFamily="34" charset="-120"/>
               </a:rPr>
-              <a:t>Expected Answer</a:t>
-            </a:r>
-            <a:endParaRPr lang="en-US" sz="3600" dirty="0"/>
-          </a:p>
-        </p:txBody>
-      </p:sp>
-      <p:sp>
-        <p:nvSpPr>
-          <p:cNvPr id="5" name="Text 2"/>
-          <p:cNvSpPr/>
-          <p:nvPr/>
-        </p:nvSpPr>
-        <p:spPr>
-          <a:xfrm>
-            <a:off x="5349240" y="1783080"/>
-            <a:ext cx="6522415" cy="4663440"/>
-          </a:xfrm>
-          <a:prstGeom prst="rect">
-            <a:avLst/>
-          </a:prstGeom>
-          <a:noFill/>
-          <a:ln/>
-        </p:spPr>
-        <p:txBody>
-          <a:bodyPr wrap="square" lIns="0" tIns="0" rIns="0" bIns="0" rtlCol="0" anchor="t"/>
-          <a:lstStyle/>
-          <a:p>
-            <a:pPr algn="l" indent="0" marL="0">
-              <a:spcAft>
-                <a:spcPts val="800"/>
-              </a:spcAft>
-              <a:buNone/>
-            </a:pPr>
-            <a:r>
-              <a:rPr lang="en-US" sz="4000" dirty="0">
-                <a:solidFill>
-                  <a:srgbClr val="111111"/>
-                </a:solidFill>
-                <a:latin typeface="Times New Roman" pitchFamily="34" charset="0"/>
-                <a:ea typeface="Times New Roman" pitchFamily="34" charset="-122"/>
-                <a:cs typeface="Times New Roman" pitchFamily="34" charset="-120"/>
-              </a:rPr>
-              <a:t>The cumulonimbus.</a:t>
-            </a:r>
-            <a:endParaRPr lang="en-US" sz="4000" dirty="0"/>
+              <a:t>Illustration: fog</a:t>
+            </a:r>
+            <a:endParaRPr lang="en-US" sz="1600" dirty="0"/>
           </a:p>
         </p:txBody>
       </p:sp>
@@ -13447,7 +14500,7 @@
                 <a:ea typeface="Calibri" pitchFamily="34" charset="-122"/>
                 <a:cs typeface="Calibri" pitchFamily="34" charset="-120"/>
               </a:rPr>
-              <a:t>REMEDIATION</a:t>
+              <a:t>BOARD SUMMARY</a:t>
             </a:r>
             <a:endParaRPr lang="en-US" sz="1400" dirty="0"/>
           </a:p>
@@ -13470,7 +14523,7 @@
         <p:spPr>
           <a:xfrm>
             <a:off x="0" y="658368"/>
-            <a:ext cx="2468880" cy="5833872"/>
+            <a:ext cx="5120640" cy="5833872"/>
           </a:xfrm>
           <a:prstGeom prst="rect">
             <a:avLst/>
@@ -13485,8 +14538,8 @@
         </p:nvSpPr>
         <p:spPr>
           <a:xfrm>
-            <a:off x="2697480" y="1005840"/>
-            <a:ext cx="9174175" cy="731520"/>
+            <a:off x="5349240" y="1005840"/>
+            <a:ext cx="6522415" cy="731520"/>
           </a:xfrm>
           <a:prstGeom prst="rect">
             <a:avLst/>
@@ -13512,7 +14565,7 @@
                 <a:ea typeface="Times New Roman" pitchFamily="34" charset="-122"/>
                 <a:cs typeface="Times New Roman" pitchFamily="34" charset="-120"/>
               </a:rPr>
-              <a:t>Remediation</a:t>
+              <a:t>2. Forms of Condensation</a:t>
             </a:r>
             <a:endParaRPr lang="en-US" sz="3600" dirty="0"/>
           </a:p>
@@ -13526,8 +14579,47 @@
         </p:nvSpPr>
         <p:spPr>
           <a:xfrm>
-            <a:off x="2697480" y="1783080"/>
-            <a:ext cx="9174175" cy="4663440"/>
+            <a:off x="5349240" y="1737360"/>
+            <a:ext cx="6522415" cy="457200"/>
+          </a:xfrm>
+          <a:prstGeom prst="rect">
+            <a:avLst/>
+          </a:prstGeom>
+          <a:noFill/>
+          <a:ln/>
+        </p:spPr>
+        <p:txBody>
+          <a:bodyPr wrap="square" lIns="0" tIns="0" rIns="0" bIns="0" rtlCol="0" anchor="ctr"/>
+          <a:lstStyle/>
+          <a:p>
+            <a:pPr algn="l" indent="0" marL="0">
+              <a:buNone/>
+            </a:pPr>
+            <a:r>
+              <a:rPr lang="en-US" sz="3200" b="1" dirty="0">
+                <a:solidFill>
+                  <a:srgbClr val="990011"/>
+                </a:solidFill>
+                <a:latin typeface="Times New Roman" pitchFamily="34" charset="0"/>
+                <a:ea typeface="Times New Roman" pitchFamily="34" charset="-122"/>
+                <a:cs typeface="Times New Roman" pitchFamily="34" charset="-120"/>
+              </a:rPr>
+              <a:t>A) Near the Ground</a:t>
+            </a:r>
+            <a:endParaRPr lang="en-US" sz="3200" dirty="0"/>
+          </a:p>
+        </p:txBody>
+      </p:sp>
+      <p:sp>
+        <p:nvSpPr>
+          <p:cNvPr id="6" name="Text 3"/>
+          <p:cNvSpPr/>
+          <p:nvPr/>
+        </p:nvSpPr>
+        <p:spPr>
+          <a:xfrm>
+            <a:off x="5349240" y="2240280"/>
+            <a:ext cx="6522415" cy="4206240"/>
           </a:xfrm>
           <a:prstGeom prst="rect">
             <a:avLst/>
@@ -13554,18 +14646,13 @@
                 <a:ea typeface="Times New Roman" pitchFamily="34" charset="-122"/>
                 <a:cs typeface="Times New Roman" pitchFamily="34" charset="-120"/>
               </a:rPr>
-              <a:t>Fill in the blanks:</a:t>
-            </a:r>
-            <a:endParaRPr lang="en-US" sz="4000" dirty="0"/>
-          </a:p>
-          <a:p>
-            <a:pPr algn="l" marL="342900" indent="-342900">
+              <a:t>Mist: </a:t>
+            </a:r>
+            <a:pPr algn="l" indent="0" marL="0">
               <a:spcAft>
                 <a:spcPts val="800"/>
               </a:spcAft>
-              <a:buSzPct val="100000"/>
-              <a:buFont typeface="+mj-lt"/>
-              <a:buAutoNum type="arabicPeriod" startAt="1"/>
+              <a:buNone/>
             </a:pPr>
             <a:r>
               <a:rPr lang="en-US" sz="4000" dirty="0">
@@ -13576,51 +14663,7 @@
                 <a:ea typeface="Times New Roman" pitchFamily="34" charset="-122"/>
                 <a:cs typeface="Times New Roman" pitchFamily="34" charset="-120"/>
               </a:rPr>
-              <a:t>Water vapour becoming water is ______.</a:t>
-            </a:r>
-            <a:endParaRPr lang="en-US" sz="4000" dirty="0"/>
-          </a:p>
-          <a:p>
-            <a:pPr algn="l" marL="342900" indent="-342900">
-              <a:spcAft>
-                <a:spcPts val="800"/>
-              </a:spcAft>
-              <a:buSzPct val="100000"/>
-              <a:buFont typeface="+mj-lt"/>
-              <a:buAutoNum type="arabicPeriod" startAt="1"/>
-            </a:pPr>
-            <a:r>
-              <a:rPr lang="en-US" sz="4000" dirty="0">
-                <a:solidFill>
-                  <a:srgbClr val="111111"/>
-                </a:solidFill>
-                <a:latin typeface="Times New Roman" pitchFamily="34" charset="0"/>
-                <a:ea typeface="Times New Roman" pitchFamily="34" charset="-122"/>
-                <a:cs typeface="Times New Roman" pitchFamily="34" charset="-120"/>
-              </a:rPr>
-              <a:t>Drops on grass in the morning are ______.</a:t>
-            </a:r>
-            <a:endParaRPr lang="en-US" sz="4000" dirty="0"/>
-          </a:p>
-          <a:p>
-            <a:pPr algn="l" marL="342900" indent="-342900">
-              <a:spcAft>
-                <a:spcPts val="800"/>
-              </a:spcAft>
-              <a:buSzPct val="100000"/>
-              <a:buFont typeface="+mj-lt"/>
-              <a:buAutoNum type="arabicPeriod" startAt="1"/>
-            </a:pPr>
-            <a:r>
-              <a:rPr lang="en-US" sz="4000" dirty="0">
-                <a:solidFill>
-                  <a:srgbClr val="111111"/>
-                </a:solidFill>
-                <a:latin typeface="Times New Roman" pitchFamily="34" charset="0"/>
-                <a:ea typeface="Times New Roman" pitchFamily="34" charset="-122"/>
-                <a:cs typeface="Times New Roman" pitchFamily="34" charset="-120"/>
-              </a:rPr>
-              <a:t>A cloud at ground level is ______.</a:t>
+              <a:t>It is a thin fog in which we can see more than 1 km.</a:t>
             </a:r>
             <a:endParaRPr lang="en-US" sz="4000" dirty="0"/>
           </a:p>
@@ -13732,15 +14775,176 @@
                 <a:ea typeface="Calibri" pitchFamily="34" charset="-122"/>
                 <a:cs typeface="Calibri" pitchFamily="34" charset="-120"/>
               </a:rPr>
-              <a:t>HOMEWORK</a:t>
+              <a:t>BOARD SUMMARY</a:t>
             </a:r>
             <a:endParaRPr lang="en-US" sz="1400" dirty="0"/>
+          </a:p>
+        </p:txBody>
+      </p:sp>
+      <p:sp>
+        <p:nvSpPr>
+          <p:cNvPr id="3" name="Text 1"/>
+          <p:cNvSpPr/>
+          <p:nvPr/>
+        </p:nvSpPr>
+        <p:spPr>
+          <a:xfrm>
+            <a:off x="365760" y="1005840"/>
+            <a:ext cx="11460175" cy="731520"/>
+          </a:xfrm>
+          <a:prstGeom prst="rect">
+            <a:avLst/>
+          </a:prstGeom>
+          <a:noFill/>
+          <a:ln/>
+        </p:spPr>
+        <p:txBody>
+          <a:bodyPr wrap="square" lIns="0" tIns="0" rIns="0" bIns="0" rtlCol="0" anchor="ctr">
+            <a:normAutofit/>
+          </a:bodyPr>
+          <a:lstStyle/>
+          <a:p>
+            <a:pPr algn="ctr" indent="0" marL="0">
+              <a:buNone/>
+            </a:pPr>
+            <a:r>
+              <a:rPr lang="en-US" sz="3600" b="1" dirty="0">
+                <a:solidFill>
+                  <a:srgbClr val="990011"/>
+                </a:solidFill>
+                <a:latin typeface="Times New Roman" pitchFamily="34" charset="0"/>
+                <a:ea typeface="Times New Roman" pitchFamily="34" charset="-122"/>
+                <a:cs typeface="Times New Roman" pitchFamily="34" charset="-120"/>
+              </a:rPr>
+              <a:t>2. Forms of Condensation</a:t>
+            </a:r>
+            <a:endParaRPr lang="en-US" sz="3600" dirty="0"/>
+          </a:p>
+        </p:txBody>
+      </p:sp>
+      <p:sp>
+        <p:nvSpPr>
+          <p:cNvPr id="4" name="Text 2"/>
+          <p:cNvSpPr/>
+          <p:nvPr/>
+        </p:nvSpPr>
+        <p:spPr>
+          <a:xfrm>
+            <a:off x="365760" y="1737360"/>
+            <a:ext cx="5120640" cy="457200"/>
+          </a:xfrm>
+          <a:prstGeom prst="rect">
+            <a:avLst/>
+          </a:prstGeom>
+          <a:noFill/>
+          <a:ln/>
+        </p:spPr>
+        <p:txBody>
+          <a:bodyPr wrap="square" lIns="0" tIns="0" rIns="0" bIns="0" rtlCol="0" anchor="ctr">
+            <a:normAutofit/>
+          </a:bodyPr>
+          <a:lstStyle/>
+          <a:p>
+            <a:pPr algn="l" indent="0" marL="0">
+              <a:buNone/>
+            </a:pPr>
+            <a:r>
+              <a:rPr lang="en-US" sz="3000" b="1" dirty="0">
+                <a:solidFill>
+                  <a:srgbClr val="990011"/>
+                </a:solidFill>
+                <a:latin typeface="Times New Roman" pitchFamily="34" charset="0"/>
+                <a:ea typeface="Times New Roman" pitchFamily="34" charset="-122"/>
+                <a:cs typeface="Times New Roman" pitchFamily="34" charset="-120"/>
+              </a:rPr>
+              <a:t>B) In the Atmosphere</a:t>
+            </a:r>
+            <a:endParaRPr lang="en-US" sz="3000" dirty="0"/>
+          </a:p>
+        </p:txBody>
+      </p:sp>
+      <p:sp>
+        <p:nvSpPr>
+          <p:cNvPr id="5" name="Text 3"/>
+          <p:cNvSpPr/>
+          <p:nvPr/>
+        </p:nvSpPr>
+        <p:spPr>
+          <a:xfrm>
+            <a:off x="365760" y="2240280"/>
+            <a:ext cx="4846320" cy="4160520"/>
+          </a:xfrm>
+          <a:prstGeom prst="rect">
+            <a:avLst/>
+          </a:prstGeom>
+          <a:noFill/>
+          <a:ln/>
+        </p:spPr>
+        <p:txBody>
+          <a:bodyPr wrap="square" lIns="0" tIns="0" rIns="0" bIns="0" rtlCol="0" anchor="t"/>
+          <a:lstStyle/>
+          <a:p>
+            <a:pPr algn="l" indent="0" marL="0">
+              <a:spcAft>
+                <a:spcPts val="800"/>
+              </a:spcAft>
+              <a:buNone/>
+            </a:pPr>
+            <a:r>
+              <a:rPr lang="en-US" sz="3600" i="1" dirty="0">
+                <a:solidFill>
+                  <a:srgbClr val="111111"/>
+                </a:solidFill>
+                <a:latin typeface="Times New Roman" pitchFamily="34" charset="0"/>
+                <a:ea typeface="Times New Roman" pitchFamily="34" charset="-122"/>
+                <a:cs typeface="Times New Roman" pitchFamily="34" charset="-120"/>
+              </a:rPr>
+              <a:t>Condensation in the atmosphere forms the following clouds:</a:t>
+            </a:r>
+            <a:endParaRPr lang="en-US" sz="3600" dirty="0"/>
+          </a:p>
+          <a:p>
+            <a:pPr algn="l" indent="0" marL="0">
+              <a:spcAft>
+                <a:spcPts val="800"/>
+              </a:spcAft>
+              <a:buNone/>
+            </a:pPr>
+            <a:r>
+              <a:rPr lang="en-US" sz="3600" b="1" dirty="0">
+                <a:solidFill>
+                  <a:srgbClr val="111111"/>
+                </a:solidFill>
+                <a:latin typeface="Times New Roman" pitchFamily="34" charset="0"/>
+                <a:ea typeface="Times New Roman" pitchFamily="34" charset="-122"/>
+                <a:cs typeface="Times New Roman" pitchFamily="34" charset="-120"/>
+              </a:rPr>
+              <a:t>Cirrus: </a:t>
+            </a:r>
+            <a:pPr algn="l" indent="0" marL="0">
+              <a:spcAft>
+                <a:spcPts val="800"/>
+              </a:spcAft>
+              <a:buNone/>
+            </a:pPr>
+            <a:r>
+              <a:rPr lang="en-US" sz="3600" dirty="0">
+                <a:solidFill>
+                  <a:srgbClr val="111111"/>
+                </a:solidFill>
+                <a:latin typeface="Times New Roman" pitchFamily="34" charset="0"/>
+                <a:ea typeface="Times New Roman" pitchFamily="34" charset="-122"/>
+                <a:cs typeface="Times New Roman" pitchFamily="34" charset="-120"/>
+              </a:rPr>
+              <a:t>They are high, thin, feathery clouds made of ice crystals.</a:t>
+            </a:r>
+            <a:endParaRPr lang="en-US" sz="3600" dirty="0"/>
           </a:p>
         </p:txBody>
       </p:sp>
       <p:pic>
         <p:nvPicPr>
-          <p:cNvPr id="3" name="Image 0" descr="/home/claude/f4/img/minesec_sheet.png">    </p:cNvPr>
+          <p:cNvPr id="6" name="Image 0" descr="/home/claude/f4/img/v2/cloud_types_big.png">    </p:cNvPr>
           <p:cNvPicPr>
             <a:picLocks noChangeAspect="1"/>
           </p:cNvPicPr>
@@ -13754,8 +14958,8 @@
         </p:blipFill>
         <p:spPr>
           <a:xfrm>
-            <a:off x="0" y="658368"/>
-            <a:ext cx="5120640" cy="5833872"/>
+            <a:off x="5349240" y="2617506"/>
+            <a:ext cx="6659575" cy="2601397"/>
           </a:xfrm>
           <a:prstGeom prst="rect">
             <a:avLst/>
@@ -13764,14 +14968,14 @@
       </p:pic>
       <p:sp>
         <p:nvSpPr>
-          <p:cNvPr id="4" name="Text 1"/>
+          <p:cNvPr id="7" name="Text 4"/>
           <p:cNvSpPr/>
           <p:nvPr/>
         </p:nvSpPr>
         <p:spPr>
           <a:xfrm>
-            <a:off x="5349240" y="1005840"/>
-            <a:ext cx="6522415" cy="731520"/>
+            <a:off x="5349240" y="6089904"/>
+            <a:ext cx="6659575" cy="347472"/>
           </a:xfrm>
           <a:prstGeom prst="rect">
             <a:avLst/>
@@ -13780,68 +14984,24 @@
           <a:ln/>
         </p:spPr>
         <p:txBody>
-          <a:bodyPr wrap="square" lIns="0" tIns="0" rIns="0" bIns="0" rtlCol="0" anchor="ctr">
-            <a:normAutofit/>
-          </a:bodyPr>
+          <a:bodyPr wrap="square" lIns="0" tIns="0" rIns="0" bIns="0" rtlCol="0" anchor="ctr"/>
           <a:lstStyle/>
           <a:p>
             <a:pPr algn="ctr" indent="0" marL="0">
               <a:buNone/>
             </a:pPr>
             <a:r>
-              <a:rPr lang="en-US" sz="3600" b="1" dirty="0">
-                <a:solidFill>
-                  <a:srgbClr val="990011"/>
+              <a:rPr lang="en-US" sz="1600" i="1" dirty="0">
+                <a:solidFill>
+                  <a:srgbClr val="555555"/>
                 </a:solidFill>
                 <a:latin typeface="Times New Roman" pitchFamily="34" charset="0"/>
                 <a:ea typeface="Times New Roman" pitchFamily="34" charset="-122"/>
                 <a:cs typeface="Times New Roman" pitchFamily="34" charset="-120"/>
               </a:rPr>
-              <a:t>Homework</a:t>
-            </a:r>
-            <a:endParaRPr lang="en-US" sz="3600" dirty="0"/>
-          </a:p>
-        </p:txBody>
-      </p:sp>
-      <p:sp>
-        <p:nvSpPr>
-          <p:cNvPr id="5" name="Text 2"/>
-          <p:cNvSpPr/>
-          <p:nvPr/>
-        </p:nvSpPr>
-        <p:spPr>
-          <a:xfrm>
-            <a:off x="5349240" y="1783080"/>
-            <a:ext cx="6522415" cy="4663440"/>
-          </a:xfrm>
-          <a:prstGeom prst="rect">
-            <a:avLst/>
-          </a:prstGeom>
-          <a:noFill/>
-          <a:ln/>
-        </p:spPr>
-        <p:txBody>
-          <a:bodyPr wrap="square" lIns="0" tIns="0" rIns="0" bIns="0" rtlCol="0" anchor="t"/>
-          <a:lstStyle/>
-          <a:p>
-            <a:pPr algn="l" indent="0" marL="0">
-              <a:spcAft>
-                <a:spcPts val="800"/>
-              </a:spcAft>
-              <a:buNone/>
-            </a:pPr>
-            <a:r>
-              <a:rPr lang="en-US" sz="4000" dirty="0">
-                <a:solidFill>
-                  <a:srgbClr val="111111"/>
-                </a:solidFill>
-                <a:latin typeface="Times New Roman" pitchFamily="34" charset="0"/>
-                <a:ea typeface="Times New Roman" pitchFamily="34" charset="-122"/>
-                <a:cs typeface="Times New Roman" pitchFamily="34" charset="-120"/>
-              </a:rPr>
-              <a:t>During the next rain, put an empty tin with straight sides in an open place. After the rain, measure the depth of water in it with a ruler, in millimetres.</a:t>
-            </a:r>
-            <a:endParaRPr lang="en-US" sz="4000" dirty="0"/>
+              <a:t>Illustration: types of clouds</a:t>
+            </a:r>
+            <a:endParaRPr lang="en-US" sz="1600" dirty="0"/>
           </a:p>
         </p:txBody>
       </p:sp>
@@ -13951,7 +15111,7 @@
                 <a:ea typeface="Calibri" pitchFamily="34" charset="-122"/>
                 <a:cs typeface="Calibri" pitchFamily="34" charset="-120"/>
               </a:rPr>
-              <a:t>NEXT LESSON</a:t>
+              <a:t>BOARD SUMMARY</a:t>
             </a:r>
             <a:endParaRPr lang="en-US" sz="1400" dirty="0"/>
           </a:p>
@@ -14016,7 +15176,7 @@
                 <a:ea typeface="Times New Roman" pitchFamily="34" charset="-122"/>
                 <a:cs typeface="Times New Roman" pitchFamily="34" charset="-120"/>
               </a:rPr>
-              <a:t>Next Lesson</a:t>
+              <a:t>2. Forms of Condensation</a:t>
             </a:r>
             <a:endParaRPr lang="en-US" sz="3600" dirty="0"/>
           </a:p>
@@ -14030,8 +15190,8 @@
         </p:nvSpPr>
         <p:spPr>
           <a:xfrm>
-            <a:off x="5349240" y="1783080"/>
-            <a:ext cx="6522415" cy="4663440"/>
+            <a:off x="5349240" y="1737360"/>
+            <a:ext cx="6522415" cy="457200"/>
           </a:xfrm>
           <a:prstGeom prst="rect">
             <a:avLst/>
@@ -14043,7 +15203,46 @@
           <a:bodyPr wrap="square" lIns="0" tIns="0" rIns="0" bIns="0" rtlCol="0" anchor="ctr"/>
           <a:lstStyle/>
           <a:p>
-            <a:pPr algn="ctr" indent="0" marL="0">
+            <a:pPr algn="l" indent="0" marL="0">
+              <a:buNone/>
+            </a:pPr>
+            <a:r>
+              <a:rPr lang="en-US" sz="3200" b="1" dirty="0">
+                <a:solidFill>
+                  <a:srgbClr val="990011"/>
+                </a:solidFill>
+                <a:latin typeface="Times New Roman" pitchFamily="34" charset="0"/>
+                <a:ea typeface="Times New Roman" pitchFamily="34" charset="-122"/>
+                <a:cs typeface="Times New Roman" pitchFamily="34" charset="-120"/>
+              </a:rPr>
+              <a:t>B) In the Atmosphere</a:t>
+            </a:r>
+            <a:endParaRPr lang="en-US" sz="3200" dirty="0"/>
+          </a:p>
+        </p:txBody>
+      </p:sp>
+      <p:sp>
+        <p:nvSpPr>
+          <p:cNvPr id="6" name="Text 3"/>
+          <p:cNvSpPr/>
+          <p:nvPr/>
+        </p:nvSpPr>
+        <p:spPr>
+          <a:xfrm>
+            <a:off x="5349240" y="2240280"/>
+            <a:ext cx="6522415" cy="4206240"/>
+          </a:xfrm>
+          <a:prstGeom prst="rect">
+            <a:avLst/>
+          </a:prstGeom>
+          <a:noFill/>
+          <a:ln/>
+        </p:spPr>
+        <p:txBody>
+          <a:bodyPr wrap="square" lIns="0" tIns="0" rIns="0" bIns="0" rtlCol="0" anchor="t"/>
+          <a:lstStyle/>
+          <a:p>
+            <a:pPr algn="l" indent="0" marL="0">
               <a:spcAft>
                 <a:spcPts val="800"/>
               </a:spcAft>
@@ -14058,27 +15257,24 @@
                 <a:ea typeface="Times New Roman" pitchFamily="34" charset="-122"/>
                 <a:cs typeface="Times New Roman" pitchFamily="34" charset="-120"/>
               </a:rPr>
-              <a:t>Our next lesson will be on:</a:t>
-            </a:r>
-            <a:endParaRPr lang="en-US" sz="4000" dirty="0"/>
-          </a:p>
-          <a:p>
-            <a:pPr algn="ctr" indent="0" marL="0">
+              <a:t>Stratus: </a:t>
+            </a:r>
+            <a:pPr algn="l" indent="0" marL="0">
               <a:spcAft>
                 <a:spcPts val="800"/>
               </a:spcAft>
               <a:buNone/>
             </a:pPr>
             <a:r>
-              <a:rPr lang="en-US" sz="4000" b="1" dirty="0">
-                <a:solidFill>
-                  <a:srgbClr val="990011"/>
+              <a:rPr lang="en-US" sz="4000" dirty="0">
+                <a:solidFill>
+                  <a:srgbClr val="111111"/>
                 </a:solidFill>
                 <a:latin typeface="Times New Roman" pitchFamily="34" charset="0"/>
                 <a:ea typeface="Times New Roman" pitchFamily="34" charset="-122"/>
                 <a:cs typeface="Times New Roman" pitchFamily="34" charset="-120"/>
               </a:rPr>
-              <a:t>Lesson 35: Precipitation</a:t>
+              <a:t>They are low, grey layers of cloud that cover the sky.</a:t>
             </a:r>
             <a:endParaRPr lang="en-US" sz="4000" dirty="0"/>
           </a:p>
@@ -14429,6 +15625,2257 @@
                 <a:ea typeface="Calibri" pitchFamily="34" charset="-122"/>
                 <a:cs typeface="Calibri" pitchFamily="34" charset="-120"/>
               </a:rPr>
+              <a:t>BOARD SUMMARY</a:t>
+            </a:r>
+            <a:endParaRPr lang="en-US" sz="1400" dirty="0"/>
+          </a:p>
+        </p:txBody>
+      </p:sp>
+      <p:sp>
+        <p:nvSpPr>
+          <p:cNvPr id="3" name="Text 1"/>
+          <p:cNvSpPr/>
+          <p:nvPr/>
+        </p:nvSpPr>
+        <p:spPr>
+          <a:xfrm>
+            <a:off x="365760" y="1005840"/>
+            <a:ext cx="11460175" cy="731520"/>
+          </a:xfrm>
+          <a:prstGeom prst="rect">
+            <a:avLst/>
+          </a:prstGeom>
+          <a:noFill/>
+          <a:ln/>
+        </p:spPr>
+        <p:txBody>
+          <a:bodyPr wrap="square" lIns="0" tIns="0" rIns="0" bIns="0" rtlCol="0" anchor="ctr">
+            <a:normAutofit/>
+          </a:bodyPr>
+          <a:lstStyle/>
+          <a:p>
+            <a:pPr algn="ctr" indent="0" marL="0">
+              <a:buNone/>
+            </a:pPr>
+            <a:r>
+              <a:rPr lang="en-US" sz="3600" b="1" dirty="0">
+                <a:solidFill>
+                  <a:srgbClr val="990011"/>
+                </a:solidFill>
+                <a:latin typeface="Times New Roman" pitchFamily="34" charset="0"/>
+                <a:ea typeface="Times New Roman" pitchFamily="34" charset="-122"/>
+                <a:cs typeface="Times New Roman" pitchFamily="34" charset="-120"/>
+              </a:rPr>
+              <a:t>2. Forms of Condensation</a:t>
+            </a:r>
+            <a:endParaRPr lang="en-US" sz="3600" dirty="0"/>
+          </a:p>
+        </p:txBody>
+      </p:sp>
+      <p:sp>
+        <p:nvSpPr>
+          <p:cNvPr id="4" name="Text 2"/>
+          <p:cNvSpPr/>
+          <p:nvPr/>
+        </p:nvSpPr>
+        <p:spPr>
+          <a:xfrm>
+            <a:off x="365760" y="1737360"/>
+            <a:ext cx="5120640" cy="457200"/>
+          </a:xfrm>
+          <a:prstGeom prst="rect">
+            <a:avLst/>
+          </a:prstGeom>
+          <a:noFill/>
+          <a:ln/>
+        </p:spPr>
+        <p:txBody>
+          <a:bodyPr wrap="square" lIns="0" tIns="0" rIns="0" bIns="0" rtlCol="0" anchor="ctr">
+            <a:normAutofit/>
+          </a:bodyPr>
+          <a:lstStyle/>
+          <a:p>
+            <a:pPr algn="l" indent="0" marL="0">
+              <a:buNone/>
+            </a:pPr>
+            <a:r>
+              <a:rPr lang="en-US" sz="3000" b="1" dirty="0">
+                <a:solidFill>
+                  <a:srgbClr val="990011"/>
+                </a:solidFill>
+                <a:latin typeface="Times New Roman" pitchFamily="34" charset="0"/>
+                <a:ea typeface="Times New Roman" pitchFamily="34" charset="-122"/>
+                <a:cs typeface="Times New Roman" pitchFamily="34" charset="-120"/>
+              </a:rPr>
+              <a:t>B) In the Atmosphere</a:t>
+            </a:r>
+            <a:endParaRPr lang="en-US" sz="3000" dirty="0"/>
+          </a:p>
+        </p:txBody>
+      </p:sp>
+      <p:sp>
+        <p:nvSpPr>
+          <p:cNvPr id="5" name="Text 3"/>
+          <p:cNvSpPr/>
+          <p:nvPr/>
+        </p:nvSpPr>
+        <p:spPr>
+          <a:xfrm>
+            <a:off x="365760" y="2240280"/>
+            <a:ext cx="4846320" cy="4160520"/>
+          </a:xfrm>
+          <a:prstGeom prst="rect">
+            <a:avLst/>
+          </a:prstGeom>
+          <a:noFill/>
+          <a:ln/>
+        </p:spPr>
+        <p:txBody>
+          <a:bodyPr wrap="square" lIns="0" tIns="0" rIns="0" bIns="0" rtlCol="0" anchor="t"/>
+          <a:lstStyle/>
+          <a:p>
+            <a:pPr algn="l" indent="0" marL="0">
+              <a:spcAft>
+                <a:spcPts val="800"/>
+              </a:spcAft>
+              <a:buNone/>
+            </a:pPr>
+            <a:r>
+              <a:rPr lang="en-US" sz="3600" b="1" dirty="0">
+                <a:solidFill>
+                  <a:srgbClr val="111111"/>
+                </a:solidFill>
+                <a:latin typeface="Times New Roman" pitchFamily="34" charset="0"/>
+                <a:ea typeface="Times New Roman" pitchFamily="34" charset="-122"/>
+                <a:cs typeface="Times New Roman" pitchFamily="34" charset="-120"/>
+              </a:rPr>
+              <a:t>Cumulus: </a:t>
+            </a:r>
+            <a:pPr algn="l" indent="0" marL="0">
+              <a:spcAft>
+                <a:spcPts val="800"/>
+              </a:spcAft>
+              <a:buNone/>
+            </a:pPr>
+            <a:r>
+              <a:rPr lang="en-US" sz="3600" dirty="0">
+                <a:solidFill>
+                  <a:srgbClr val="111111"/>
+                </a:solidFill>
+                <a:latin typeface="Times New Roman" pitchFamily="34" charset="0"/>
+                <a:ea typeface="Times New Roman" pitchFamily="34" charset="-122"/>
+                <a:cs typeface="Times New Roman" pitchFamily="34" charset="-120"/>
+              </a:rPr>
+              <a:t>They are white, puffy clouds with flat bases, seen on fine days.</a:t>
+            </a:r>
+            <a:endParaRPr lang="en-US" sz="3600" dirty="0"/>
+          </a:p>
+        </p:txBody>
+      </p:sp>
+      <p:pic>
+        <p:nvPicPr>
+          <p:cNvPr id="6" name="Image 0" descr="/home/claude/f4/img/v2/lsa_cumulus.jpg">    </p:cNvPr>
+          <p:cNvPicPr>
+            <a:picLocks noChangeAspect="1"/>
+          </p:cNvPicPr>
+          <p:nvPr/>
+        </p:nvPicPr>
+        <p:blipFill>
+          <a:blip r:embed="rId1"/>
+          <a:stretch>
+            <a:fillRect/>
+          </a:stretch>
+        </p:blipFill>
+        <p:spPr>
+          <a:xfrm>
+            <a:off x="5349240" y="2071212"/>
+            <a:ext cx="6659575" cy="3693983"/>
+          </a:xfrm>
+          <a:prstGeom prst="rect">
+            <a:avLst/>
+          </a:prstGeom>
+        </p:spPr>
+      </p:pic>
+      <p:sp>
+        <p:nvSpPr>
+          <p:cNvPr id="7" name="Text 4"/>
+          <p:cNvSpPr/>
+          <p:nvPr/>
+        </p:nvSpPr>
+        <p:spPr>
+          <a:xfrm>
+            <a:off x="5349240" y="6089904"/>
+            <a:ext cx="6659575" cy="347472"/>
+          </a:xfrm>
+          <a:prstGeom prst="rect">
+            <a:avLst/>
+          </a:prstGeom>
+          <a:noFill/>
+          <a:ln/>
+        </p:spPr>
+        <p:txBody>
+          <a:bodyPr wrap="square" lIns="0" tIns="0" rIns="0" bIns="0" rtlCol="0" anchor="ctr"/>
+          <a:lstStyle/>
+          <a:p>
+            <a:pPr algn="ctr" indent="0" marL="0">
+              <a:buNone/>
+            </a:pPr>
+            <a:r>
+              <a:rPr lang="en-US" sz="1600" i="1" dirty="0">
+                <a:solidFill>
+                  <a:srgbClr val="555555"/>
+                </a:solidFill>
+                <a:latin typeface="Times New Roman" pitchFamily="34" charset="0"/>
+                <a:ea typeface="Times New Roman" pitchFamily="34" charset="-122"/>
+                <a:cs typeface="Times New Roman" pitchFamily="34" charset="-120"/>
+              </a:rPr>
+              <a:t>Illustration: cumulus clouds</a:t>
+            </a:r>
+            <a:endParaRPr lang="en-US" sz="1600" dirty="0"/>
+          </a:p>
+        </p:txBody>
+      </p:sp>
+      <p:sp>
+        <p:nvSpPr>
+          <p:cNvPr id="25" name="Slide Number Placeholder 0"/>
+          <p:cNvSpPr>
+            <a:spLocks noGrp="1"/>
+          </p:cNvSpPr>
+          <p:nvPr>
+            <p:ph type="sldNum" sz="quarter" idx="4294967295"/>
+          </p:nvPr>
+        </p:nvSpPr>
+        <p:spPr>
+          <a:xfrm>
+            <a:off x="27432" y="91440"/>
+            <a:ext cx="585216" cy="475488"/>
+          </a:xfrm>
+          <a:prstGeom prst="rect">
+            <a:avLst/>
+          </a:prstGeom>
+          <a:extLst>
+            <a:ext uri="{C572A759-6A51-4108-AA02-DFA0A04FC94B}">
+              <ma14:wrappingTextBoxFlag xmlns:ma14="http://schemas.microsoft.com/office/mac/drawingml/2011/main" val="0"/>
+            </a:ext>
+          </a:extLst>
+        </p:spPr>
+        <p:txBody>
+          <a:bodyPr/>
+          <a:lstStyle>
+            <a:lvl1pPr>
+              <a:defRPr sz="2000">
+                <a:solidFill>
+                  <a:srgbClr val="FFFFFF"/>
+                </a:solidFill>
+                <a:latin typeface="Calibri"/>
+                <a:ea typeface="Calibri"/>
+                <a:cs typeface="Calibri"/>
+              </a:defRPr>
+            </a:lvl1pPr>
+          </a:lstStyle>
+          <a:p>
+            <a:pPr algn="ctr"/>
+            <a:fld id="{F7021451-1387-4CA6-816F-3879F97B5CBC}" type="slidenum">
+              <a:rPr b="1" lang="en-US"/>
+              <a:t>40</a:t>
+            </a:fld>
+            <a:endParaRPr lang="en-US"/>
+          </a:p>
+        </p:txBody>
+      </p:sp>
+    </p:spTree>
+  </p:cSld>
+  <p:clrMapOvr>
+    <a:masterClrMapping/>
+  </p:clrMapOvr>
+</p:sld>
+</file>
+
+<file path=ppt/slides/slide41.xml><?xml version="1.0" encoding="utf-8"?>
+<p:sld xmlns:a="http://schemas.openxmlformats.org/drawingml/2006/main" xmlns:r="http://schemas.openxmlformats.org/officeDocument/2006/relationships" xmlns:p="http://schemas.openxmlformats.org/presentationml/2006/main">
+  <p:cSld name="Slide 41">
+    <p:spTree>
+      <p:nvGrpSpPr>
+        <p:cNvPr id="1" name=""/>
+        <p:cNvGrpSpPr/>
+        <p:nvPr/>
+      </p:nvGrpSpPr>
+      <p:grpSpPr>
+        <a:xfrm>
+          <a:off x="0" y="0"/>
+          <a:ext cx="0" cy="0"/>
+          <a:chOff x="0" y="0"/>
+          <a:chExt cx="0" cy="0"/>
+        </a:xfrm>
+      </p:grpSpPr>
+      <p:sp>
+        <p:nvSpPr>
+          <p:cNvPr id="2" name="Text 0"/>
+          <p:cNvSpPr/>
+          <p:nvPr/>
+        </p:nvSpPr>
+        <p:spPr>
+          <a:xfrm>
+            <a:off x="457200" y="713232"/>
+            <a:ext cx="11368735" cy="274320"/>
+          </a:xfrm>
+          <a:prstGeom prst="rect">
+            <a:avLst/>
+          </a:prstGeom>
+          <a:noFill/>
+          <a:ln/>
+        </p:spPr>
+        <p:txBody>
+          <a:bodyPr wrap="square" lIns="0" tIns="0" rIns="0" bIns="0" rtlCol="0" anchor="ctr"/>
+          <a:lstStyle/>
+          <a:p>
+            <a:pPr algn="r" indent="0" marL="0">
+              <a:buNone/>
+            </a:pPr>
+            <a:r>
+              <a:rPr lang="en-US" sz="1400" b="1" dirty="0">
+                <a:solidFill>
+                  <a:srgbClr val="1C3F6E"/>
+                </a:solidFill>
+                <a:latin typeface="Calibri" pitchFamily="34" charset="0"/>
+                <a:ea typeface="Calibri" pitchFamily="34" charset="-122"/>
+                <a:cs typeface="Calibri" pitchFamily="34" charset="-120"/>
+              </a:rPr>
+              <a:t>BOARD SUMMARY</a:t>
+            </a:r>
+            <a:endParaRPr lang="en-US" sz="1400" dirty="0"/>
+          </a:p>
+        </p:txBody>
+      </p:sp>
+      <p:sp>
+        <p:nvSpPr>
+          <p:cNvPr id="3" name="Text 1"/>
+          <p:cNvSpPr/>
+          <p:nvPr/>
+        </p:nvSpPr>
+        <p:spPr>
+          <a:xfrm>
+            <a:off x="365760" y="1005840"/>
+            <a:ext cx="11460175" cy="731520"/>
+          </a:xfrm>
+          <a:prstGeom prst="rect">
+            <a:avLst/>
+          </a:prstGeom>
+          <a:noFill/>
+          <a:ln/>
+        </p:spPr>
+        <p:txBody>
+          <a:bodyPr wrap="square" lIns="0" tIns="0" rIns="0" bIns="0" rtlCol="0" anchor="ctr">
+            <a:normAutofit/>
+          </a:bodyPr>
+          <a:lstStyle/>
+          <a:p>
+            <a:pPr algn="ctr" indent="0" marL="0">
+              <a:buNone/>
+            </a:pPr>
+            <a:r>
+              <a:rPr lang="en-US" sz="3600" b="1" dirty="0">
+                <a:solidFill>
+                  <a:srgbClr val="990011"/>
+                </a:solidFill>
+                <a:latin typeface="Times New Roman" pitchFamily="34" charset="0"/>
+                <a:ea typeface="Times New Roman" pitchFamily="34" charset="-122"/>
+                <a:cs typeface="Times New Roman" pitchFamily="34" charset="-120"/>
+              </a:rPr>
+              <a:t>2. Forms of Condensation</a:t>
+            </a:r>
+            <a:endParaRPr lang="en-US" sz="3600" dirty="0"/>
+          </a:p>
+        </p:txBody>
+      </p:sp>
+      <p:sp>
+        <p:nvSpPr>
+          <p:cNvPr id="4" name="Text 2"/>
+          <p:cNvSpPr/>
+          <p:nvPr/>
+        </p:nvSpPr>
+        <p:spPr>
+          <a:xfrm>
+            <a:off x="365760" y="1737360"/>
+            <a:ext cx="5120640" cy="457200"/>
+          </a:xfrm>
+          <a:prstGeom prst="rect">
+            <a:avLst/>
+          </a:prstGeom>
+          <a:noFill/>
+          <a:ln/>
+        </p:spPr>
+        <p:txBody>
+          <a:bodyPr wrap="square" lIns="0" tIns="0" rIns="0" bIns="0" rtlCol="0" anchor="ctr">
+            <a:normAutofit/>
+          </a:bodyPr>
+          <a:lstStyle/>
+          <a:p>
+            <a:pPr algn="l" indent="0" marL="0">
+              <a:buNone/>
+            </a:pPr>
+            <a:r>
+              <a:rPr lang="en-US" sz="3000" b="1" dirty="0">
+                <a:solidFill>
+                  <a:srgbClr val="990011"/>
+                </a:solidFill>
+                <a:latin typeface="Times New Roman" pitchFamily="34" charset="0"/>
+                <a:ea typeface="Times New Roman" pitchFamily="34" charset="-122"/>
+                <a:cs typeface="Times New Roman" pitchFamily="34" charset="-120"/>
+              </a:rPr>
+              <a:t>B) In the Atmosphere</a:t>
+            </a:r>
+            <a:endParaRPr lang="en-US" sz="3000" dirty="0"/>
+          </a:p>
+        </p:txBody>
+      </p:sp>
+      <p:sp>
+        <p:nvSpPr>
+          <p:cNvPr id="5" name="Text 3"/>
+          <p:cNvSpPr/>
+          <p:nvPr/>
+        </p:nvSpPr>
+        <p:spPr>
+          <a:xfrm>
+            <a:off x="365760" y="2240280"/>
+            <a:ext cx="4846320" cy="4160520"/>
+          </a:xfrm>
+          <a:prstGeom prst="rect">
+            <a:avLst/>
+          </a:prstGeom>
+          <a:noFill/>
+          <a:ln/>
+        </p:spPr>
+        <p:txBody>
+          <a:bodyPr wrap="square" lIns="0" tIns="0" rIns="0" bIns="0" rtlCol="0" anchor="t"/>
+          <a:lstStyle/>
+          <a:p>
+            <a:pPr algn="l" indent="0" marL="0">
+              <a:spcAft>
+                <a:spcPts val="800"/>
+              </a:spcAft>
+              <a:buNone/>
+            </a:pPr>
+            <a:r>
+              <a:rPr lang="en-US" sz="3600" b="1" dirty="0">
+                <a:solidFill>
+                  <a:srgbClr val="111111"/>
+                </a:solidFill>
+                <a:latin typeface="Times New Roman" pitchFamily="34" charset="0"/>
+                <a:ea typeface="Times New Roman" pitchFamily="34" charset="-122"/>
+                <a:cs typeface="Times New Roman" pitchFamily="34" charset="-120"/>
+              </a:rPr>
+              <a:t>Cumulonimbus: </a:t>
+            </a:r>
+            <a:pPr algn="l" indent="0" marL="0">
+              <a:spcAft>
+                <a:spcPts val="800"/>
+              </a:spcAft>
+              <a:buNone/>
+            </a:pPr>
+            <a:r>
+              <a:rPr lang="en-US" sz="3600" dirty="0">
+                <a:solidFill>
+                  <a:srgbClr val="111111"/>
+                </a:solidFill>
+                <a:latin typeface="Times New Roman" pitchFamily="34" charset="0"/>
+                <a:ea typeface="Times New Roman" pitchFamily="34" charset="-122"/>
+                <a:cs typeface="Times New Roman" pitchFamily="34" charset="-120"/>
+              </a:rPr>
+              <a:t>They are huge, tall storm clouds that bring heavy rain, thunder and hail.</a:t>
+            </a:r>
+            <a:endParaRPr lang="en-US" sz="3600" dirty="0"/>
+          </a:p>
+        </p:txBody>
+      </p:sp>
+      <p:pic>
+        <p:nvPicPr>
+          <p:cNvPr id="6" name="Image 0" descr="/home/claude/f4/img/v2/f4_cumulonimbus.jpg">    </p:cNvPr>
+          <p:cNvPicPr>
+            <a:picLocks noChangeAspect="1"/>
+          </p:cNvPicPr>
+          <p:nvPr/>
+        </p:nvPicPr>
+        <p:blipFill>
+          <a:blip r:embed="rId1"/>
+          <a:stretch>
+            <a:fillRect/>
+          </a:stretch>
+        </p:blipFill>
+        <p:spPr>
+          <a:xfrm>
+            <a:off x="5349240" y="2070172"/>
+            <a:ext cx="6659575" cy="3696064"/>
+          </a:xfrm>
+          <a:prstGeom prst="rect">
+            <a:avLst/>
+          </a:prstGeom>
+        </p:spPr>
+      </p:pic>
+      <p:sp>
+        <p:nvSpPr>
+          <p:cNvPr id="7" name="Text 4"/>
+          <p:cNvSpPr/>
+          <p:nvPr/>
+        </p:nvSpPr>
+        <p:spPr>
+          <a:xfrm>
+            <a:off x="5349240" y="6089904"/>
+            <a:ext cx="6659575" cy="347472"/>
+          </a:xfrm>
+          <a:prstGeom prst="rect">
+            <a:avLst/>
+          </a:prstGeom>
+          <a:noFill/>
+          <a:ln/>
+        </p:spPr>
+        <p:txBody>
+          <a:bodyPr wrap="square" lIns="0" tIns="0" rIns="0" bIns="0" rtlCol="0" anchor="ctr"/>
+          <a:lstStyle/>
+          <a:p>
+            <a:pPr algn="ctr" indent="0" marL="0">
+              <a:buNone/>
+            </a:pPr>
+            <a:r>
+              <a:rPr lang="en-US" sz="1600" i="1" dirty="0">
+                <a:solidFill>
+                  <a:srgbClr val="555555"/>
+                </a:solidFill>
+                <a:latin typeface="Times New Roman" pitchFamily="34" charset="0"/>
+                <a:ea typeface="Times New Roman" pitchFamily="34" charset="-122"/>
+                <a:cs typeface="Times New Roman" pitchFamily="34" charset="-120"/>
+              </a:rPr>
+              <a:t>Illustration: a cumulonimbus</a:t>
+            </a:r>
+            <a:endParaRPr lang="en-US" sz="1600" dirty="0"/>
+          </a:p>
+        </p:txBody>
+      </p:sp>
+      <p:sp>
+        <p:nvSpPr>
+          <p:cNvPr id="25" name="Slide Number Placeholder 0"/>
+          <p:cNvSpPr>
+            <a:spLocks noGrp="1"/>
+          </p:cNvSpPr>
+          <p:nvPr>
+            <p:ph type="sldNum" sz="quarter" idx="4294967295"/>
+          </p:nvPr>
+        </p:nvSpPr>
+        <p:spPr>
+          <a:xfrm>
+            <a:off x="27432" y="91440"/>
+            <a:ext cx="585216" cy="475488"/>
+          </a:xfrm>
+          <a:prstGeom prst="rect">
+            <a:avLst/>
+          </a:prstGeom>
+          <a:extLst>
+            <a:ext uri="{C572A759-6A51-4108-AA02-DFA0A04FC94B}">
+              <ma14:wrappingTextBoxFlag xmlns:ma14="http://schemas.microsoft.com/office/mac/drawingml/2011/main" val="0"/>
+            </a:ext>
+          </a:extLst>
+        </p:spPr>
+        <p:txBody>
+          <a:bodyPr/>
+          <a:lstStyle>
+            <a:lvl1pPr>
+              <a:defRPr sz="2000">
+                <a:solidFill>
+                  <a:srgbClr val="FFFFFF"/>
+                </a:solidFill>
+                <a:latin typeface="Calibri"/>
+                <a:ea typeface="Calibri"/>
+                <a:cs typeface="Calibri"/>
+              </a:defRPr>
+            </a:lvl1pPr>
+          </a:lstStyle>
+          <a:p>
+            <a:pPr algn="ctr"/>
+            <a:fld id="{F7021451-1387-4CA6-816F-3879F97B5CBC}" type="slidenum">
+              <a:rPr b="1" lang="en-US"/>
+              <a:t>41</a:t>
+            </a:fld>
+            <a:endParaRPr lang="en-US"/>
+          </a:p>
+        </p:txBody>
+      </p:sp>
+    </p:spTree>
+  </p:cSld>
+  <p:clrMapOvr>
+    <a:masterClrMapping/>
+  </p:clrMapOvr>
+</p:sld>
+</file>
+
+<file path=ppt/slides/slide42.xml><?xml version="1.0" encoding="utf-8"?>
+<p:sld xmlns:a="http://schemas.openxmlformats.org/drawingml/2006/main" xmlns:r="http://schemas.openxmlformats.org/officeDocument/2006/relationships" xmlns:p="http://schemas.openxmlformats.org/presentationml/2006/main">
+  <p:cSld name="Slide 42">
+    <p:spTree>
+      <p:nvGrpSpPr>
+        <p:cNvPr id="1" name=""/>
+        <p:cNvGrpSpPr/>
+        <p:nvPr/>
+      </p:nvGrpSpPr>
+      <p:grpSpPr>
+        <a:xfrm>
+          <a:off x="0" y="0"/>
+          <a:ext cx="0" cy="0"/>
+          <a:chOff x="0" y="0"/>
+          <a:chExt cx="0" cy="0"/>
+        </a:xfrm>
+      </p:grpSpPr>
+      <p:sp>
+        <p:nvSpPr>
+          <p:cNvPr id="2" name="Text 0"/>
+          <p:cNvSpPr/>
+          <p:nvPr/>
+        </p:nvSpPr>
+        <p:spPr>
+          <a:xfrm>
+            <a:off x="457200" y="713232"/>
+            <a:ext cx="11368735" cy="274320"/>
+          </a:xfrm>
+          <a:prstGeom prst="rect">
+            <a:avLst/>
+          </a:prstGeom>
+          <a:noFill/>
+          <a:ln/>
+        </p:spPr>
+        <p:txBody>
+          <a:bodyPr wrap="square" lIns="0" tIns="0" rIns="0" bIns="0" rtlCol="0" anchor="ctr"/>
+          <a:lstStyle/>
+          <a:p>
+            <a:pPr algn="r" indent="0" marL="0">
+              <a:buNone/>
+            </a:pPr>
+            <a:r>
+              <a:rPr lang="en-US" sz="1400" b="1" dirty="0">
+                <a:solidFill>
+                  <a:srgbClr val="1C3F6E"/>
+                </a:solidFill>
+                <a:latin typeface="Calibri" pitchFamily="34" charset="0"/>
+                <a:ea typeface="Calibri" pitchFamily="34" charset="-122"/>
+                <a:cs typeface="Calibri" pitchFamily="34" charset="-120"/>
+              </a:rPr>
+              <a:t>FORMATIVE EVALUATION</a:t>
+            </a:r>
+            <a:endParaRPr lang="en-US" sz="1400" dirty="0"/>
+          </a:p>
+        </p:txBody>
+      </p:sp>
+      <p:pic>
+        <p:nvPicPr>
+          <p:cNvPr id="3" name="Image 0" descr="/home/claude/f4/img/minesec_sheet.png">    </p:cNvPr>
+          <p:cNvPicPr>
+            <a:picLocks noChangeAspect="1"/>
+          </p:cNvPicPr>
+          <p:nvPr/>
+        </p:nvPicPr>
+        <p:blipFill>
+          <a:blip r:embed="rId1"/>
+          <a:stretch>
+            <a:fillRect/>
+          </a:stretch>
+        </p:blipFill>
+        <p:spPr>
+          <a:xfrm>
+            <a:off x="0" y="658368"/>
+            <a:ext cx="5120640" cy="5833872"/>
+          </a:xfrm>
+          <a:prstGeom prst="rect">
+            <a:avLst/>
+          </a:prstGeom>
+        </p:spPr>
+      </p:pic>
+      <p:sp>
+        <p:nvSpPr>
+          <p:cNvPr id="4" name="Text 1"/>
+          <p:cNvSpPr/>
+          <p:nvPr/>
+        </p:nvSpPr>
+        <p:spPr>
+          <a:xfrm>
+            <a:off x="5349240" y="1005840"/>
+            <a:ext cx="6522415" cy="731520"/>
+          </a:xfrm>
+          <a:prstGeom prst="rect">
+            <a:avLst/>
+          </a:prstGeom>
+          <a:noFill/>
+          <a:ln/>
+        </p:spPr>
+        <p:txBody>
+          <a:bodyPr wrap="square" lIns="0" tIns="0" rIns="0" bIns="0" rtlCol="0" anchor="ctr">
+            <a:normAutofit/>
+          </a:bodyPr>
+          <a:lstStyle/>
+          <a:p>
+            <a:pPr algn="ctr" indent="0" marL="0">
+              <a:buNone/>
+            </a:pPr>
+            <a:r>
+              <a:rPr lang="en-US" sz="3600" b="1" dirty="0">
+                <a:solidFill>
+                  <a:srgbClr val="990011"/>
+                </a:solidFill>
+                <a:latin typeface="Times New Roman" pitchFamily="34" charset="0"/>
+                <a:ea typeface="Times New Roman" pitchFamily="34" charset="-122"/>
+                <a:cs typeface="Times New Roman" pitchFamily="34" charset="-120"/>
+              </a:rPr>
+              <a:t>Evaluation 1</a:t>
+            </a:r>
+            <a:endParaRPr lang="en-US" sz="3600" dirty="0"/>
+          </a:p>
+        </p:txBody>
+      </p:sp>
+      <p:sp>
+        <p:nvSpPr>
+          <p:cNvPr id="5" name="Text 2"/>
+          <p:cNvSpPr/>
+          <p:nvPr/>
+        </p:nvSpPr>
+        <p:spPr>
+          <a:xfrm>
+            <a:off x="5349240" y="1783080"/>
+            <a:ext cx="6522415" cy="4663440"/>
+          </a:xfrm>
+          <a:prstGeom prst="rect">
+            <a:avLst/>
+          </a:prstGeom>
+          <a:noFill/>
+          <a:ln/>
+        </p:spPr>
+        <p:txBody>
+          <a:bodyPr wrap="square" lIns="0" tIns="0" rIns="0" bIns="0" rtlCol="0" anchor="t"/>
+          <a:lstStyle/>
+          <a:p>
+            <a:pPr algn="l" indent="0" marL="0">
+              <a:spcAft>
+                <a:spcPts val="800"/>
+              </a:spcAft>
+              <a:buNone/>
+            </a:pPr>
+            <a:r>
+              <a:rPr lang="en-US" sz="4000" dirty="0">
+                <a:solidFill>
+                  <a:srgbClr val="111111"/>
+                </a:solidFill>
+                <a:latin typeface="Times New Roman" pitchFamily="34" charset="0"/>
+                <a:ea typeface="Times New Roman" pitchFamily="34" charset="-122"/>
+                <a:cs typeface="Times New Roman" pitchFamily="34" charset="-120"/>
+              </a:rPr>
+              <a:t>What is condensation?</a:t>
+            </a:r>
+            <a:endParaRPr lang="en-US" sz="4000" dirty="0"/>
+          </a:p>
+        </p:txBody>
+      </p:sp>
+      <p:sp>
+        <p:nvSpPr>
+          <p:cNvPr id="25" name="Slide Number Placeholder 0"/>
+          <p:cNvSpPr>
+            <a:spLocks noGrp="1"/>
+          </p:cNvSpPr>
+          <p:nvPr>
+            <p:ph type="sldNum" sz="quarter" idx="4294967295"/>
+          </p:nvPr>
+        </p:nvSpPr>
+        <p:spPr>
+          <a:xfrm>
+            <a:off x="27432" y="91440"/>
+            <a:ext cx="585216" cy="475488"/>
+          </a:xfrm>
+          <a:prstGeom prst="rect">
+            <a:avLst/>
+          </a:prstGeom>
+          <a:extLst>
+            <a:ext uri="{C572A759-6A51-4108-AA02-DFA0A04FC94B}">
+              <ma14:wrappingTextBoxFlag xmlns:ma14="http://schemas.microsoft.com/office/mac/drawingml/2011/main" val="0"/>
+            </a:ext>
+          </a:extLst>
+        </p:spPr>
+        <p:txBody>
+          <a:bodyPr/>
+          <a:lstStyle>
+            <a:lvl1pPr>
+              <a:defRPr sz="2000">
+                <a:solidFill>
+                  <a:srgbClr val="FFFFFF"/>
+                </a:solidFill>
+                <a:latin typeface="Calibri"/>
+                <a:ea typeface="Calibri"/>
+                <a:cs typeface="Calibri"/>
+              </a:defRPr>
+            </a:lvl1pPr>
+          </a:lstStyle>
+          <a:p>
+            <a:pPr algn="ctr"/>
+            <a:fld id="{F7021451-1387-4CA6-816F-3879F97B5CBC}" type="slidenum">
+              <a:rPr b="1" lang="en-US"/>
+              <a:t>42</a:t>
+            </a:fld>
+            <a:endParaRPr lang="en-US"/>
+          </a:p>
+        </p:txBody>
+      </p:sp>
+    </p:spTree>
+  </p:cSld>
+  <p:clrMapOvr>
+    <a:masterClrMapping/>
+  </p:clrMapOvr>
+</p:sld>
+</file>
+
+<file path=ppt/slides/slide43.xml><?xml version="1.0" encoding="utf-8"?>
+<p:sld xmlns:a="http://schemas.openxmlformats.org/drawingml/2006/main" xmlns:r="http://schemas.openxmlformats.org/officeDocument/2006/relationships" xmlns:p="http://schemas.openxmlformats.org/presentationml/2006/main">
+  <p:cSld name="Slide 43">
+    <p:spTree>
+      <p:nvGrpSpPr>
+        <p:cNvPr id="1" name=""/>
+        <p:cNvGrpSpPr/>
+        <p:nvPr/>
+      </p:nvGrpSpPr>
+      <p:grpSpPr>
+        <a:xfrm>
+          <a:off x="0" y="0"/>
+          <a:ext cx="0" cy="0"/>
+          <a:chOff x="0" y="0"/>
+          <a:chExt cx="0" cy="0"/>
+        </a:xfrm>
+      </p:grpSpPr>
+      <p:sp>
+        <p:nvSpPr>
+          <p:cNvPr id="2" name="Text 0"/>
+          <p:cNvSpPr/>
+          <p:nvPr/>
+        </p:nvSpPr>
+        <p:spPr>
+          <a:xfrm>
+            <a:off x="457200" y="713232"/>
+            <a:ext cx="11368735" cy="274320"/>
+          </a:xfrm>
+          <a:prstGeom prst="rect">
+            <a:avLst/>
+          </a:prstGeom>
+          <a:noFill/>
+          <a:ln/>
+        </p:spPr>
+        <p:txBody>
+          <a:bodyPr wrap="square" lIns="0" tIns="0" rIns="0" bIns="0" rtlCol="0" anchor="ctr"/>
+          <a:lstStyle/>
+          <a:p>
+            <a:pPr algn="r" indent="0" marL="0">
+              <a:buNone/>
+            </a:pPr>
+            <a:r>
+              <a:rPr lang="en-US" sz="1400" b="1" dirty="0">
+                <a:solidFill>
+                  <a:srgbClr val="1C3F6E"/>
+                </a:solidFill>
+                <a:latin typeface="Calibri" pitchFamily="34" charset="0"/>
+                <a:ea typeface="Calibri" pitchFamily="34" charset="-122"/>
+                <a:cs typeface="Calibri" pitchFamily="34" charset="-120"/>
+              </a:rPr>
+              <a:t>FORMATIVE EVALUATION</a:t>
+            </a:r>
+            <a:endParaRPr lang="en-US" sz="1400" dirty="0"/>
+          </a:p>
+        </p:txBody>
+      </p:sp>
+      <p:pic>
+        <p:nvPicPr>
+          <p:cNvPr id="3" name="Image 0" descr="/home/claude/f4/img/minesec_sheet.png">    </p:cNvPr>
+          <p:cNvPicPr>
+            <a:picLocks noChangeAspect="1"/>
+          </p:cNvPicPr>
+          <p:nvPr/>
+        </p:nvPicPr>
+        <p:blipFill>
+          <a:blip r:embed="rId1"/>
+          <a:stretch>
+            <a:fillRect/>
+          </a:stretch>
+        </p:blipFill>
+        <p:spPr>
+          <a:xfrm>
+            <a:off x="0" y="658368"/>
+            <a:ext cx="5120640" cy="5833872"/>
+          </a:xfrm>
+          <a:prstGeom prst="rect">
+            <a:avLst/>
+          </a:prstGeom>
+        </p:spPr>
+      </p:pic>
+      <p:sp>
+        <p:nvSpPr>
+          <p:cNvPr id="4" name="Text 1"/>
+          <p:cNvSpPr/>
+          <p:nvPr/>
+        </p:nvSpPr>
+        <p:spPr>
+          <a:xfrm>
+            <a:off x="5349240" y="1005840"/>
+            <a:ext cx="6522415" cy="731520"/>
+          </a:xfrm>
+          <a:prstGeom prst="rect">
+            <a:avLst/>
+          </a:prstGeom>
+          <a:noFill/>
+          <a:ln/>
+        </p:spPr>
+        <p:txBody>
+          <a:bodyPr wrap="square" lIns="0" tIns="0" rIns="0" bIns="0" rtlCol="0" anchor="ctr">
+            <a:normAutofit/>
+          </a:bodyPr>
+          <a:lstStyle/>
+          <a:p>
+            <a:pPr algn="ctr" indent="0" marL="0">
+              <a:buNone/>
+            </a:pPr>
+            <a:r>
+              <a:rPr lang="en-US" sz="3600" b="1" dirty="0">
+                <a:solidFill>
+                  <a:srgbClr val="990011"/>
+                </a:solidFill>
+                <a:latin typeface="Times New Roman" pitchFamily="34" charset="0"/>
+                <a:ea typeface="Times New Roman" pitchFamily="34" charset="-122"/>
+                <a:cs typeface="Times New Roman" pitchFamily="34" charset="-120"/>
+              </a:rPr>
+              <a:t>Expected Answer</a:t>
+            </a:r>
+            <a:endParaRPr lang="en-US" sz="3600" dirty="0"/>
+          </a:p>
+        </p:txBody>
+      </p:sp>
+      <p:sp>
+        <p:nvSpPr>
+          <p:cNvPr id="5" name="Text 2"/>
+          <p:cNvSpPr/>
+          <p:nvPr/>
+        </p:nvSpPr>
+        <p:spPr>
+          <a:xfrm>
+            <a:off x="5349240" y="1783080"/>
+            <a:ext cx="6522415" cy="4663440"/>
+          </a:xfrm>
+          <a:prstGeom prst="rect">
+            <a:avLst/>
+          </a:prstGeom>
+          <a:noFill/>
+          <a:ln/>
+        </p:spPr>
+        <p:txBody>
+          <a:bodyPr wrap="square" lIns="0" tIns="0" rIns="0" bIns="0" rtlCol="0" anchor="t"/>
+          <a:lstStyle/>
+          <a:p>
+            <a:pPr algn="l" indent="0" marL="0">
+              <a:spcAft>
+                <a:spcPts val="800"/>
+              </a:spcAft>
+              <a:buNone/>
+            </a:pPr>
+            <a:r>
+              <a:rPr lang="en-US" sz="4000" dirty="0">
+                <a:solidFill>
+                  <a:srgbClr val="111111"/>
+                </a:solidFill>
+                <a:latin typeface="Times New Roman" pitchFamily="34" charset="0"/>
+                <a:ea typeface="Times New Roman" pitchFamily="34" charset="-122"/>
+                <a:cs typeface="Times New Roman" pitchFamily="34" charset="-120"/>
+              </a:rPr>
+              <a:t>The change of water vapour into water.</a:t>
+            </a:r>
+            <a:endParaRPr lang="en-US" sz="4000" dirty="0"/>
+          </a:p>
+        </p:txBody>
+      </p:sp>
+      <p:sp>
+        <p:nvSpPr>
+          <p:cNvPr id="25" name="Slide Number Placeholder 0"/>
+          <p:cNvSpPr>
+            <a:spLocks noGrp="1"/>
+          </p:cNvSpPr>
+          <p:nvPr>
+            <p:ph type="sldNum" sz="quarter" idx="4294967295"/>
+          </p:nvPr>
+        </p:nvSpPr>
+        <p:spPr>
+          <a:xfrm>
+            <a:off x="27432" y="91440"/>
+            <a:ext cx="585216" cy="475488"/>
+          </a:xfrm>
+          <a:prstGeom prst="rect">
+            <a:avLst/>
+          </a:prstGeom>
+          <a:extLst>
+            <a:ext uri="{C572A759-6A51-4108-AA02-DFA0A04FC94B}">
+              <ma14:wrappingTextBoxFlag xmlns:ma14="http://schemas.microsoft.com/office/mac/drawingml/2011/main" val="0"/>
+            </a:ext>
+          </a:extLst>
+        </p:spPr>
+        <p:txBody>
+          <a:bodyPr/>
+          <a:lstStyle>
+            <a:lvl1pPr>
+              <a:defRPr sz="2000">
+                <a:solidFill>
+                  <a:srgbClr val="FFFFFF"/>
+                </a:solidFill>
+                <a:latin typeface="Calibri"/>
+                <a:ea typeface="Calibri"/>
+                <a:cs typeface="Calibri"/>
+              </a:defRPr>
+            </a:lvl1pPr>
+          </a:lstStyle>
+          <a:p>
+            <a:pPr algn="ctr"/>
+            <a:fld id="{F7021451-1387-4CA6-816F-3879F97B5CBC}" type="slidenum">
+              <a:rPr b="1" lang="en-US"/>
+              <a:t>43</a:t>
+            </a:fld>
+            <a:endParaRPr lang="en-US"/>
+          </a:p>
+        </p:txBody>
+      </p:sp>
+    </p:spTree>
+  </p:cSld>
+  <p:clrMapOvr>
+    <a:masterClrMapping/>
+  </p:clrMapOvr>
+</p:sld>
+</file>
+
+<file path=ppt/slides/slide44.xml><?xml version="1.0" encoding="utf-8"?>
+<p:sld xmlns:a="http://schemas.openxmlformats.org/drawingml/2006/main" xmlns:r="http://schemas.openxmlformats.org/officeDocument/2006/relationships" xmlns:p="http://schemas.openxmlformats.org/presentationml/2006/main">
+  <p:cSld name="Slide 44">
+    <p:spTree>
+      <p:nvGrpSpPr>
+        <p:cNvPr id="1" name=""/>
+        <p:cNvGrpSpPr/>
+        <p:nvPr/>
+      </p:nvGrpSpPr>
+      <p:grpSpPr>
+        <a:xfrm>
+          <a:off x="0" y="0"/>
+          <a:ext cx="0" cy="0"/>
+          <a:chOff x="0" y="0"/>
+          <a:chExt cx="0" cy="0"/>
+        </a:xfrm>
+      </p:grpSpPr>
+      <p:sp>
+        <p:nvSpPr>
+          <p:cNvPr id="2" name="Text 0"/>
+          <p:cNvSpPr/>
+          <p:nvPr/>
+        </p:nvSpPr>
+        <p:spPr>
+          <a:xfrm>
+            <a:off x="457200" y="713232"/>
+            <a:ext cx="11368735" cy="274320"/>
+          </a:xfrm>
+          <a:prstGeom prst="rect">
+            <a:avLst/>
+          </a:prstGeom>
+          <a:noFill/>
+          <a:ln/>
+        </p:spPr>
+        <p:txBody>
+          <a:bodyPr wrap="square" lIns="0" tIns="0" rIns="0" bIns="0" rtlCol="0" anchor="ctr"/>
+          <a:lstStyle/>
+          <a:p>
+            <a:pPr algn="r" indent="0" marL="0">
+              <a:buNone/>
+            </a:pPr>
+            <a:r>
+              <a:rPr lang="en-US" sz="1400" b="1" dirty="0">
+                <a:solidFill>
+                  <a:srgbClr val="1C3F6E"/>
+                </a:solidFill>
+                <a:latin typeface="Calibri" pitchFamily="34" charset="0"/>
+                <a:ea typeface="Calibri" pitchFamily="34" charset="-122"/>
+                <a:cs typeface="Calibri" pitchFamily="34" charset="-120"/>
+              </a:rPr>
+              <a:t>FORMATIVE EVALUATION</a:t>
+            </a:r>
+            <a:endParaRPr lang="en-US" sz="1400" dirty="0"/>
+          </a:p>
+        </p:txBody>
+      </p:sp>
+      <p:pic>
+        <p:nvPicPr>
+          <p:cNvPr id="3" name="Image 0" descr="/home/claude/f4/img/minesec_sheet.png">    </p:cNvPr>
+          <p:cNvPicPr>
+            <a:picLocks noChangeAspect="1"/>
+          </p:cNvPicPr>
+          <p:nvPr/>
+        </p:nvPicPr>
+        <p:blipFill>
+          <a:blip r:embed="rId1"/>
+          <a:stretch>
+            <a:fillRect/>
+          </a:stretch>
+        </p:blipFill>
+        <p:spPr>
+          <a:xfrm>
+            <a:off x="0" y="658368"/>
+            <a:ext cx="5120640" cy="5833872"/>
+          </a:xfrm>
+          <a:prstGeom prst="rect">
+            <a:avLst/>
+          </a:prstGeom>
+        </p:spPr>
+      </p:pic>
+      <p:sp>
+        <p:nvSpPr>
+          <p:cNvPr id="4" name="Text 1"/>
+          <p:cNvSpPr/>
+          <p:nvPr/>
+        </p:nvSpPr>
+        <p:spPr>
+          <a:xfrm>
+            <a:off x="5349240" y="1005840"/>
+            <a:ext cx="6522415" cy="731520"/>
+          </a:xfrm>
+          <a:prstGeom prst="rect">
+            <a:avLst/>
+          </a:prstGeom>
+          <a:noFill/>
+          <a:ln/>
+        </p:spPr>
+        <p:txBody>
+          <a:bodyPr wrap="square" lIns="0" tIns="0" rIns="0" bIns="0" rtlCol="0" anchor="ctr">
+            <a:normAutofit/>
+          </a:bodyPr>
+          <a:lstStyle/>
+          <a:p>
+            <a:pPr algn="ctr" indent="0" marL="0">
+              <a:buNone/>
+            </a:pPr>
+            <a:r>
+              <a:rPr lang="en-US" sz="3600" b="1" dirty="0">
+                <a:solidFill>
+                  <a:srgbClr val="990011"/>
+                </a:solidFill>
+                <a:latin typeface="Times New Roman" pitchFamily="34" charset="0"/>
+                <a:ea typeface="Times New Roman" pitchFamily="34" charset="-122"/>
+                <a:cs typeface="Times New Roman" pitchFamily="34" charset="-120"/>
+              </a:rPr>
+              <a:t>Evaluation 2</a:t>
+            </a:r>
+            <a:endParaRPr lang="en-US" sz="3600" dirty="0"/>
+          </a:p>
+        </p:txBody>
+      </p:sp>
+      <p:sp>
+        <p:nvSpPr>
+          <p:cNvPr id="5" name="Text 2"/>
+          <p:cNvSpPr/>
+          <p:nvPr/>
+        </p:nvSpPr>
+        <p:spPr>
+          <a:xfrm>
+            <a:off x="5349240" y="1783080"/>
+            <a:ext cx="6522415" cy="4663440"/>
+          </a:xfrm>
+          <a:prstGeom prst="rect">
+            <a:avLst/>
+          </a:prstGeom>
+          <a:noFill/>
+          <a:ln/>
+        </p:spPr>
+        <p:txBody>
+          <a:bodyPr wrap="square" lIns="0" tIns="0" rIns="0" bIns="0" rtlCol="0" anchor="t"/>
+          <a:lstStyle/>
+          <a:p>
+            <a:pPr algn="l" indent="0" marL="0">
+              <a:spcAft>
+                <a:spcPts val="800"/>
+              </a:spcAft>
+              <a:buNone/>
+            </a:pPr>
+            <a:r>
+              <a:rPr lang="en-US" sz="4000" dirty="0">
+                <a:solidFill>
+                  <a:srgbClr val="111111"/>
+                </a:solidFill>
+                <a:latin typeface="Times New Roman" pitchFamily="34" charset="0"/>
+                <a:ea typeface="Times New Roman" pitchFamily="34" charset="-122"/>
+                <a:cs typeface="Times New Roman" pitchFamily="34" charset="-120"/>
+              </a:rPr>
+              <a:t>Which cloud brings thunderstorms?</a:t>
+            </a:r>
+            <a:endParaRPr lang="en-US" sz="4000" dirty="0"/>
+          </a:p>
+        </p:txBody>
+      </p:sp>
+      <p:sp>
+        <p:nvSpPr>
+          <p:cNvPr id="25" name="Slide Number Placeholder 0"/>
+          <p:cNvSpPr>
+            <a:spLocks noGrp="1"/>
+          </p:cNvSpPr>
+          <p:nvPr>
+            <p:ph type="sldNum" sz="quarter" idx="4294967295"/>
+          </p:nvPr>
+        </p:nvSpPr>
+        <p:spPr>
+          <a:xfrm>
+            <a:off x="27432" y="91440"/>
+            <a:ext cx="585216" cy="475488"/>
+          </a:xfrm>
+          <a:prstGeom prst="rect">
+            <a:avLst/>
+          </a:prstGeom>
+          <a:extLst>
+            <a:ext uri="{C572A759-6A51-4108-AA02-DFA0A04FC94B}">
+              <ma14:wrappingTextBoxFlag xmlns:ma14="http://schemas.microsoft.com/office/mac/drawingml/2011/main" val="0"/>
+            </a:ext>
+          </a:extLst>
+        </p:spPr>
+        <p:txBody>
+          <a:bodyPr/>
+          <a:lstStyle>
+            <a:lvl1pPr>
+              <a:defRPr sz="2000">
+                <a:solidFill>
+                  <a:srgbClr val="FFFFFF"/>
+                </a:solidFill>
+                <a:latin typeface="Calibri"/>
+                <a:ea typeface="Calibri"/>
+                <a:cs typeface="Calibri"/>
+              </a:defRPr>
+            </a:lvl1pPr>
+          </a:lstStyle>
+          <a:p>
+            <a:pPr algn="ctr"/>
+            <a:fld id="{F7021451-1387-4CA6-816F-3879F97B5CBC}" type="slidenum">
+              <a:rPr b="1" lang="en-US"/>
+              <a:t>44</a:t>
+            </a:fld>
+            <a:endParaRPr lang="en-US"/>
+          </a:p>
+        </p:txBody>
+      </p:sp>
+    </p:spTree>
+  </p:cSld>
+  <p:clrMapOvr>
+    <a:masterClrMapping/>
+  </p:clrMapOvr>
+</p:sld>
+</file>
+
+<file path=ppt/slides/slide45.xml><?xml version="1.0" encoding="utf-8"?>
+<p:sld xmlns:a="http://schemas.openxmlformats.org/drawingml/2006/main" xmlns:r="http://schemas.openxmlformats.org/officeDocument/2006/relationships" xmlns:p="http://schemas.openxmlformats.org/presentationml/2006/main">
+  <p:cSld name="Slide 45">
+    <p:spTree>
+      <p:nvGrpSpPr>
+        <p:cNvPr id="1" name=""/>
+        <p:cNvGrpSpPr/>
+        <p:nvPr/>
+      </p:nvGrpSpPr>
+      <p:grpSpPr>
+        <a:xfrm>
+          <a:off x="0" y="0"/>
+          <a:ext cx="0" cy="0"/>
+          <a:chOff x="0" y="0"/>
+          <a:chExt cx="0" cy="0"/>
+        </a:xfrm>
+      </p:grpSpPr>
+      <p:sp>
+        <p:nvSpPr>
+          <p:cNvPr id="2" name="Text 0"/>
+          <p:cNvSpPr/>
+          <p:nvPr/>
+        </p:nvSpPr>
+        <p:spPr>
+          <a:xfrm>
+            <a:off x="457200" y="713232"/>
+            <a:ext cx="11368735" cy="274320"/>
+          </a:xfrm>
+          <a:prstGeom prst="rect">
+            <a:avLst/>
+          </a:prstGeom>
+          <a:noFill/>
+          <a:ln/>
+        </p:spPr>
+        <p:txBody>
+          <a:bodyPr wrap="square" lIns="0" tIns="0" rIns="0" bIns="0" rtlCol="0" anchor="ctr"/>
+          <a:lstStyle/>
+          <a:p>
+            <a:pPr algn="r" indent="0" marL="0">
+              <a:buNone/>
+            </a:pPr>
+            <a:r>
+              <a:rPr lang="en-US" sz="1400" b="1" dirty="0">
+                <a:solidFill>
+                  <a:srgbClr val="1C3F6E"/>
+                </a:solidFill>
+                <a:latin typeface="Calibri" pitchFamily="34" charset="0"/>
+                <a:ea typeface="Calibri" pitchFamily="34" charset="-122"/>
+                <a:cs typeface="Calibri" pitchFamily="34" charset="-120"/>
+              </a:rPr>
+              <a:t>FORMATIVE EVALUATION</a:t>
+            </a:r>
+            <a:endParaRPr lang="en-US" sz="1400" dirty="0"/>
+          </a:p>
+        </p:txBody>
+      </p:sp>
+      <p:pic>
+        <p:nvPicPr>
+          <p:cNvPr id="3" name="Image 0" descr="/home/claude/f4/img/minesec_sheet.png">    </p:cNvPr>
+          <p:cNvPicPr>
+            <a:picLocks noChangeAspect="1"/>
+          </p:cNvPicPr>
+          <p:nvPr/>
+        </p:nvPicPr>
+        <p:blipFill>
+          <a:blip r:embed="rId1"/>
+          <a:stretch>
+            <a:fillRect/>
+          </a:stretch>
+        </p:blipFill>
+        <p:spPr>
+          <a:xfrm>
+            <a:off x="0" y="658368"/>
+            <a:ext cx="5120640" cy="5833872"/>
+          </a:xfrm>
+          <a:prstGeom prst="rect">
+            <a:avLst/>
+          </a:prstGeom>
+        </p:spPr>
+      </p:pic>
+      <p:sp>
+        <p:nvSpPr>
+          <p:cNvPr id="4" name="Text 1"/>
+          <p:cNvSpPr/>
+          <p:nvPr/>
+        </p:nvSpPr>
+        <p:spPr>
+          <a:xfrm>
+            <a:off x="5349240" y="1005840"/>
+            <a:ext cx="6522415" cy="731520"/>
+          </a:xfrm>
+          <a:prstGeom prst="rect">
+            <a:avLst/>
+          </a:prstGeom>
+          <a:noFill/>
+          <a:ln/>
+        </p:spPr>
+        <p:txBody>
+          <a:bodyPr wrap="square" lIns="0" tIns="0" rIns="0" bIns="0" rtlCol="0" anchor="ctr">
+            <a:normAutofit/>
+          </a:bodyPr>
+          <a:lstStyle/>
+          <a:p>
+            <a:pPr algn="ctr" indent="0" marL="0">
+              <a:buNone/>
+            </a:pPr>
+            <a:r>
+              <a:rPr lang="en-US" sz="3600" b="1" dirty="0">
+                <a:solidFill>
+                  <a:srgbClr val="990011"/>
+                </a:solidFill>
+                <a:latin typeface="Times New Roman" pitchFamily="34" charset="0"/>
+                <a:ea typeface="Times New Roman" pitchFamily="34" charset="-122"/>
+                <a:cs typeface="Times New Roman" pitchFamily="34" charset="-120"/>
+              </a:rPr>
+              <a:t>Expected Answer</a:t>
+            </a:r>
+            <a:endParaRPr lang="en-US" sz="3600" dirty="0"/>
+          </a:p>
+        </p:txBody>
+      </p:sp>
+      <p:sp>
+        <p:nvSpPr>
+          <p:cNvPr id="5" name="Text 2"/>
+          <p:cNvSpPr/>
+          <p:nvPr/>
+        </p:nvSpPr>
+        <p:spPr>
+          <a:xfrm>
+            <a:off x="5349240" y="1783080"/>
+            <a:ext cx="6522415" cy="4663440"/>
+          </a:xfrm>
+          <a:prstGeom prst="rect">
+            <a:avLst/>
+          </a:prstGeom>
+          <a:noFill/>
+          <a:ln/>
+        </p:spPr>
+        <p:txBody>
+          <a:bodyPr wrap="square" lIns="0" tIns="0" rIns="0" bIns="0" rtlCol="0" anchor="t"/>
+          <a:lstStyle/>
+          <a:p>
+            <a:pPr algn="l" indent="0" marL="0">
+              <a:spcAft>
+                <a:spcPts val="800"/>
+              </a:spcAft>
+              <a:buNone/>
+            </a:pPr>
+            <a:r>
+              <a:rPr lang="en-US" sz="4000" dirty="0">
+                <a:solidFill>
+                  <a:srgbClr val="111111"/>
+                </a:solidFill>
+                <a:latin typeface="Times New Roman" pitchFamily="34" charset="0"/>
+                <a:ea typeface="Times New Roman" pitchFamily="34" charset="-122"/>
+                <a:cs typeface="Times New Roman" pitchFamily="34" charset="-120"/>
+              </a:rPr>
+              <a:t>The cumulonimbus.</a:t>
+            </a:r>
+            <a:endParaRPr lang="en-US" sz="4000" dirty="0"/>
+          </a:p>
+        </p:txBody>
+      </p:sp>
+      <p:sp>
+        <p:nvSpPr>
+          <p:cNvPr id="25" name="Slide Number Placeholder 0"/>
+          <p:cNvSpPr>
+            <a:spLocks noGrp="1"/>
+          </p:cNvSpPr>
+          <p:nvPr>
+            <p:ph type="sldNum" sz="quarter" idx="4294967295"/>
+          </p:nvPr>
+        </p:nvSpPr>
+        <p:spPr>
+          <a:xfrm>
+            <a:off x="27432" y="91440"/>
+            <a:ext cx="585216" cy="475488"/>
+          </a:xfrm>
+          <a:prstGeom prst="rect">
+            <a:avLst/>
+          </a:prstGeom>
+          <a:extLst>
+            <a:ext uri="{C572A759-6A51-4108-AA02-DFA0A04FC94B}">
+              <ma14:wrappingTextBoxFlag xmlns:ma14="http://schemas.microsoft.com/office/mac/drawingml/2011/main" val="0"/>
+            </a:ext>
+          </a:extLst>
+        </p:spPr>
+        <p:txBody>
+          <a:bodyPr/>
+          <a:lstStyle>
+            <a:lvl1pPr>
+              <a:defRPr sz="2000">
+                <a:solidFill>
+                  <a:srgbClr val="FFFFFF"/>
+                </a:solidFill>
+                <a:latin typeface="Calibri"/>
+                <a:ea typeface="Calibri"/>
+                <a:cs typeface="Calibri"/>
+              </a:defRPr>
+            </a:lvl1pPr>
+          </a:lstStyle>
+          <a:p>
+            <a:pPr algn="ctr"/>
+            <a:fld id="{F7021451-1387-4CA6-816F-3879F97B5CBC}" type="slidenum">
+              <a:rPr b="1" lang="en-US"/>
+              <a:t>45</a:t>
+            </a:fld>
+            <a:endParaRPr lang="en-US"/>
+          </a:p>
+        </p:txBody>
+      </p:sp>
+    </p:spTree>
+  </p:cSld>
+  <p:clrMapOvr>
+    <a:masterClrMapping/>
+  </p:clrMapOvr>
+</p:sld>
+</file>
+
+<file path=ppt/slides/slide46.xml><?xml version="1.0" encoding="utf-8"?>
+<p:sld xmlns:a="http://schemas.openxmlformats.org/drawingml/2006/main" xmlns:r="http://schemas.openxmlformats.org/officeDocument/2006/relationships" xmlns:p="http://schemas.openxmlformats.org/presentationml/2006/main">
+  <p:cSld name="Slide 46">
+    <p:spTree>
+      <p:nvGrpSpPr>
+        <p:cNvPr id="1" name=""/>
+        <p:cNvGrpSpPr/>
+        <p:nvPr/>
+      </p:nvGrpSpPr>
+      <p:grpSpPr>
+        <a:xfrm>
+          <a:off x="0" y="0"/>
+          <a:ext cx="0" cy="0"/>
+          <a:chOff x="0" y="0"/>
+          <a:chExt cx="0" cy="0"/>
+        </a:xfrm>
+      </p:grpSpPr>
+      <p:sp>
+        <p:nvSpPr>
+          <p:cNvPr id="2" name="Text 0"/>
+          <p:cNvSpPr/>
+          <p:nvPr/>
+        </p:nvSpPr>
+        <p:spPr>
+          <a:xfrm>
+            <a:off x="457200" y="713232"/>
+            <a:ext cx="11368735" cy="274320"/>
+          </a:xfrm>
+          <a:prstGeom prst="rect">
+            <a:avLst/>
+          </a:prstGeom>
+          <a:noFill/>
+          <a:ln/>
+        </p:spPr>
+        <p:txBody>
+          <a:bodyPr wrap="square" lIns="0" tIns="0" rIns="0" bIns="0" rtlCol="0" anchor="ctr"/>
+          <a:lstStyle/>
+          <a:p>
+            <a:pPr algn="r" indent="0" marL="0">
+              <a:buNone/>
+            </a:pPr>
+            <a:r>
+              <a:rPr lang="en-US" sz="1400" b="1" dirty="0">
+                <a:solidFill>
+                  <a:srgbClr val="1C3F6E"/>
+                </a:solidFill>
+                <a:latin typeface="Calibri" pitchFamily="34" charset="0"/>
+                <a:ea typeface="Calibri" pitchFamily="34" charset="-122"/>
+                <a:cs typeface="Calibri" pitchFamily="34" charset="-120"/>
+              </a:rPr>
+              <a:t>REMEDIATION</a:t>
+            </a:r>
+            <a:endParaRPr lang="en-US" sz="1400" dirty="0"/>
+          </a:p>
+        </p:txBody>
+      </p:sp>
+      <p:pic>
+        <p:nvPicPr>
+          <p:cNvPr id="3" name="Image 0" descr="/home/claude/f4/img/minesec_sheet.png">    </p:cNvPr>
+          <p:cNvPicPr>
+            <a:picLocks noChangeAspect="1"/>
+          </p:cNvPicPr>
+          <p:nvPr/>
+        </p:nvPicPr>
+        <p:blipFill>
+          <a:blip r:embed="rId1"/>
+          <a:stretch>
+            <a:fillRect/>
+          </a:stretch>
+        </p:blipFill>
+        <p:spPr>
+          <a:xfrm>
+            <a:off x="0" y="658368"/>
+            <a:ext cx="2468880" cy="5833872"/>
+          </a:xfrm>
+          <a:prstGeom prst="rect">
+            <a:avLst/>
+          </a:prstGeom>
+        </p:spPr>
+      </p:pic>
+      <p:sp>
+        <p:nvSpPr>
+          <p:cNvPr id="4" name="Text 1"/>
+          <p:cNvSpPr/>
+          <p:nvPr/>
+        </p:nvSpPr>
+        <p:spPr>
+          <a:xfrm>
+            <a:off x="2697480" y="1005840"/>
+            <a:ext cx="9174175" cy="731520"/>
+          </a:xfrm>
+          <a:prstGeom prst="rect">
+            <a:avLst/>
+          </a:prstGeom>
+          <a:noFill/>
+          <a:ln/>
+        </p:spPr>
+        <p:txBody>
+          <a:bodyPr wrap="square" lIns="0" tIns="0" rIns="0" bIns="0" rtlCol="0" anchor="ctr">
+            <a:normAutofit/>
+          </a:bodyPr>
+          <a:lstStyle/>
+          <a:p>
+            <a:pPr algn="ctr" indent="0" marL="0">
+              <a:buNone/>
+            </a:pPr>
+            <a:r>
+              <a:rPr lang="en-US" sz="3600" b="1" dirty="0">
+                <a:solidFill>
+                  <a:srgbClr val="990011"/>
+                </a:solidFill>
+                <a:latin typeface="Times New Roman" pitchFamily="34" charset="0"/>
+                <a:ea typeface="Times New Roman" pitchFamily="34" charset="-122"/>
+                <a:cs typeface="Times New Roman" pitchFamily="34" charset="-120"/>
+              </a:rPr>
+              <a:t>Remediation</a:t>
+            </a:r>
+            <a:endParaRPr lang="en-US" sz="3600" dirty="0"/>
+          </a:p>
+        </p:txBody>
+      </p:sp>
+      <p:sp>
+        <p:nvSpPr>
+          <p:cNvPr id="5" name="Text 2"/>
+          <p:cNvSpPr/>
+          <p:nvPr/>
+        </p:nvSpPr>
+        <p:spPr>
+          <a:xfrm>
+            <a:off x="2697480" y="1783080"/>
+            <a:ext cx="9174175" cy="4663440"/>
+          </a:xfrm>
+          <a:prstGeom prst="rect">
+            <a:avLst/>
+          </a:prstGeom>
+          <a:noFill/>
+          <a:ln/>
+        </p:spPr>
+        <p:txBody>
+          <a:bodyPr wrap="square" lIns="0" tIns="0" rIns="0" bIns="0" rtlCol="0" anchor="t"/>
+          <a:lstStyle/>
+          <a:p>
+            <a:pPr algn="l" indent="0" marL="0">
+              <a:spcAft>
+                <a:spcPts val="800"/>
+              </a:spcAft>
+              <a:buNone/>
+            </a:pPr>
+            <a:r>
+              <a:rPr lang="en-US" sz="4000" b="1" dirty="0">
+                <a:solidFill>
+                  <a:srgbClr val="111111"/>
+                </a:solidFill>
+                <a:latin typeface="Times New Roman" pitchFamily="34" charset="0"/>
+                <a:ea typeface="Times New Roman" pitchFamily="34" charset="-122"/>
+                <a:cs typeface="Times New Roman" pitchFamily="34" charset="-120"/>
+              </a:rPr>
+              <a:t>Fill in the blanks:</a:t>
+            </a:r>
+            <a:endParaRPr lang="en-US" sz="4000" dirty="0"/>
+          </a:p>
+          <a:p>
+            <a:pPr algn="l" marL="342900" indent="-342900">
+              <a:spcAft>
+                <a:spcPts val="800"/>
+              </a:spcAft>
+              <a:buSzPct val="100000"/>
+              <a:buFont typeface="+mj-lt"/>
+              <a:buAutoNum type="arabicPeriod" startAt="1"/>
+            </a:pPr>
+            <a:r>
+              <a:rPr lang="en-US" sz="4000" dirty="0">
+                <a:solidFill>
+                  <a:srgbClr val="111111"/>
+                </a:solidFill>
+                <a:latin typeface="Times New Roman" pitchFamily="34" charset="0"/>
+                <a:ea typeface="Times New Roman" pitchFamily="34" charset="-122"/>
+                <a:cs typeface="Times New Roman" pitchFamily="34" charset="-120"/>
+              </a:rPr>
+              <a:t>Water vapour becoming water is ______.</a:t>
+            </a:r>
+            <a:endParaRPr lang="en-US" sz="4000" dirty="0"/>
+          </a:p>
+          <a:p>
+            <a:pPr algn="l" marL="342900" indent="-342900">
+              <a:spcAft>
+                <a:spcPts val="800"/>
+              </a:spcAft>
+              <a:buSzPct val="100000"/>
+              <a:buFont typeface="+mj-lt"/>
+              <a:buAutoNum type="arabicPeriod" startAt="1"/>
+            </a:pPr>
+            <a:r>
+              <a:rPr lang="en-US" sz="4000" dirty="0">
+                <a:solidFill>
+                  <a:srgbClr val="111111"/>
+                </a:solidFill>
+                <a:latin typeface="Times New Roman" pitchFamily="34" charset="0"/>
+                <a:ea typeface="Times New Roman" pitchFamily="34" charset="-122"/>
+                <a:cs typeface="Times New Roman" pitchFamily="34" charset="-120"/>
+              </a:rPr>
+              <a:t>Drops on grass in the morning are ______.</a:t>
+            </a:r>
+            <a:endParaRPr lang="en-US" sz="4000" dirty="0"/>
+          </a:p>
+          <a:p>
+            <a:pPr algn="l" marL="342900" indent="-342900">
+              <a:spcAft>
+                <a:spcPts val="800"/>
+              </a:spcAft>
+              <a:buSzPct val="100000"/>
+              <a:buFont typeface="+mj-lt"/>
+              <a:buAutoNum type="arabicPeriod" startAt="1"/>
+            </a:pPr>
+            <a:r>
+              <a:rPr lang="en-US" sz="4000" dirty="0">
+                <a:solidFill>
+                  <a:srgbClr val="111111"/>
+                </a:solidFill>
+                <a:latin typeface="Times New Roman" pitchFamily="34" charset="0"/>
+                <a:ea typeface="Times New Roman" pitchFamily="34" charset="-122"/>
+                <a:cs typeface="Times New Roman" pitchFamily="34" charset="-120"/>
+              </a:rPr>
+              <a:t>A cloud at ground level is ______.</a:t>
+            </a:r>
+            <a:endParaRPr lang="en-US" sz="4000" dirty="0"/>
+          </a:p>
+        </p:txBody>
+      </p:sp>
+      <p:sp>
+        <p:nvSpPr>
+          <p:cNvPr id="25" name="Slide Number Placeholder 0"/>
+          <p:cNvSpPr>
+            <a:spLocks noGrp="1"/>
+          </p:cNvSpPr>
+          <p:nvPr>
+            <p:ph type="sldNum" sz="quarter" idx="4294967295"/>
+          </p:nvPr>
+        </p:nvSpPr>
+        <p:spPr>
+          <a:xfrm>
+            <a:off x="27432" y="91440"/>
+            <a:ext cx="585216" cy="475488"/>
+          </a:xfrm>
+          <a:prstGeom prst="rect">
+            <a:avLst/>
+          </a:prstGeom>
+          <a:extLst>
+            <a:ext uri="{C572A759-6A51-4108-AA02-DFA0A04FC94B}">
+              <ma14:wrappingTextBoxFlag xmlns:ma14="http://schemas.microsoft.com/office/mac/drawingml/2011/main" val="0"/>
+            </a:ext>
+          </a:extLst>
+        </p:spPr>
+        <p:txBody>
+          <a:bodyPr/>
+          <a:lstStyle>
+            <a:lvl1pPr>
+              <a:defRPr sz="2000">
+                <a:solidFill>
+                  <a:srgbClr val="FFFFFF"/>
+                </a:solidFill>
+                <a:latin typeface="Calibri"/>
+                <a:ea typeface="Calibri"/>
+                <a:cs typeface="Calibri"/>
+              </a:defRPr>
+            </a:lvl1pPr>
+          </a:lstStyle>
+          <a:p>
+            <a:pPr algn="ctr"/>
+            <a:fld id="{F7021451-1387-4CA6-816F-3879F97B5CBC}" type="slidenum">
+              <a:rPr b="1" lang="en-US"/>
+              <a:t>46</a:t>
+            </a:fld>
+            <a:endParaRPr lang="en-US"/>
+          </a:p>
+        </p:txBody>
+      </p:sp>
+    </p:spTree>
+  </p:cSld>
+  <p:clrMapOvr>
+    <a:masterClrMapping/>
+  </p:clrMapOvr>
+</p:sld>
+</file>
+
+<file path=ppt/slides/slide47.xml><?xml version="1.0" encoding="utf-8"?>
+<p:sld xmlns:a="http://schemas.openxmlformats.org/drawingml/2006/main" xmlns:r="http://schemas.openxmlformats.org/officeDocument/2006/relationships" xmlns:p="http://schemas.openxmlformats.org/presentationml/2006/main">
+  <p:cSld name="Slide 47">
+    <p:spTree>
+      <p:nvGrpSpPr>
+        <p:cNvPr id="1" name=""/>
+        <p:cNvGrpSpPr/>
+        <p:nvPr/>
+      </p:nvGrpSpPr>
+      <p:grpSpPr>
+        <a:xfrm>
+          <a:off x="0" y="0"/>
+          <a:ext cx="0" cy="0"/>
+          <a:chOff x="0" y="0"/>
+          <a:chExt cx="0" cy="0"/>
+        </a:xfrm>
+      </p:grpSpPr>
+      <p:sp>
+        <p:nvSpPr>
+          <p:cNvPr id="2" name="Text 0"/>
+          <p:cNvSpPr/>
+          <p:nvPr/>
+        </p:nvSpPr>
+        <p:spPr>
+          <a:xfrm>
+            <a:off x="457200" y="713232"/>
+            <a:ext cx="11368735" cy="274320"/>
+          </a:xfrm>
+          <a:prstGeom prst="rect">
+            <a:avLst/>
+          </a:prstGeom>
+          <a:noFill/>
+          <a:ln/>
+        </p:spPr>
+        <p:txBody>
+          <a:bodyPr wrap="square" lIns="0" tIns="0" rIns="0" bIns="0" rtlCol="0" anchor="ctr"/>
+          <a:lstStyle/>
+          <a:p>
+            <a:pPr algn="r" indent="0" marL="0">
+              <a:buNone/>
+            </a:pPr>
+            <a:r>
+              <a:rPr lang="en-US" sz="1400" b="1" dirty="0">
+                <a:solidFill>
+                  <a:srgbClr val="1C3F6E"/>
+                </a:solidFill>
+                <a:latin typeface="Calibri" pitchFamily="34" charset="0"/>
+                <a:ea typeface="Calibri" pitchFamily="34" charset="-122"/>
+                <a:cs typeface="Calibri" pitchFamily="34" charset="-120"/>
+              </a:rPr>
+              <a:t>HOMEWORK</a:t>
+            </a:r>
+            <a:endParaRPr lang="en-US" sz="1400" dirty="0"/>
+          </a:p>
+        </p:txBody>
+      </p:sp>
+      <p:pic>
+        <p:nvPicPr>
+          <p:cNvPr id="3" name="Image 0" descr="/home/claude/f4/img/minesec_sheet.png">    </p:cNvPr>
+          <p:cNvPicPr>
+            <a:picLocks noChangeAspect="1"/>
+          </p:cNvPicPr>
+          <p:nvPr/>
+        </p:nvPicPr>
+        <p:blipFill>
+          <a:blip r:embed="rId1"/>
+          <a:stretch>
+            <a:fillRect/>
+          </a:stretch>
+        </p:blipFill>
+        <p:spPr>
+          <a:xfrm>
+            <a:off x="0" y="658368"/>
+            <a:ext cx="5120640" cy="5833872"/>
+          </a:xfrm>
+          <a:prstGeom prst="rect">
+            <a:avLst/>
+          </a:prstGeom>
+        </p:spPr>
+      </p:pic>
+      <p:sp>
+        <p:nvSpPr>
+          <p:cNvPr id="4" name="Text 1"/>
+          <p:cNvSpPr/>
+          <p:nvPr/>
+        </p:nvSpPr>
+        <p:spPr>
+          <a:xfrm>
+            <a:off x="5349240" y="1005840"/>
+            <a:ext cx="6522415" cy="731520"/>
+          </a:xfrm>
+          <a:prstGeom prst="rect">
+            <a:avLst/>
+          </a:prstGeom>
+          <a:noFill/>
+          <a:ln/>
+        </p:spPr>
+        <p:txBody>
+          <a:bodyPr wrap="square" lIns="0" tIns="0" rIns="0" bIns="0" rtlCol="0" anchor="ctr">
+            <a:normAutofit/>
+          </a:bodyPr>
+          <a:lstStyle/>
+          <a:p>
+            <a:pPr algn="ctr" indent="0" marL="0">
+              <a:buNone/>
+            </a:pPr>
+            <a:r>
+              <a:rPr lang="en-US" sz="3600" b="1" dirty="0">
+                <a:solidFill>
+                  <a:srgbClr val="990011"/>
+                </a:solidFill>
+                <a:latin typeface="Times New Roman" pitchFamily="34" charset="0"/>
+                <a:ea typeface="Times New Roman" pitchFamily="34" charset="-122"/>
+                <a:cs typeface="Times New Roman" pitchFamily="34" charset="-120"/>
+              </a:rPr>
+              <a:t>Homework</a:t>
+            </a:r>
+            <a:endParaRPr lang="en-US" sz="3600" dirty="0"/>
+          </a:p>
+        </p:txBody>
+      </p:sp>
+      <p:sp>
+        <p:nvSpPr>
+          <p:cNvPr id="5" name="Text 2"/>
+          <p:cNvSpPr/>
+          <p:nvPr/>
+        </p:nvSpPr>
+        <p:spPr>
+          <a:xfrm>
+            <a:off x="5349240" y="1783080"/>
+            <a:ext cx="6522415" cy="4663440"/>
+          </a:xfrm>
+          <a:prstGeom prst="rect">
+            <a:avLst/>
+          </a:prstGeom>
+          <a:noFill/>
+          <a:ln/>
+        </p:spPr>
+        <p:txBody>
+          <a:bodyPr wrap="square" lIns="0" tIns="0" rIns="0" bIns="0" rtlCol="0" anchor="t"/>
+          <a:lstStyle/>
+          <a:p>
+            <a:pPr algn="l" indent="0" marL="0">
+              <a:spcAft>
+                <a:spcPts val="800"/>
+              </a:spcAft>
+              <a:buNone/>
+            </a:pPr>
+            <a:r>
+              <a:rPr lang="en-US" sz="4000" dirty="0">
+                <a:solidFill>
+                  <a:srgbClr val="111111"/>
+                </a:solidFill>
+                <a:latin typeface="Times New Roman" pitchFamily="34" charset="0"/>
+                <a:ea typeface="Times New Roman" pitchFamily="34" charset="-122"/>
+                <a:cs typeface="Times New Roman" pitchFamily="34" charset="-120"/>
+              </a:rPr>
+              <a:t>During the next rain, put an empty tin with straight sides in an open place. After the rain, measure the depth of water in it with a ruler, in millimetres.</a:t>
+            </a:r>
+            <a:endParaRPr lang="en-US" sz="4000" dirty="0"/>
+          </a:p>
+        </p:txBody>
+      </p:sp>
+      <p:sp>
+        <p:nvSpPr>
+          <p:cNvPr id="25" name="Slide Number Placeholder 0"/>
+          <p:cNvSpPr>
+            <a:spLocks noGrp="1"/>
+          </p:cNvSpPr>
+          <p:nvPr>
+            <p:ph type="sldNum" sz="quarter" idx="4294967295"/>
+          </p:nvPr>
+        </p:nvSpPr>
+        <p:spPr>
+          <a:xfrm>
+            <a:off x="27432" y="91440"/>
+            <a:ext cx="585216" cy="475488"/>
+          </a:xfrm>
+          <a:prstGeom prst="rect">
+            <a:avLst/>
+          </a:prstGeom>
+          <a:extLst>
+            <a:ext uri="{C572A759-6A51-4108-AA02-DFA0A04FC94B}">
+              <ma14:wrappingTextBoxFlag xmlns:ma14="http://schemas.microsoft.com/office/mac/drawingml/2011/main" val="0"/>
+            </a:ext>
+          </a:extLst>
+        </p:spPr>
+        <p:txBody>
+          <a:bodyPr/>
+          <a:lstStyle>
+            <a:lvl1pPr>
+              <a:defRPr sz="2000">
+                <a:solidFill>
+                  <a:srgbClr val="FFFFFF"/>
+                </a:solidFill>
+                <a:latin typeface="Calibri"/>
+                <a:ea typeface="Calibri"/>
+                <a:cs typeface="Calibri"/>
+              </a:defRPr>
+            </a:lvl1pPr>
+          </a:lstStyle>
+          <a:p>
+            <a:pPr algn="ctr"/>
+            <a:fld id="{F7021451-1387-4CA6-816F-3879F97B5CBC}" type="slidenum">
+              <a:rPr b="1" lang="en-US"/>
+              <a:t>47</a:t>
+            </a:fld>
+            <a:endParaRPr lang="en-US"/>
+          </a:p>
+        </p:txBody>
+      </p:sp>
+    </p:spTree>
+  </p:cSld>
+  <p:clrMapOvr>
+    <a:masterClrMapping/>
+  </p:clrMapOvr>
+</p:sld>
+</file>
+
+<file path=ppt/slides/slide48.xml><?xml version="1.0" encoding="utf-8"?>
+<p:sld xmlns:a="http://schemas.openxmlformats.org/drawingml/2006/main" xmlns:r="http://schemas.openxmlformats.org/officeDocument/2006/relationships" xmlns:p="http://schemas.openxmlformats.org/presentationml/2006/main">
+  <p:cSld name="Slide 48">
+    <p:spTree>
+      <p:nvGrpSpPr>
+        <p:cNvPr id="1" name=""/>
+        <p:cNvGrpSpPr/>
+        <p:nvPr/>
+      </p:nvGrpSpPr>
+      <p:grpSpPr>
+        <a:xfrm>
+          <a:off x="0" y="0"/>
+          <a:ext cx="0" cy="0"/>
+          <a:chOff x="0" y="0"/>
+          <a:chExt cx="0" cy="0"/>
+        </a:xfrm>
+      </p:grpSpPr>
+      <p:sp>
+        <p:nvSpPr>
+          <p:cNvPr id="2" name="Text 0"/>
+          <p:cNvSpPr/>
+          <p:nvPr/>
+        </p:nvSpPr>
+        <p:spPr>
+          <a:xfrm>
+            <a:off x="457200" y="713232"/>
+            <a:ext cx="11368735" cy="274320"/>
+          </a:xfrm>
+          <a:prstGeom prst="rect">
+            <a:avLst/>
+          </a:prstGeom>
+          <a:noFill/>
+          <a:ln/>
+        </p:spPr>
+        <p:txBody>
+          <a:bodyPr wrap="square" lIns="0" tIns="0" rIns="0" bIns="0" rtlCol="0" anchor="ctr"/>
+          <a:lstStyle/>
+          <a:p>
+            <a:pPr algn="r" indent="0" marL="0">
+              <a:buNone/>
+            </a:pPr>
+            <a:r>
+              <a:rPr lang="en-US" sz="1400" b="1" dirty="0">
+                <a:solidFill>
+                  <a:srgbClr val="1C3F6E"/>
+                </a:solidFill>
+                <a:latin typeface="Calibri" pitchFamily="34" charset="0"/>
+                <a:ea typeface="Calibri" pitchFamily="34" charset="-122"/>
+                <a:cs typeface="Calibri" pitchFamily="34" charset="-120"/>
+              </a:rPr>
+              <a:t>NEXT LESSON</a:t>
+            </a:r>
+            <a:endParaRPr lang="en-US" sz="1400" dirty="0"/>
+          </a:p>
+        </p:txBody>
+      </p:sp>
+      <p:pic>
+        <p:nvPicPr>
+          <p:cNvPr id="3" name="Image 0" descr="/home/claude/f4/img/minesec_sheet.png">    </p:cNvPr>
+          <p:cNvPicPr>
+            <a:picLocks noChangeAspect="1"/>
+          </p:cNvPicPr>
+          <p:nvPr/>
+        </p:nvPicPr>
+        <p:blipFill>
+          <a:blip r:embed="rId1"/>
+          <a:stretch>
+            <a:fillRect/>
+          </a:stretch>
+        </p:blipFill>
+        <p:spPr>
+          <a:xfrm>
+            <a:off x="0" y="658368"/>
+            <a:ext cx="5120640" cy="5833872"/>
+          </a:xfrm>
+          <a:prstGeom prst="rect">
+            <a:avLst/>
+          </a:prstGeom>
+        </p:spPr>
+      </p:pic>
+      <p:sp>
+        <p:nvSpPr>
+          <p:cNvPr id="4" name="Text 1"/>
+          <p:cNvSpPr/>
+          <p:nvPr/>
+        </p:nvSpPr>
+        <p:spPr>
+          <a:xfrm>
+            <a:off x="5349240" y="1005840"/>
+            <a:ext cx="6522415" cy="731520"/>
+          </a:xfrm>
+          <a:prstGeom prst="rect">
+            <a:avLst/>
+          </a:prstGeom>
+          <a:noFill/>
+          <a:ln/>
+        </p:spPr>
+        <p:txBody>
+          <a:bodyPr wrap="square" lIns="0" tIns="0" rIns="0" bIns="0" rtlCol="0" anchor="ctr">
+            <a:normAutofit/>
+          </a:bodyPr>
+          <a:lstStyle/>
+          <a:p>
+            <a:pPr algn="ctr" indent="0" marL="0">
+              <a:buNone/>
+            </a:pPr>
+            <a:r>
+              <a:rPr lang="en-US" sz="3600" b="1" dirty="0">
+                <a:solidFill>
+                  <a:srgbClr val="990011"/>
+                </a:solidFill>
+                <a:latin typeface="Times New Roman" pitchFamily="34" charset="0"/>
+                <a:ea typeface="Times New Roman" pitchFamily="34" charset="-122"/>
+                <a:cs typeface="Times New Roman" pitchFamily="34" charset="-120"/>
+              </a:rPr>
+              <a:t>Next Lesson</a:t>
+            </a:r>
+            <a:endParaRPr lang="en-US" sz="3600" dirty="0"/>
+          </a:p>
+        </p:txBody>
+      </p:sp>
+      <p:sp>
+        <p:nvSpPr>
+          <p:cNvPr id="5" name="Text 2"/>
+          <p:cNvSpPr/>
+          <p:nvPr/>
+        </p:nvSpPr>
+        <p:spPr>
+          <a:xfrm>
+            <a:off x="5349240" y="1783080"/>
+            <a:ext cx="6522415" cy="4663440"/>
+          </a:xfrm>
+          <a:prstGeom prst="rect">
+            <a:avLst/>
+          </a:prstGeom>
+          <a:noFill/>
+          <a:ln/>
+        </p:spPr>
+        <p:txBody>
+          <a:bodyPr wrap="square" lIns="0" tIns="0" rIns="0" bIns="0" rtlCol="0" anchor="ctr"/>
+          <a:lstStyle/>
+          <a:p>
+            <a:pPr algn="ctr" indent="0" marL="0">
+              <a:spcAft>
+                <a:spcPts val="800"/>
+              </a:spcAft>
+              <a:buNone/>
+            </a:pPr>
+            <a:r>
+              <a:rPr lang="en-US" sz="4000" b="1" dirty="0">
+                <a:solidFill>
+                  <a:srgbClr val="111111"/>
+                </a:solidFill>
+                <a:latin typeface="Times New Roman" pitchFamily="34" charset="0"/>
+                <a:ea typeface="Times New Roman" pitchFamily="34" charset="-122"/>
+                <a:cs typeface="Times New Roman" pitchFamily="34" charset="-120"/>
+              </a:rPr>
+              <a:t>Our next lesson will be on:</a:t>
+            </a:r>
+            <a:endParaRPr lang="en-US" sz="4000" dirty="0"/>
+          </a:p>
+          <a:p>
+            <a:pPr algn="ctr" indent="0" marL="0">
+              <a:spcAft>
+                <a:spcPts val="800"/>
+              </a:spcAft>
+              <a:buNone/>
+            </a:pPr>
+            <a:r>
+              <a:rPr lang="en-US" sz="4000" b="1" dirty="0">
+                <a:solidFill>
+                  <a:srgbClr val="990011"/>
+                </a:solidFill>
+                <a:latin typeface="Times New Roman" pitchFamily="34" charset="0"/>
+                <a:ea typeface="Times New Roman" pitchFamily="34" charset="-122"/>
+                <a:cs typeface="Times New Roman" pitchFamily="34" charset="-120"/>
+              </a:rPr>
+              <a:t>Lesson 35: Precipitation</a:t>
+            </a:r>
+            <a:endParaRPr lang="en-US" sz="4000" dirty="0"/>
+          </a:p>
+        </p:txBody>
+      </p:sp>
+      <p:sp>
+        <p:nvSpPr>
+          <p:cNvPr id="25" name="Slide Number Placeholder 0"/>
+          <p:cNvSpPr>
+            <a:spLocks noGrp="1"/>
+          </p:cNvSpPr>
+          <p:nvPr>
+            <p:ph type="sldNum" sz="quarter" idx="4294967295"/>
+          </p:nvPr>
+        </p:nvSpPr>
+        <p:spPr>
+          <a:xfrm>
+            <a:off x="27432" y="91440"/>
+            <a:ext cx="585216" cy="475488"/>
+          </a:xfrm>
+          <a:prstGeom prst="rect">
+            <a:avLst/>
+          </a:prstGeom>
+          <a:extLst>
+            <a:ext uri="{C572A759-6A51-4108-AA02-DFA0A04FC94B}">
+              <ma14:wrappingTextBoxFlag xmlns:ma14="http://schemas.microsoft.com/office/mac/drawingml/2011/main" val="0"/>
+            </a:ext>
+          </a:extLst>
+        </p:spPr>
+        <p:txBody>
+          <a:bodyPr/>
+          <a:lstStyle>
+            <a:lvl1pPr>
+              <a:defRPr sz="2000">
+                <a:solidFill>
+                  <a:srgbClr val="FFFFFF"/>
+                </a:solidFill>
+                <a:latin typeface="Calibri"/>
+                <a:ea typeface="Calibri"/>
+                <a:cs typeface="Calibri"/>
+              </a:defRPr>
+            </a:lvl1pPr>
+          </a:lstStyle>
+          <a:p>
+            <a:pPr algn="ctr"/>
+            <a:fld id="{F7021451-1387-4CA6-816F-3879F97B5CBC}" type="slidenum">
+              <a:rPr b="1" lang="en-US"/>
+              <a:t>48</a:t>
+            </a:fld>
+            <a:endParaRPr lang="en-US"/>
+          </a:p>
+        </p:txBody>
+      </p:sp>
+    </p:spTree>
+  </p:cSld>
+  <p:clrMapOvr>
+    <a:masterClrMapping/>
+  </p:clrMapOvr>
+</p:sld>
+</file>
+
+<file path=ppt/slides/slide49.xml><?xml version="1.0" encoding="utf-8"?>
+<p:sld xmlns:a="http://schemas.openxmlformats.org/drawingml/2006/main" xmlns:r="http://schemas.openxmlformats.org/officeDocument/2006/relationships" xmlns:p="http://schemas.openxmlformats.org/presentationml/2006/main">
+  <p:cSld name="Slide 49">
+    <p:spTree>
+      <p:nvGrpSpPr>
+        <p:cNvPr id="1" name=""/>
+        <p:cNvGrpSpPr/>
+        <p:nvPr/>
+      </p:nvGrpSpPr>
+      <p:grpSpPr>
+        <a:xfrm>
+          <a:off x="0" y="0"/>
+          <a:ext cx="0" cy="0"/>
+          <a:chOff x="0" y="0"/>
+          <a:chExt cx="0" cy="0"/>
+        </a:xfrm>
+      </p:grpSpPr>
+      <p:sp>
+        <p:nvSpPr>
+          <p:cNvPr id="2" name="Text 0"/>
+          <p:cNvSpPr/>
+          <p:nvPr/>
+        </p:nvSpPr>
+        <p:spPr>
+          <a:xfrm>
+            <a:off x="457200" y="713232"/>
+            <a:ext cx="11368735" cy="274320"/>
+          </a:xfrm>
+          <a:prstGeom prst="rect">
+            <a:avLst/>
+          </a:prstGeom>
+          <a:noFill/>
+          <a:ln/>
+        </p:spPr>
+        <p:txBody>
+          <a:bodyPr wrap="square" lIns="0" tIns="0" rIns="0" bIns="0" rtlCol="0" anchor="ctr"/>
+          <a:lstStyle/>
+          <a:p>
+            <a:pPr algn="r" indent="0" marL="0">
+              <a:buNone/>
+            </a:pPr>
+            <a:r>
+              <a:rPr lang="en-US" sz="1400" b="1" dirty="0">
+                <a:solidFill>
+                  <a:srgbClr val="1C3F6E"/>
+                </a:solidFill>
+                <a:latin typeface="Calibri" pitchFamily="34" charset="0"/>
+                <a:ea typeface="Calibri" pitchFamily="34" charset="-122"/>
+                <a:cs typeface="Calibri" pitchFamily="34" charset="-120"/>
+              </a:rPr>
               <a:t>BILINGUAL GAME</a:t>
             </a:r>
             <a:endParaRPr lang="en-US" sz="1400" dirty="0"/>
@@ -14476,7 +17923,7 @@
       </p:sp>
       <p:graphicFrame>
         <p:nvGraphicFramePr>
-          <p:cNvPr id="41" name="Table 0"/>
+          <p:cNvPr id="50" name="Table 0"/>
           <p:cNvGraphicFramePr>
             <a:graphicFrameLocks noGrp="1"/>
           </p:cNvGraphicFramePr>
@@ -15788,7 +19235,7 @@
             <a:pPr algn="ctr"/>
             <a:fld id="{F7021451-1387-4CA6-816F-3879F97B5CBC}" type="slidenum">
               <a:rPr b="1" lang="en-US"/>
-              <a:t>40</a:t>
+              <a:t>49</a:t>
             </a:fld>
             <a:endParaRPr lang="en-US"/>
           </a:p>
@@ -15802,9 +19249,9 @@
 </p:sld>
 </file>
 
-<file path=ppt/slides/slide41.xml><?xml version="1.0" encoding="utf-8"?>
+<file path=ppt/slides/slide5.xml><?xml version="1.0" encoding="utf-8"?>
 <p:sld xmlns:a="http://schemas.openxmlformats.org/drawingml/2006/main" xmlns:r="http://schemas.openxmlformats.org/officeDocument/2006/relationships" xmlns:p="http://schemas.openxmlformats.org/presentationml/2006/main">
-  <p:cSld name="Slide 41">
+  <p:cSld name="Slide 5">
     <p:spTree>
       <p:nvGrpSpPr>
         <p:cNvPr id="1" name=""/>
@@ -15852,6 +19299,225 @@
                 <a:ea typeface="Calibri" pitchFamily="34" charset="-122"/>
                 <a:cs typeface="Calibri" pitchFamily="34" charset="-120"/>
               </a:rPr>
+              <a:t>HOMEWORK CORRECTION</a:t>
+            </a:r>
+            <a:endParaRPr lang="en-US" sz="1400" dirty="0"/>
+          </a:p>
+        </p:txBody>
+      </p:sp>
+      <p:pic>
+        <p:nvPicPr>
+          <p:cNvPr id="3" name="Image 0" descr="/home/claude/f4/img/minesec_sheet.png">    </p:cNvPr>
+          <p:cNvPicPr>
+            <a:picLocks noChangeAspect="1"/>
+          </p:cNvPicPr>
+          <p:nvPr/>
+        </p:nvPicPr>
+        <p:blipFill>
+          <a:blip r:embed="rId1"/>
+          <a:stretch>
+            <a:fillRect/>
+          </a:stretch>
+        </p:blipFill>
+        <p:spPr>
+          <a:xfrm>
+            <a:off x="0" y="658368"/>
+            <a:ext cx="5120640" cy="5833872"/>
+          </a:xfrm>
+          <a:prstGeom prst="rect">
+            <a:avLst/>
+          </a:prstGeom>
+        </p:spPr>
+      </p:pic>
+      <p:sp>
+        <p:nvSpPr>
+          <p:cNvPr id="4" name="Text 1"/>
+          <p:cNvSpPr/>
+          <p:nvPr/>
+        </p:nvSpPr>
+        <p:spPr>
+          <a:xfrm>
+            <a:off x="5349240" y="1005840"/>
+            <a:ext cx="6522415" cy="731520"/>
+          </a:xfrm>
+          <a:prstGeom prst="rect">
+            <a:avLst/>
+          </a:prstGeom>
+          <a:noFill/>
+          <a:ln/>
+        </p:spPr>
+        <p:txBody>
+          <a:bodyPr wrap="square" lIns="0" tIns="0" rIns="0" bIns="0" rtlCol="0" anchor="ctr">
+            <a:normAutofit/>
+          </a:bodyPr>
+          <a:lstStyle/>
+          <a:p>
+            <a:pPr algn="ctr" indent="0" marL="0">
+              <a:buNone/>
+            </a:pPr>
+            <a:r>
+              <a:rPr lang="en-US" sz="3600" b="1" dirty="0">
+                <a:solidFill>
+                  <a:srgbClr val="990011"/>
+                </a:solidFill>
+                <a:latin typeface="Times New Roman" pitchFamily="34" charset="0"/>
+                <a:ea typeface="Times New Roman" pitchFamily="34" charset="-122"/>
+                <a:cs typeface="Times New Roman" pitchFamily="34" charset="-120"/>
+              </a:rPr>
+              <a:t>Correction: Possible Answer</a:t>
+            </a:r>
+            <a:endParaRPr lang="en-US" sz="3600" dirty="0"/>
+          </a:p>
+        </p:txBody>
+      </p:sp>
+      <p:sp>
+        <p:nvSpPr>
+          <p:cNvPr id="5" name="Text 2"/>
+          <p:cNvSpPr/>
+          <p:nvPr/>
+        </p:nvSpPr>
+        <p:spPr>
+          <a:xfrm>
+            <a:off x="5349240" y="1783080"/>
+            <a:ext cx="6522415" cy="4663440"/>
+          </a:xfrm>
+          <a:prstGeom prst="rect">
+            <a:avLst/>
+          </a:prstGeom>
+          <a:noFill/>
+          <a:ln/>
+        </p:spPr>
+        <p:txBody>
+          <a:bodyPr wrap="square" lIns="0" tIns="0" rIns="0" bIns="0" rtlCol="0" anchor="t"/>
+          <a:lstStyle/>
+          <a:p>
+            <a:pPr algn="l" indent="0" marL="0">
+              <a:spcAft>
+                <a:spcPts val="800"/>
+              </a:spcAft>
+              <a:buNone/>
+            </a:pPr>
+            <a:r>
+              <a:rPr lang="en-US" sz="4000" dirty="0">
+                <a:solidFill>
+                  <a:srgbClr val="111111"/>
+                </a:solidFill>
+                <a:latin typeface="Times New Roman" pitchFamily="34" charset="0"/>
+                <a:ea typeface="Times New Roman" pitchFamily="34" charset="-122"/>
+                <a:cs typeface="Times New Roman" pitchFamily="34" charset="-120"/>
+              </a:rPr>
+              <a:t>Yes, there are drops of water (dew) on the grass and cars. The water came from water vapour in the air, which condensed when the air cooled during the night.</a:t>
+            </a:r>
+            <a:endParaRPr lang="en-US" sz="4000" dirty="0"/>
+          </a:p>
+        </p:txBody>
+      </p:sp>
+      <p:sp>
+        <p:nvSpPr>
+          <p:cNvPr id="25" name="Slide Number Placeholder 0"/>
+          <p:cNvSpPr>
+            <a:spLocks noGrp="1"/>
+          </p:cNvSpPr>
+          <p:nvPr>
+            <p:ph type="sldNum" sz="quarter" idx="4294967295"/>
+          </p:nvPr>
+        </p:nvSpPr>
+        <p:spPr>
+          <a:xfrm>
+            <a:off x="27432" y="91440"/>
+            <a:ext cx="585216" cy="475488"/>
+          </a:xfrm>
+          <a:prstGeom prst="rect">
+            <a:avLst/>
+          </a:prstGeom>
+          <a:extLst>
+            <a:ext uri="{C572A759-6A51-4108-AA02-DFA0A04FC94B}">
+              <ma14:wrappingTextBoxFlag xmlns:ma14="http://schemas.microsoft.com/office/mac/drawingml/2011/main" val="0"/>
+            </a:ext>
+          </a:extLst>
+        </p:spPr>
+        <p:txBody>
+          <a:bodyPr/>
+          <a:lstStyle>
+            <a:lvl1pPr>
+              <a:defRPr sz="2000">
+                <a:solidFill>
+                  <a:srgbClr val="FFFFFF"/>
+                </a:solidFill>
+                <a:latin typeface="Calibri"/>
+                <a:ea typeface="Calibri"/>
+                <a:cs typeface="Calibri"/>
+              </a:defRPr>
+            </a:lvl1pPr>
+          </a:lstStyle>
+          <a:p>
+            <a:pPr algn="ctr"/>
+            <a:fld id="{F7021451-1387-4CA6-816F-3879F97B5CBC}" type="slidenum">
+              <a:rPr b="1" lang="en-US"/>
+              <a:t>5</a:t>
+            </a:fld>
+            <a:endParaRPr lang="en-US"/>
+          </a:p>
+        </p:txBody>
+      </p:sp>
+    </p:spTree>
+  </p:cSld>
+  <p:clrMapOvr>
+    <a:masterClrMapping/>
+  </p:clrMapOvr>
+</p:sld>
+</file>
+
+<file path=ppt/slides/slide50.xml><?xml version="1.0" encoding="utf-8"?>
+<p:sld xmlns:a="http://schemas.openxmlformats.org/drawingml/2006/main" xmlns:r="http://schemas.openxmlformats.org/officeDocument/2006/relationships" xmlns:p="http://schemas.openxmlformats.org/presentationml/2006/main">
+  <p:cSld name="Slide 50">
+    <p:spTree>
+      <p:nvGrpSpPr>
+        <p:cNvPr id="1" name=""/>
+        <p:cNvGrpSpPr/>
+        <p:nvPr/>
+      </p:nvGrpSpPr>
+      <p:grpSpPr>
+        <a:xfrm>
+          <a:off x="0" y="0"/>
+          <a:ext cx="0" cy="0"/>
+          <a:chOff x="0" y="0"/>
+          <a:chExt cx="0" cy="0"/>
+        </a:xfrm>
+      </p:grpSpPr>
+      <p:sp>
+        <p:nvSpPr>
+          <p:cNvPr id="2" name="Text 0"/>
+          <p:cNvSpPr/>
+          <p:nvPr/>
+        </p:nvSpPr>
+        <p:spPr>
+          <a:xfrm>
+            <a:off x="457200" y="713232"/>
+            <a:ext cx="11368735" cy="274320"/>
+          </a:xfrm>
+          <a:prstGeom prst="rect">
+            <a:avLst/>
+          </a:prstGeom>
+          <a:noFill/>
+          <a:ln/>
+        </p:spPr>
+        <p:txBody>
+          <a:bodyPr wrap="square" lIns="0" tIns="0" rIns="0" bIns="0" rtlCol="0" anchor="ctr"/>
+          <a:lstStyle/>
+          <a:p>
+            <a:pPr algn="r" indent="0" marL="0">
+              <a:buNone/>
+            </a:pPr>
+            <a:r>
+              <a:rPr lang="en-US" sz="1400" b="1" dirty="0">
+                <a:solidFill>
+                  <a:srgbClr val="1C3F6E"/>
+                </a:solidFill>
+                <a:latin typeface="Calibri" pitchFamily="34" charset="0"/>
+                <a:ea typeface="Calibri" pitchFamily="34" charset="-122"/>
+                <a:cs typeface="Calibri" pitchFamily="34" charset="-120"/>
+              </a:rPr>
               <a:t>LOGBOOK</a:t>
             </a:r>
             <a:endParaRPr lang="en-US" sz="1400" dirty="0"/>
@@ -15899,7 +19565,7 @@
       </p:sp>
       <p:graphicFrame>
         <p:nvGraphicFramePr>
-          <p:cNvPr id="42" name="Table 0"/>
+          <p:cNvPr id="51" name="Table 0"/>
           <p:cNvGraphicFramePr>
             <a:graphicFrameLocks noGrp="1"/>
           </p:cNvGraphicFramePr>
@@ -16521,7 +20187,7 @@
             <a:pPr algn="ctr"/>
             <a:fld id="{F7021451-1387-4CA6-816F-3879F97B5CBC}" type="slidenum">
               <a:rPr b="1" lang="en-US"/>
-              <a:t>41</a:t>
+              <a:t>50</a:t>
             </a:fld>
             <a:endParaRPr lang="en-US"/>
           </a:p>
@@ -16535,9 +20201,9 @@
 </p:sld>
 </file>
 
-<file path=ppt/slides/slide42.xml><?xml version="1.0" encoding="utf-8"?>
+<file path=ppt/slides/slide51.xml><?xml version="1.0" encoding="utf-8"?>
 <p:sld xmlns:a="http://schemas.openxmlformats.org/drawingml/2006/main" xmlns:r="http://schemas.openxmlformats.org/officeDocument/2006/relationships" xmlns:p="http://schemas.openxmlformats.org/presentationml/2006/main">
-  <p:cSld name="Slide 42">
+  <p:cSld name="Slide 51">
     <p:spTree>
       <p:nvGrpSpPr>
         <p:cNvPr id="1" name=""/>
@@ -16632,7 +20298,7 @@
       </p:sp>
       <p:graphicFrame>
         <p:nvGraphicFramePr>
-          <p:cNvPr id="43" name="Table 0"/>
+          <p:cNvPr id="52" name="Table 0"/>
           <p:cNvGraphicFramePr>
             <a:graphicFrameLocks noGrp="1"/>
           </p:cNvGraphicFramePr>
@@ -16742,7 +20408,7 @@
                           <a:ea typeface="Calibri" pitchFamily="34" charset="-122"/>
                           <a:cs typeface="Calibri" pitchFamily="34" charset="-120"/>
                         </a:rPr>
-                        <a:t>Meaning of Condensation; Forms of Condensation.</a:t>
+                        <a:t>DEFINITIONS; Meaning of Condensation; Near the Ground; In the Atmosphere.</a:t>
                       </a:r>
                       <a:endParaRPr lang="en-US" sz="1600" dirty="0">
                         <a:latin typeface="Calibri" charset="0"/>
@@ -17392,7 +21058,7 @@
             <a:pPr algn="ctr"/>
             <a:fld id="{F7021451-1387-4CA6-816F-3879F97B5CBC}" type="slidenum">
               <a:rPr b="1" lang="en-US"/>
-              <a:t>42</a:t>
+              <a:t>51</a:t>
             </a:fld>
             <a:endParaRPr lang="en-US"/>
           </a:p>
@@ -17406,9 +21072,9 @@
 </p:sld>
 </file>
 
-<file path=ppt/slides/slide43.xml><?xml version="1.0" encoding="utf-8"?>
+<file path=ppt/slides/slide52.xml><?xml version="1.0" encoding="utf-8"?>
 <p:sld xmlns:a="http://schemas.openxmlformats.org/drawingml/2006/main" xmlns:r="http://schemas.openxmlformats.org/officeDocument/2006/relationships" xmlns:p="http://schemas.openxmlformats.org/presentationml/2006/main">
-  <p:cSld name="Slide 43">
+  <p:cSld name="Slide 52">
     <p:spTree>
       <p:nvGrpSpPr>
         <p:cNvPr id="1" name=""/>
@@ -17585,7 +21251,7 @@
                 <a:ea typeface="Calibri" pitchFamily="34" charset="-122"/>
                 <a:cs typeface="Calibri" pitchFamily="34" charset="-120"/>
               </a:rPr>
-              <a:t>Without the projector (Activity 1): bring a cold bottle to class.</a:t>
+              <a:t>Without the projector (Activity 1): take a cold bottle out of a cooler.</a:t>
             </a:r>
             <a:endParaRPr lang="en-US" sz="2000" dirty="0"/>
           </a:p>
@@ -17606,7 +21272,7 @@
                 <a:ea typeface="Calibri" pitchFamily="34" charset="-122"/>
                 <a:cs typeface="Calibri" pitchFamily="34" charset="-120"/>
               </a:rPr>
-              <a:t>Without the projector (Activity 2): describe a foggy morning on the Adamawa plateau.</a:t>
+              <a:t>Without the projector (Activity 2): describe a foggy morning in Ngaoundéré.</a:t>
             </a:r>
             <a:endParaRPr lang="en-US" sz="2000" dirty="0"/>
           </a:p>
@@ -17627,7 +21293,7 @@
                 <a:ea typeface="Calibri" pitchFamily="34" charset="-122"/>
                 <a:cs typeface="Calibri" pitchFamily="34" charset="-120"/>
               </a:rPr>
-              <a:t>Without the projector (Activity 3): draw a very tall cloud with a flat top.</a:t>
+              <a:t>Without the projector (Activity 3): describe storm clouds in June.</a:t>
             </a:r>
             <a:endParaRPr lang="en-US" sz="2000" dirty="0"/>
           </a:p>
@@ -17675,7 +21341,7 @@
             <a:pPr algn="ctr"/>
             <a:fld id="{F7021451-1387-4CA6-816F-3879F97B5CBC}" type="slidenum">
               <a:rPr b="1" lang="en-US"/>
-              <a:t>43</a:t>
+              <a:t>52</a:t>
             </a:fld>
             <a:endParaRPr lang="en-US"/>
           </a:p>
@@ -17689,9 +21355,9 @@
 </p:sld>
 </file>
 
-<file path=ppt/slides/slide44.xml><?xml version="1.0" encoding="utf-8"?>
+<file path=ppt/slides/slide53.xml><?xml version="1.0" encoding="utf-8"?>
 <p:sld xmlns:a="http://schemas.openxmlformats.org/drawingml/2006/main" xmlns:r="http://schemas.openxmlformats.org/officeDocument/2006/relationships" xmlns:p="http://schemas.openxmlformats.org/presentationml/2006/main">
-  <p:cSld name="Slide 44">
+  <p:cSld name="Slide 53">
     <p:spTree>
       <p:nvGrpSpPr>
         <p:cNvPr id="1" name=""/>
@@ -17762,7 +21428,7 @@
         <p:spPr>
           <a:xfrm>
             <a:off x="0" y="658368"/>
-            <a:ext cx="3840480" cy="5833872"/>
+            <a:ext cx="1463040" cy="5833872"/>
           </a:xfrm>
           <a:prstGeom prst="rect">
             <a:avLst/>
@@ -17777,8 +21443,8 @@
         </p:nvSpPr>
         <p:spPr>
           <a:xfrm>
-            <a:off x="4069080" y="1005840"/>
-            <a:ext cx="7802575" cy="731520"/>
+            <a:off x="1691640" y="1005840"/>
+            <a:ext cx="10180015" cy="731520"/>
           </a:xfrm>
           <a:prstGeom prst="rect">
             <a:avLst/>
@@ -17818,8 +21484,8 @@
         </p:nvSpPr>
         <p:spPr>
           <a:xfrm>
-            <a:off x="4069080" y="1783080"/>
-            <a:ext cx="7802575" cy="4663440"/>
+            <a:off x="1691640" y="1783080"/>
+            <a:ext cx="10180015" cy="4663440"/>
           </a:xfrm>
           <a:prstGeom prst="rect">
             <a:avLst/>
@@ -17952,6 +21618,48 @@
                 <a:ea typeface="Calibri" pitchFamily="34" charset="-122"/>
                 <a:cs typeface="Calibri" pitchFamily="34" charset="-120"/>
               </a:rPr>
+              <a:t>Photo, board summary (Dew): “Dew drops on grass” by Ervins Strauhmanis, CC BY 2.0, via Flickr (https://www.flickr.com/photos/76523360@N03/9537409567)</a:t>
+            </a:r>
+            <a:endParaRPr lang="en-US" sz="1800" dirty="0"/>
+          </a:p>
+          <a:p>
+            <a:pPr algn="l" marL="342900" indent="-342900">
+              <a:spcAft>
+                <a:spcPts val="800"/>
+              </a:spcAft>
+              <a:buSzPct val="100000"/>
+              <a:buChar char="•"/>
+            </a:pPr>
+            <a:r>
+              <a:rPr lang="en-US" sz="1800" dirty="0">
+                <a:solidFill>
+                  <a:srgbClr val="111111"/>
+                </a:solidFill>
+                <a:latin typeface="Calibri" pitchFamily="34" charset="0"/>
+                <a:ea typeface="Calibri" pitchFamily="34" charset="-122"/>
+                <a:cs typeface="Calibri" pitchFamily="34" charset="-120"/>
+              </a:rPr>
+              <a:t>Photo, board summary (Cumulus): “Epic Cloud (Explored)” by Christina Ann VanMeter, CC BY-NC 2.0, via Flickr (https://www.flickr.com/photos/54129831@N02/6984912657)</a:t>
+            </a:r>
+            <a:endParaRPr lang="en-US" sz="1800" dirty="0"/>
+          </a:p>
+          <a:p>
+            <a:pPr algn="l" marL="342900" indent="-342900">
+              <a:spcAft>
+                <a:spcPts val="800"/>
+              </a:spcAft>
+              <a:buSzPct val="100000"/>
+              <a:buChar char="•"/>
+            </a:pPr>
+            <a:r>
+              <a:rPr lang="en-US" sz="1800" dirty="0">
+                <a:solidFill>
+                  <a:srgbClr val="111111"/>
+                </a:solidFill>
+                <a:latin typeface="Calibri" pitchFamily="34" charset="0"/>
+                <a:ea typeface="Calibri" pitchFamily="34" charset="-122"/>
+                <a:cs typeface="Calibri" pitchFamily="34" charset="-120"/>
+              </a:rPr>
               <a:t>Diagrams and animations: drawn for this lesson (Geography Department).</a:t>
             </a:r>
             <a:endParaRPr lang="en-US" sz="1800" dirty="0"/>
@@ -18000,226 +21708,7 @@
             <a:pPr algn="ctr"/>
             <a:fld id="{F7021451-1387-4CA6-816F-3879F97B5CBC}" type="slidenum">
               <a:rPr b="1" lang="en-US"/>
-              <a:t>44</a:t>
-            </a:fld>
-            <a:endParaRPr lang="en-US"/>
-          </a:p>
-        </p:txBody>
-      </p:sp>
-    </p:spTree>
-  </p:cSld>
-  <p:clrMapOvr>
-    <a:masterClrMapping/>
-  </p:clrMapOvr>
-</p:sld>
-</file>
-
-<file path=ppt/slides/slide5.xml><?xml version="1.0" encoding="utf-8"?>
-<p:sld xmlns:a="http://schemas.openxmlformats.org/drawingml/2006/main" xmlns:r="http://schemas.openxmlformats.org/officeDocument/2006/relationships" xmlns:p="http://schemas.openxmlformats.org/presentationml/2006/main">
-  <p:cSld name="Slide 5">
-    <p:spTree>
-      <p:nvGrpSpPr>
-        <p:cNvPr id="1" name=""/>
-        <p:cNvGrpSpPr/>
-        <p:nvPr/>
-      </p:nvGrpSpPr>
-      <p:grpSpPr>
-        <a:xfrm>
-          <a:off x="0" y="0"/>
-          <a:ext cx="0" cy="0"/>
-          <a:chOff x="0" y="0"/>
-          <a:chExt cx="0" cy="0"/>
-        </a:xfrm>
-      </p:grpSpPr>
-      <p:sp>
-        <p:nvSpPr>
-          <p:cNvPr id="2" name="Text 0"/>
-          <p:cNvSpPr/>
-          <p:nvPr/>
-        </p:nvSpPr>
-        <p:spPr>
-          <a:xfrm>
-            <a:off x="457200" y="713232"/>
-            <a:ext cx="11368735" cy="274320"/>
-          </a:xfrm>
-          <a:prstGeom prst="rect">
-            <a:avLst/>
-          </a:prstGeom>
-          <a:noFill/>
-          <a:ln/>
-        </p:spPr>
-        <p:txBody>
-          <a:bodyPr wrap="square" lIns="0" tIns="0" rIns="0" bIns="0" rtlCol="0" anchor="ctr"/>
-          <a:lstStyle/>
-          <a:p>
-            <a:pPr algn="r" indent="0" marL="0">
-              <a:buNone/>
-            </a:pPr>
-            <a:r>
-              <a:rPr lang="en-US" sz="1400" b="1" dirty="0">
-                <a:solidFill>
-                  <a:srgbClr val="1C3F6E"/>
-                </a:solidFill>
-                <a:latin typeface="Calibri" pitchFamily="34" charset="0"/>
-                <a:ea typeface="Calibri" pitchFamily="34" charset="-122"/>
-                <a:cs typeface="Calibri" pitchFamily="34" charset="-120"/>
-              </a:rPr>
-              <a:t>HOMEWORK CORRECTION</a:t>
-            </a:r>
-            <a:endParaRPr lang="en-US" sz="1400" dirty="0"/>
-          </a:p>
-        </p:txBody>
-      </p:sp>
-      <p:pic>
-        <p:nvPicPr>
-          <p:cNvPr id="3" name="Image 0" descr="/home/claude/f4/img/minesec_sheet.png">    </p:cNvPr>
-          <p:cNvPicPr>
-            <a:picLocks noChangeAspect="1"/>
-          </p:cNvPicPr>
-          <p:nvPr/>
-        </p:nvPicPr>
-        <p:blipFill>
-          <a:blip r:embed="rId1"/>
-          <a:stretch>
-            <a:fillRect/>
-          </a:stretch>
-        </p:blipFill>
-        <p:spPr>
-          <a:xfrm>
-            <a:off x="0" y="658368"/>
-            <a:ext cx="5120640" cy="5833872"/>
-          </a:xfrm>
-          <a:prstGeom prst="rect">
-            <a:avLst/>
-          </a:prstGeom>
-        </p:spPr>
-      </p:pic>
-      <p:sp>
-        <p:nvSpPr>
-          <p:cNvPr id="4" name="Text 1"/>
-          <p:cNvSpPr/>
-          <p:nvPr/>
-        </p:nvSpPr>
-        <p:spPr>
-          <a:xfrm>
-            <a:off x="5349240" y="1005840"/>
-            <a:ext cx="6522415" cy="731520"/>
-          </a:xfrm>
-          <a:prstGeom prst="rect">
-            <a:avLst/>
-          </a:prstGeom>
-          <a:noFill/>
-          <a:ln/>
-        </p:spPr>
-        <p:txBody>
-          <a:bodyPr wrap="square" lIns="0" tIns="0" rIns="0" bIns="0" rtlCol="0" anchor="ctr">
-            <a:normAutofit/>
-          </a:bodyPr>
-          <a:lstStyle/>
-          <a:p>
-            <a:pPr algn="ctr" indent="0" marL="0">
-              <a:buNone/>
-            </a:pPr>
-            <a:r>
-              <a:rPr lang="en-US" sz="3600" b="1" dirty="0">
-                <a:solidFill>
-                  <a:srgbClr val="990011"/>
-                </a:solidFill>
-                <a:latin typeface="Times New Roman" pitchFamily="34" charset="0"/>
-                <a:ea typeface="Times New Roman" pitchFamily="34" charset="-122"/>
-                <a:cs typeface="Times New Roman" pitchFamily="34" charset="-120"/>
-              </a:rPr>
-              <a:t>Correction: Possible Answer</a:t>
-            </a:r>
-            <a:endParaRPr lang="en-US" sz="3600" dirty="0"/>
-          </a:p>
-        </p:txBody>
-      </p:sp>
-      <p:sp>
-        <p:nvSpPr>
-          <p:cNvPr id="5" name="Text 2"/>
-          <p:cNvSpPr/>
-          <p:nvPr/>
-        </p:nvSpPr>
-        <p:spPr>
-          <a:xfrm>
-            <a:off x="5349240" y="1783080"/>
-            <a:ext cx="6522415" cy="4663440"/>
-          </a:xfrm>
-          <a:prstGeom prst="rect">
-            <a:avLst/>
-          </a:prstGeom>
-          <a:noFill/>
-          <a:ln/>
-        </p:spPr>
-        <p:txBody>
-          <a:bodyPr wrap="square" lIns="0" tIns="0" rIns="0" bIns="0" rtlCol="0" anchor="t"/>
-          <a:lstStyle/>
-          <a:p>
-            <a:pPr algn="l" indent="0" marL="0">
-              <a:spcAft>
-                <a:spcPts val="800"/>
-              </a:spcAft>
-              <a:buNone/>
-            </a:pPr>
-            <a:r>
-              <a:rPr lang="en-US" sz="4000" dirty="0">
-                <a:solidFill>
-                  <a:srgbClr val="111111"/>
-                </a:solidFill>
-                <a:latin typeface="Times New Roman" pitchFamily="34" charset="0"/>
-                <a:ea typeface="Times New Roman" pitchFamily="34" charset="-122"/>
-                <a:cs typeface="Times New Roman" pitchFamily="34" charset="-120"/>
-              </a:rPr>
-              <a:t>Yes, there are drops of water (dew) on the grass and cars. The water came from water vapour in the air, which condensed when the air cooled during the night.</a:t>
-            </a:r>
-            <a:endParaRPr lang="en-US" sz="4000" dirty="0"/>
-          </a:p>
-        </p:txBody>
-      </p:sp>
-      <p:sp>
-        <p:nvSpPr>
-          <p:cNvPr id="25" name="Slide Number Placeholder 0"/>
-          <p:cNvSpPr>
-            <a:spLocks noGrp="1"/>
-          </p:cNvSpPr>
-          <p:nvPr>
-            <p:ph type="sldNum" sz="quarter" idx="4294967295"/>
-          </p:nvPr>
-        </p:nvSpPr>
-        <p:spPr>
-          <a:xfrm>
-            <a:off x="27432" y="91440"/>
-            <a:ext cx="585216" cy="475488"/>
-          </a:xfrm>
-          <a:prstGeom prst="rect">
-            <a:avLst/>
-          </a:prstGeom>
-          <a:extLst>
-            <a:ext uri="{C572A759-6A51-4108-AA02-DFA0A04FC94B}">
-              <ma14:wrappingTextBoxFlag xmlns:ma14="http://schemas.microsoft.com/office/mac/drawingml/2011/main" val="0"/>
-            </a:ext>
-          </a:extLst>
-        </p:spPr>
-        <p:txBody>
-          <a:bodyPr/>
-          <a:lstStyle>
-            <a:lvl1pPr>
-              <a:defRPr sz="2000">
-                <a:solidFill>
-                  <a:srgbClr val="FFFFFF"/>
-                </a:solidFill>
-                <a:latin typeface="Calibri"/>
-                <a:ea typeface="Calibri"/>
-                <a:cs typeface="Calibri"/>
-              </a:defRPr>
-            </a:lvl1pPr>
-          </a:lstStyle>
-          <a:p>
-            <a:pPr algn="ctr"/>
-            <a:fld id="{F7021451-1387-4CA6-816F-3879F97B5CBC}" type="slidenum">
-              <a:rPr b="1" lang="en-US"/>
-              <a:t>5</a:t>
+              <a:t>53</a:t>
             </a:fld>
             <a:endParaRPr lang="en-US"/>
           </a:p>

--- a/lecons/F3/38_FORM4_LESSON34_Condensation.pptx
+++ b/lecons/F3/38_FORM4_LESSON34_Condensation.pptx
@@ -3458,7 +3458,7 @@
           <a:p>
             <a:r>
               <a:rPr lang="en-US" dirty="0"/>
-              <a:t>Before we start the new lesson, let us correct the homework I gave you at the end of Lesson 33: Weather Elements: Humidity, Wind, Pressure and Sunshine. The question was: Early tomorrow morning, look at the grass, leaves or cars near your house. Write down whether you see drops of water on them, and where you think the water came from. Take out your exercise books.</a:t>
+              <a:t>Before we start the new lesson, let us correct the homework I gave you at the end of Lesson 33: Weather Elements: Humidity, Wind, Pressure and Sunshine. The question was: Define condensation. Take out your exercise books.</a:t>
             </a:r>
             <a:endParaRPr lang="en-US" dirty="0"/>
           </a:p>
@@ -4162,7 +4162,7 @@
           <a:p>
             <a:r>
               <a:rPr lang="en-US" dirty="0"/>
-              <a:t>For your homework: During the next rain, put an empty tin with straight sides in an open place. After the rain, measure the depth of water in it with a ruler, in millimetres. We shall correct it at the beginning of our next lesson.</a:t>
+              <a:t>For your homework: Name the three types of rainfall. We shall correct it at the beginning of our next lesson.</a:t>
             </a:r>
             <a:endParaRPr lang="en-US" dirty="0"/>
           </a:p>
@@ -4426,7 +4426,7 @@
           <a:p>
             <a:r>
               <a:rPr lang="en-US" dirty="0"/>
-              <a:t>Here is a good answer. Yes, there are drops of water (dew) on the grass and cars. The water came from water vapour in the air, which condensed when the air cooled during the night. Compare it with your own answer and correct your work in red.</a:t>
+              <a:t>Here is a good answer. It is the change of water vapour into liquid water. Compare it with your own answer and correct your work in red.</a:t>
             </a:r>
             <a:endParaRPr lang="en-US" dirty="0"/>
           </a:p>
@@ -15409,7 +15409,7 @@
         <p:spPr>
           <a:xfrm>
             <a:off x="0" y="658368"/>
-            <a:ext cx="2468880" cy="5833872"/>
+            <a:ext cx="5120640" cy="5833872"/>
           </a:xfrm>
           <a:prstGeom prst="rect">
             <a:avLst/>
@@ -15424,8 +15424,8 @@
         </p:nvSpPr>
         <p:spPr>
           <a:xfrm>
-            <a:off x="2697480" y="1005840"/>
-            <a:ext cx="9174175" cy="731520"/>
+            <a:off x="5349240" y="1005840"/>
+            <a:ext cx="6522415" cy="731520"/>
           </a:xfrm>
           <a:prstGeom prst="rect">
             <a:avLst/>
@@ -15465,8 +15465,8 @@
         </p:nvSpPr>
         <p:spPr>
           <a:xfrm>
-            <a:off x="2697480" y="1783080"/>
-            <a:ext cx="9174175" cy="4663440"/>
+            <a:off x="5349240" y="1783080"/>
+            <a:ext cx="6522415" cy="4663440"/>
           </a:xfrm>
           <a:prstGeom prst="rect">
             <a:avLst/>
@@ -15513,7 +15513,7 @@
                 <a:ea typeface="Times New Roman" pitchFamily="34" charset="-122"/>
                 <a:cs typeface="Times New Roman" pitchFamily="34" charset="-120"/>
               </a:rPr>
-              <a:t>Early tomorrow morning, look at the grass, leaves or cars near your house. Write down whether you see drops of water on them, and where you think the water came from.</a:t>
+              <a:t>Define condensation.</a:t>
             </a:r>
             <a:endParaRPr lang="en-US" sz="4000" dirty="0"/>
           </a:p>
@@ -17525,7 +17525,7 @@
                 <a:ea typeface="Times New Roman" pitchFamily="34" charset="-122"/>
                 <a:cs typeface="Times New Roman" pitchFamily="34" charset="-120"/>
               </a:rPr>
-              <a:t>During the next rain, put an empty tin with straight sides in an open place. After the rain, measure the depth of water in it with a ruler, in millimetres.</a:t>
+              <a:t>Name the three types of rainfall.</a:t>
             </a:r>
             <a:endParaRPr lang="en-US" sz="4000" dirty="0"/>
           </a:p>
@@ -19406,7 +19406,7 @@
                 <a:ea typeface="Times New Roman" pitchFamily="34" charset="-122"/>
                 <a:cs typeface="Times New Roman" pitchFamily="34" charset="-120"/>
               </a:rPr>
-              <a:t>Yes, there are drops of water (dew) on the grass and cars. The water came from water vapour in the air, which condensed when the air cooled during the night.</a:t>
+              <a:t>It is the change of water vapour into liquid water.</a:t>
             </a:r>
             <a:endParaRPr lang="en-US" sz="4000" dirty="0"/>
           </a:p>
@@ -20684,7 +20684,7 @@
                           <a:ea typeface="Calibri" pitchFamily="34" charset="-122"/>
                           <a:cs typeface="Calibri" pitchFamily="34" charset="-120"/>
                         </a:rPr>
-                        <a:t>During the next rain, put an empty tin with straight sides in an open place. After the rain, measure the depth of water in it with a ruler, in millimetres.</a:t>
+                        <a:t>Name the three types of rainfall.</a:t>
                       </a:r>
                       <a:endParaRPr lang="en-US" sz="1600" dirty="0">
                         <a:latin typeface="Calibri" charset="0"/>
